--- a/docs/presentacion/ReglasDeNegocio_VetPetConnect.pptx
+++ b/docs/presentacion/ReglasDeNegocio_VetPetConnect.pptx
@@ -18,9 +18,16 @@
     <p:sldId id="266" r:id="rId12"/>
     <p:sldId id="267" r:id="rId13"/>
     <p:sldId id="268" r:id="rId14"/>
+    <p:sldId id="269" r:id="rId15"/>
+    <p:sldId id="270" r:id="rId16"/>
+    <p:sldId id="271" r:id="rId17"/>
+    <p:sldId id="272" r:id="rId18"/>
+    <p:sldId id="273" r:id="rId19"/>
+    <p:sldId id="274" r:id="rId20"/>
+    <p:sldId id="275" r:id="rId21"/>
   </p:sldIdLst>
   <p:notesMasterIdLst>
-    <p:notesMasterId r:id="rId15"/>
+    <p:notesMasterId r:id="rId22"/>
   </p:notesMasterIdLst>
   <p:sldSz cx="12192000" cy="6858000"/>
   <p:notesSz cx="6858000" cy="12192000"/>
@@ -884,7 +891,7 @@
           <a:p>
             <a:r>
               <a:rPr lang="en-US" dirty="0"/>
-              <a:t>Lo importante de este caso: la venta no se registra a medias. O se cumple la regla completa, o no queda rastro de la operación.</a:t>
+              <a:t>Captura tomada del prototipo en funcionamiento. El marco y la chapa se dibujan desde el propio DOM sobre los elementos que aplican cada regla, así que señalan el control real y no una anotación puesta a mano.</a:t>
             </a:r>
             <a:endParaRPr lang="en-US" dirty="0"/>
           </a:p>
@@ -972,7 +979,7 @@
           <a:p>
             <a:r>
               <a:rPr lang="en-US" dirty="0"/>
-              <a:t>Este es el mejor ejemplo para explicar por qué la concurrencia obliga a bajar la regla al motor. Si el profesor pregunta por el RNF-03, esta es la respuesta.</a:t>
+              <a:t>Captura tomada del prototipo en funcionamiento. El marco y la chapa se dibujan desde el propio DOM sobre los elementos que aplican cada regla, así que señalan el control real y no una anotación puesta a mano.</a:t>
             </a:r>
             <a:endParaRPr lang="en-US" dirty="0"/>
           </a:p>
@@ -1060,7 +1067,7 @@
           <a:p>
             <a:r>
               <a:rPr lang="en-US" dirty="0"/>
-              <a:t>Cierre del argumento. La aplicación valida por cortesía con el usuario; la base de datos valida por obligación con el negocio.</a:t>
+              <a:t>Captura tomada del prototipo en funcionamiento. El marco y la chapa se dibujan desde el propio DOM sobre los elementos que aplican cada regla, así que señalan el control real y no una anotación puesta a mano.</a:t>
             </a:r>
             <a:endParaRPr lang="en-US" dirty="0"/>
           </a:p>
@@ -1148,7 +1155,7 @@
           <a:p>
             <a:r>
               <a:rPr lang="en-US" dirty="0"/>
-              <a:t>Cerrar con la idea de fondo: el trabajo no solo lista reglas de negocio, las deja implementadas y verificables en el repositorio.</a:t>
+              <a:t>Captura tomada del prototipo en funcionamiento. El marco y la chapa se dibujan desde el propio DOM sobre los elementos que aplican cada regla, así que señalan el control real y no una anotación puesta a mano.</a:t>
             </a:r>
             <a:endParaRPr lang="en-US" dirty="0"/>
           </a:p>
@@ -1172,6 +1179,534 @@
             <a:fld id="{F7021451-1387-4CA6-816F-3879F97B5CBC}" type="slidenum">
               <a:rPr lang="en-US"/>
               <a:t>13</a:t>
+            </a:fld>
+            <a:endParaRPr lang="en-US"/>
+          </a:p>
+        </p:txBody>
+      </p:sp>
+    </p:spTree>
+    <p:extLst>
+      <p:ext uri="{BB962C8B-B14F-4D97-AF65-F5344CB8AC3E}">
+        <p14:creationId xmlns:p14="http://schemas.microsoft.com/office/powerpoint/2010/main" val="1024086991"/>
+      </p:ext>
+    </p:extLst>
+  </p:cSld>
+  <p:clrMapOvr>
+    <a:masterClrMapping/>
+  </p:clrMapOvr>
+</p:notes>
+</file>
+
+<file path=ppt/notesSlides/notesSlide14.xml><?xml version="1.0" encoding="utf-8"?>
+<p:notes xmlns:a="http://schemas.openxmlformats.org/drawingml/2006/main" xmlns:r="http://schemas.openxmlformats.org/officeDocument/2006/relationships" xmlns:p="http://schemas.openxmlformats.org/presentationml/2006/main">
+  <p:cSld>
+    <p:spTree>
+      <p:nvGrpSpPr>
+        <p:cNvPr id="1" name=""/>
+        <p:cNvGrpSpPr/>
+        <p:nvPr/>
+      </p:nvGrpSpPr>
+      <p:grpSpPr>
+        <a:xfrm>
+          <a:off x="0" y="0"/>
+          <a:ext cx="0" cy="0"/>
+          <a:chOff x="0" y="0"/>
+          <a:chExt cx="0" cy="0"/>
+        </a:xfrm>
+      </p:grpSpPr>
+      <p:sp>
+        <p:nvSpPr>
+          <p:cNvPr id="2" name="Slide Image Placeholder 1"/>
+          <p:cNvSpPr>
+            <a:spLocks noGrp="1" noRot="1" noChangeAspect="1"/>
+          </p:cNvSpPr>
+          <p:nvPr>
+            <p:ph type="sldImg"/>
+          </p:nvPr>
+        </p:nvSpPr>
+        <p:spPr/>
+      </p:sp>
+      <p:sp>
+        <p:nvSpPr>
+          <p:cNvPr id="3" name="Notes Placeholder 2"/>
+          <p:cNvSpPr>
+            <a:spLocks noGrp="1"/>
+          </p:cNvSpPr>
+          <p:nvPr>
+            <p:ph type="body" idx="1"/>
+          </p:nvPr>
+        </p:nvSpPr>
+        <p:spPr/>
+        <p:txBody>
+          <a:bodyPr/>
+          <a:lstStyle/>
+          <a:p>
+            <a:r>
+              <a:rPr lang="en-US" dirty="0"/>
+              <a:t>Captura tomada del prototipo en funcionamiento. El marco y la chapa se dibujan desde el propio DOM sobre los elementos que aplican cada regla, así que señalan el control real y no una anotación puesta a mano.</a:t>
+            </a:r>
+            <a:endParaRPr lang="en-US" dirty="0"/>
+          </a:p>
+        </p:txBody>
+      </p:sp>
+      <p:sp>
+        <p:nvSpPr>
+          <p:cNvPr id="4" name="Slide Number Placeholder 3"/>
+          <p:cNvSpPr>
+            <a:spLocks noGrp="1"/>
+          </p:cNvSpPr>
+          <p:nvPr>
+            <p:ph type="sldNum" sz="quarter" idx="10"/>
+          </p:nvPr>
+        </p:nvSpPr>
+        <p:spPr/>
+        <p:txBody>
+          <a:bodyPr/>
+          <a:lstStyle/>
+          <a:p>
+            <a:fld id="{F7021451-1387-4CA6-816F-3879F97B5CBC}" type="slidenum">
+              <a:rPr lang="en-US"/>
+              <a:t>14</a:t>
+            </a:fld>
+            <a:endParaRPr lang="en-US"/>
+          </a:p>
+        </p:txBody>
+      </p:sp>
+    </p:spTree>
+    <p:extLst>
+      <p:ext uri="{BB962C8B-B14F-4D97-AF65-F5344CB8AC3E}">
+        <p14:creationId xmlns:p14="http://schemas.microsoft.com/office/powerpoint/2010/main" val="1024086991"/>
+      </p:ext>
+    </p:extLst>
+  </p:cSld>
+  <p:clrMapOvr>
+    <a:masterClrMapping/>
+  </p:clrMapOvr>
+</p:notes>
+</file>
+
+<file path=ppt/notesSlides/notesSlide15.xml><?xml version="1.0" encoding="utf-8"?>
+<p:notes xmlns:a="http://schemas.openxmlformats.org/drawingml/2006/main" xmlns:r="http://schemas.openxmlformats.org/officeDocument/2006/relationships" xmlns:p="http://schemas.openxmlformats.org/presentationml/2006/main">
+  <p:cSld>
+    <p:spTree>
+      <p:nvGrpSpPr>
+        <p:cNvPr id="1" name=""/>
+        <p:cNvGrpSpPr/>
+        <p:nvPr/>
+      </p:nvGrpSpPr>
+      <p:grpSpPr>
+        <a:xfrm>
+          <a:off x="0" y="0"/>
+          <a:ext cx="0" cy="0"/>
+          <a:chOff x="0" y="0"/>
+          <a:chExt cx="0" cy="0"/>
+        </a:xfrm>
+      </p:grpSpPr>
+      <p:sp>
+        <p:nvSpPr>
+          <p:cNvPr id="2" name="Slide Image Placeholder 1"/>
+          <p:cNvSpPr>
+            <a:spLocks noGrp="1" noRot="1" noChangeAspect="1"/>
+          </p:cNvSpPr>
+          <p:nvPr>
+            <p:ph type="sldImg"/>
+          </p:nvPr>
+        </p:nvSpPr>
+        <p:spPr/>
+      </p:sp>
+      <p:sp>
+        <p:nvSpPr>
+          <p:cNvPr id="3" name="Notes Placeholder 2"/>
+          <p:cNvSpPr>
+            <a:spLocks noGrp="1"/>
+          </p:cNvSpPr>
+          <p:nvPr>
+            <p:ph type="body" idx="1"/>
+          </p:nvPr>
+        </p:nvSpPr>
+        <p:spPr/>
+        <p:txBody>
+          <a:bodyPr/>
+          <a:lstStyle/>
+          <a:p>
+            <a:r>
+              <a:rPr lang="en-US" dirty="0"/>
+              <a:t>Captura tomada del prototipo en funcionamiento. El marco y la chapa se dibujan desde el propio DOM sobre los elementos que aplican cada regla, así que señalan el control real y no una anotación puesta a mano.</a:t>
+            </a:r>
+            <a:endParaRPr lang="en-US" dirty="0"/>
+          </a:p>
+        </p:txBody>
+      </p:sp>
+      <p:sp>
+        <p:nvSpPr>
+          <p:cNvPr id="4" name="Slide Number Placeholder 3"/>
+          <p:cNvSpPr>
+            <a:spLocks noGrp="1"/>
+          </p:cNvSpPr>
+          <p:nvPr>
+            <p:ph type="sldNum" sz="quarter" idx="10"/>
+          </p:nvPr>
+        </p:nvSpPr>
+        <p:spPr/>
+        <p:txBody>
+          <a:bodyPr/>
+          <a:lstStyle/>
+          <a:p>
+            <a:fld id="{F7021451-1387-4CA6-816F-3879F97B5CBC}" type="slidenum">
+              <a:rPr lang="en-US"/>
+              <a:t>15</a:t>
+            </a:fld>
+            <a:endParaRPr lang="en-US"/>
+          </a:p>
+        </p:txBody>
+      </p:sp>
+    </p:spTree>
+    <p:extLst>
+      <p:ext uri="{BB962C8B-B14F-4D97-AF65-F5344CB8AC3E}">
+        <p14:creationId xmlns:p14="http://schemas.microsoft.com/office/powerpoint/2010/main" val="1024086991"/>
+      </p:ext>
+    </p:extLst>
+  </p:cSld>
+  <p:clrMapOvr>
+    <a:masterClrMapping/>
+  </p:clrMapOvr>
+</p:notes>
+</file>
+
+<file path=ppt/notesSlides/notesSlide16.xml><?xml version="1.0" encoding="utf-8"?>
+<p:notes xmlns:a="http://schemas.openxmlformats.org/drawingml/2006/main" xmlns:r="http://schemas.openxmlformats.org/officeDocument/2006/relationships" xmlns:p="http://schemas.openxmlformats.org/presentationml/2006/main">
+  <p:cSld>
+    <p:spTree>
+      <p:nvGrpSpPr>
+        <p:cNvPr id="1" name=""/>
+        <p:cNvGrpSpPr/>
+        <p:nvPr/>
+      </p:nvGrpSpPr>
+      <p:grpSpPr>
+        <a:xfrm>
+          <a:off x="0" y="0"/>
+          <a:ext cx="0" cy="0"/>
+          <a:chOff x="0" y="0"/>
+          <a:chExt cx="0" cy="0"/>
+        </a:xfrm>
+      </p:grpSpPr>
+      <p:sp>
+        <p:nvSpPr>
+          <p:cNvPr id="2" name="Slide Image Placeholder 1"/>
+          <p:cNvSpPr>
+            <a:spLocks noGrp="1" noRot="1" noChangeAspect="1"/>
+          </p:cNvSpPr>
+          <p:nvPr>
+            <p:ph type="sldImg"/>
+          </p:nvPr>
+        </p:nvSpPr>
+        <p:spPr/>
+      </p:sp>
+      <p:sp>
+        <p:nvSpPr>
+          <p:cNvPr id="3" name="Notes Placeholder 2"/>
+          <p:cNvSpPr>
+            <a:spLocks noGrp="1"/>
+          </p:cNvSpPr>
+          <p:nvPr>
+            <p:ph type="body" idx="1"/>
+          </p:nvPr>
+        </p:nvSpPr>
+        <p:spPr/>
+        <p:txBody>
+          <a:bodyPr/>
+          <a:lstStyle/>
+          <a:p>
+            <a:r>
+              <a:rPr lang="en-US" dirty="0"/>
+              <a:t>Este es el número que resume el enfoque del trabajo: la mayoría de las reglas no dependen de que el programador se acuerde de comprobarlas.</a:t>
+            </a:r>
+            <a:endParaRPr lang="en-US" dirty="0"/>
+          </a:p>
+        </p:txBody>
+      </p:sp>
+      <p:sp>
+        <p:nvSpPr>
+          <p:cNvPr id="4" name="Slide Number Placeholder 3"/>
+          <p:cNvSpPr>
+            <a:spLocks noGrp="1"/>
+          </p:cNvSpPr>
+          <p:nvPr>
+            <p:ph type="sldNum" sz="quarter" idx="10"/>
+          </p:nvPr>
+        </p:nvSpPr>
+        <p:spPr/>
+        <p:txBody>
+          <a:bodyPr/>
+          <a:lstStyle/>
+          <a:p>
+            <a:fld id="{F7021451-1387-4CA6-816F-3879F97B5CBC}" type="slidenum">
+              <a:rPr lang="en-US"/>
+              <a:t>16</a:t>
+            </a:fld>
+            <a:endParaRPr lang="en-US"/>
+          </a:p>
+        </p:txBody>
+      </p:sp>
+    </p:spTree>
+    <p:extLst>
+      <p:ext uri="{BB962C8B-B14F-4D97-AF65-F5344CB8AC3E}">
+        <p14:creationId xmlns:p14="http://schemas.microsoft.com/office/powerpoint/2010/main" val="1024086991"/>
+      </p:ext>
+    </p:extLst>
+  </p:cSld>
+  <p:clrMapOvr>
+    <a:masterClrMapping/>
+  </p:clrMapOvr>
+</p:notes>
+</file>
+
+<file path=ppt/notesSlides/notesSlide17.xml><?xml version="1.0" encoding="utf-8"?>
+<p:notes xmlns:a="http://schemas.openxmlformats.org/drawingml/2006/main" xmlns:r="http://schemas.openxmlformats.org/officeDocument/2006/relationships" xmlns:p="http://schemas.openxmlformats.org/presentationml/2006/main">
+  <p:cSld>
+    <p:spTree>
+      <p:nvGrpSpPr>
+        <p:cNvPr id="1" name=""/>
+        <p:cNvGrpSpPr/>
+        <p:nvPr/>
+      </p:nvGrpSpPr>
+      <p:grpSpPr>
+        <a:xfrm>
+          <a:off x="0" y="0"/>
+          <a:ext cx="0" cy="0"/>
+          <a:chOff x="0" y="0"/>
+          <a:chExt cx="0" cy="0"/>
+        </a:xfrm>
+      </p:grpSpPr>
+      <p:sp>
+        <p:nvSpPr>
+          <p:cNvPr id="2" name="Slide Image Placeholder 1"/>
+          <p:cNvSpPr>
+            <a:spLocks noGrp="1" noRot="1" noChangeAspect="1"/>
+          </p:cNvSpPr>
+          <p:nvPr>
+            <p:ph type="sldImg"/>
+          </p:nvPr>
+        </p:nvSpPr>
+        <p:spPr/>
+      </p:sp>
+      <p:sp>
+        <p:nvSpPr>
+          <p:cNvPr id="3" name="Notes Placeholder 2"/>
+          <p:cNvSpPr>
+            <a:spLocks noGrp="1"/>
+          </p:cNvSpPr>
+          <p:nvPr>
+            <p:ph type="body" idx="1"/>
+          </p:nvPr>
+        </p:nvSpPr>
+        <p:spPr/>
+        <p:txBody>
+          <a:bodyPr/>
+          <a:lstStyle/>
+          <a:p>
+            <a:r>
+              <a:rPr lang="en-US" dirty="0"/>
+              <a:t>Lo importante de este caso: la venta no se registra a medias. O se cumple la regla completa, o no queda rastro de la operación.</a:t>
+            </a:r>
+            <a:endParaRPr lang="en-US" dirty="0"/>
+          </a:p>
+        </p:txBody>
+      </p:sp>
+      <p:sp>
+        <p:nvSpPr>
+          <p:cNvPr id="4" name="Slide Number Placeholder 3"/>
+          <p:cNvSpPr>
+            <a:spLocks noGrp="1"/>
+          </p:cNvSpPr>
+          <p:nvPr>
+            <p:ph type="sldNum" sz="quarter" idx="10"/>
+          </p:nvPr>
+        </p:nvSpPr>
+        <p:spPr/>
+        <p:txBody>
+          <a:bodyPr/>
+          <a:lstStyle/>
+          <a:p>
+            <a:fld id="{F7021451-1387-4CA6-816F-3879F97B5CBC}" type="slidenum">
+              <a:rPr lang="en-US"/>
+              <a:t>17</a:t>
+            </a:fld>
+            <a:endParaRPr lang="en-US"/>
+          </a:p>
+        </p:txBody>
+      </p:sp>
+    </p:spTree>
+    <p:extLst>
+      <p:ext uri="{BB962C8B-B14F-4D97-AF65-F5344CB8AC3E}">
+        <p14:creationId xmlns:p14="http://schemas.microsoft.com/office/powerpoint/2010/main" val="1024086991"/>
+      </p:ext>
+    </p:extLst>
+  </p:cSld>
+  <p:clrMapOvr>
+    <a:masterClrMapping/>
+  </p:clrMapOvr>
+</p:notes>
+</file>
+
+<file path=ppt/notesSlides/notesSlide18.xml><?xml version="1.0" encoding="utf-8"?>
+<p:notes xmlns:a="http://schemas.openxmlformats.org/drawingml/2006/main" xmlns:r="http://schemas.openxmlformats.org/officeDocument/2006/relationships" xmlns:p="http://schemas.openxmlformats.org/presentationml/2006/main">
+  <p:cSld>
+    <p:spTree>
+      <p:nvGrpSpPr>
+        <p:cNvPr id="1" name=""/>
+        <p:cNvGrpSpPr/>
+        <p:nvPr/>
+      </p:nvGrpSpPr>
+      <p:grpSpPr>
+        <a:xfrm>
+          <a:off x="0" y="0"/>
+          <a:ext cx="0" cy="0"/>
+          <a:chOff x="0" y="0"/>
+          <a:chExt cx="0" cy="0"/>
+        </a:xfrm>
+      </p:grpSpPr>
+      <p:sp>
+        <p:nvSpPr>
+          <p:cNvPr id="2" name="Slide Image Placeholder 1"/>
+          <p:cNvSpPr>
+            <a:spLocks noGrp="1" noRot="1" noChangeAspect="1"/>
+          </p:cNvSpPr>
+          <p:nvPr>
+            <p:ph type="sldImg"/>
+          </p:nvPr>
+        </p:nvSpPr>
+        <p:spPr/>
+      </p:sp>
+      <p:sp>
+        <p:nvSpPr>
+          <p:cNvPr id="3" name="Notes Placeholder 2"/>
+          <p:cNvSpPr>
+            <a:spLocks noGrp="1"/>
+          </p:cNvSpPr>
+          <p:nvPr>
+            <p:ph type="body" idx="1"/>
+          </p:nvPr>
+        </p:nvSpPr>
+        <p:spPr/>
+        <p:txBody>
+          <a:bodyPr/>
+          <a:lstStyle/>
+          <a:p>
+            <a:r>
+              <a:rPr lang="en-US" dirty="0"/>
+              <a:t>Este es el mejor ejemplo para explicar por qué la concurrencia obliga a bajar la regla al motor. Si el profesor pregunta por el RNF-03, esta es la respuesta.</a:t>
+            </a:r>
+            <a:endParaRPr lang="en-US" dirty="0"/>
+          </a:p>
+        </p:txBody>
+      </p:sp>
+      <p:sp>
+        <p:nvSpPr>
+          <p:cNvPr id="4" name="Slide Number Placeholder 3"/>
+          <p:cNvSpPr>
+            <a:spLocks noGrp="1"/>
+          </p:cNvSpPr>
+          <p:nvPr>
+            <p:ph type="sldNum" sz="quarter" idx="10"/>
+          </p:nvPr>
+        </p:nvSpPr>
+        <p:spPr/>
+        <p:txBody>
+          <a:bodyPr/>
+          <a:lstStyle/>
+          <a:p>
+            <a:fld id="{F7021451-1387-4CA6-816F-3879F97B5CBC}" type="slidenum">
+              <a:rPr lang="en-US"/>
+              <a:t>18</a:t>
+            </a:fld>
+            <a:endParaRPr lang="en-US"/>
+          </a:p>
+        </p:txBody>
+      </p:sp>
+    </p:spTree>
+    <p:extLst>
+      <p:ext uri="{BB962C8B-B14F-4D97-AF65-F5344CB8AC3E}">
+        <p14:creationId xmlns:p14="http://schemas.microsoft.com/office/powerpoint/2010/main" val="1024086991"/>
+      </p:ext>
+    </p:extLst>
+  </p:cSld>
+  <p:clrMapOvr>
+    <a:masterClrMapping/>
+  </p:clrMapOvr>
+</p:notes>
+</file>
+
+<file path=ppt/notesSlides/notesSlide19.xml><?xml version="1.0" encoding="utf-8"?>
+<p:notes xmlns:a="http://schemas.openxmlformats.org/drawingml/2006/main" xmlns:r="http://schemas.openxmlformats.org/officeDocument/2006/relationships" xmlns:p="http://schemas.openxmlformats.org/presentationml/2006/main">
+  <p:cSld>
+    <p:spTree>
+      <p:nvGrpSpPr>
+        <p:cNvPr id="1" name=""/>
+        <p:cNvGrpSpPr/>
+        <p:nvPr/>
+      </p:nvGrpSpPr>
+      <p:grpSpPr>
+        <a:xfrm>
+          <a:off x="0" y="0"/>
+          <a:ext cx="0" cy="0"/>
+          <a:chOff x="0" y="0"/>
+          <a:chExt cx="0" cy="0"/>
+        </a:xfrm>
+      </p:grpSpPr>
+      <p:sp>
+        <p:nvSpPr>
+          <p:cNvPr id="2" name="Slide Image Placeholder 1"/>
+          <p:cNvSpPr>
+            <a:spLocks noGrp="1" noRot="1" noChangeAspect="1"/>
+          </p:cNvSpPr>
+          <p:nvPr>
+            <p:ph type="sldImg"/>
+          </p:nvPr>
+        </p:nvSpPr>
+        <p:spPr/>
+      </p:sp>
+      <p:sp>
+        <p:nvSpPr>
+          <p:cNvPr id="3" name="Notes Placeholder 2"/>
+          <p:cNvSpPr>
+            <a:spLocks noGrp="1"/>
+          </p:cNvSpPr>
+          <p:nvPr>
+            <p:ph type="body" idx="1"/>
+          </p:nvPr>
+        </p:nvSpPr>
+        <p:spPr/>
+        <p:txBody>
+          <a:bodyPr/>
+          <a:lstStyle/>
+          <a:p>
+            <a:r>
+              <a:rPr lang="en-US" dirty="0"/>
+              <a:t>Cierre del argumento. La aplicación valida por cortesía con el usuario; la base de datos valida por obligación con el negocio.</a:t>
+            </a:r>
+            <a:endParaRPr lang="en-US" dirty="0"/>
+          </a:p>
+        </p:txBody>
+      </p:sp>
+      <p:sp>
+        <p:nvSpPr>
+          <p:cNvPr id="4" name="Slide Number Placeholder 3"/>
+          <p:cNvSpPr>
+            <a:spLocks noGrp="1"/>
+          </p:cNvSpPr>
+          <p:nvPr>
+            <p:ph type="sldNum" sz="quarter" idx="10"/>
+          </p:nvPr>
+        </p:nvSpPr>
+        <p:spPr/>
+        <p:txBody>
+          <a:bodyPr/>
+          <a:lstStyle/>
+          <a:p>
+            <a:fld id="{F7021451-1387-4CA6-816F-3879F97B5CBC}" type="slidenum">
+              <a:rPr lang="en-US"/>
+              <a:t>19</a:t>
             </a:fld>
             <a:endParaRPr lang="en-US"/>
           </a:p>
@@ -1278,6 +1813,94 @@
 </p:notes>
 </file>
 
+<file path=ppt/notesSlides/notesSlide20.xml><?xml version="1.0" encoding="utf-8"?>
+<p:notes xmlns:a="http://schemas.openxmlformats.org/drawingml/2006/main" xmlns:r="http://schemas.openxmlformats.org/officeDocument/2006/relationships" xmlns:p="http://schemas.openxmlformats.org/presentationml/2006/main">
+  <p:cSld>
+    <p:spTree>
+      <p:nvGrpSpPr>
+        <p:cNvPr id="1" name=""/>
+        <p:cNvGrpSpPr/>
+        <p:nvPr/>
+      </p:nvGrpSpPr>
+      <p:grpSpPr>
+        <a:xfrm>
+          <a:off x="0" y="0"/>
+          <a:ext cx="0" cy="0"/>
+          <a:chOff x="0" y="0"/>
+          <a:chExt cx="0" cy="0"/>
+        </a:xfrm>
+      </p:grpSpPr>
+      <p:sp>
+        <p:nvSpPr>
+          <p:cNvPr id="2" name="Slide Image Placeholder 1"/>
+          <p:cNvSpPr>
+            <a:spLocks noGrp="1" noRot="1" noChangeAspect="1"/>
+          </p:cNvSpPr>
+          <p:nvPr>
+            <p:ph type="sldImg"/>
+          </p:nvPr>
+        </p:nvSpPr>
+        <p:spPr/>
+      </p:sp>
+      <p:sp>
+        <p:nvSpPr>
+          <p:cNvPr id="3" name="Notes Placeholder 2"/>
+          <p:cNvSpPr>
+            <a:spLocks noGrp="1"/>
+          </p:cNvSpPr>
+          <p:nvPr>
+            <p:ph type="body" idx="1"/>
+          </p:nvPr>
+        </p:nvSpPr>
+        <p:spPr/>
+        <p:txBody>
+          <a:bodyPr/>
+          <a:lstStyle/>
+          <a:p>
+            <a:r>
+              <a:rPr lang="en-US" dirty="0"/>
+              <a:t>Cerrar con la idea de fondo: el trabajo no solo lista reglas de negocio, las deja implementadas y verificables en el repositorio.</a:t>
+            </a:r>
+            <a:endParaRPr lang="en-US" dirty="0"/>
+          </a:p>
+        </p:txBody>
+      </p:sp>
+      <p:sp>
+        <p:nvSpPr>
+          <p:cNvPr id="4" name="Slide Number Placeholder 3"/>
+          <p:cNvSpPr>
+            <a:spLocks noGrp="1"/>
+          </p:cNvSpPr>
+          <p:nvPr>
+            <p:ph type="sldNum" sz="quarter" idx="10"/>
+          </p:nvPr>
+        </p:nvSpPr>
+        <p:spPr/>
+        <p:txBody>
+          <a:bodyPr/>
+          <a:lstStyle/>
+          <a:p>
+            <a:fld id="{F7021451-1387-4CA6-816F-3879F97B5CBC}" type="slidenum">
+              <a:rPr lang="en-US"/>
+              <a:t>20</a:t>
+            </a:fld>
+            <a:endParaRPr lang="en-US"/>
+          </a:p>
+        </p:txBody>
+      </p:sp>
+    </p:spTree>
+    <p:extLst>
+      <p:ext uri="{BB962C8B-B14F-4D97-AF65-F5344CB8AC3E}">
+        <p14:creationId xmlns:p14="http://schemas.microsoft.com/office/powerpoint/2010/main" val="1024086991"/>
+      </p:ext>
+    </p:extLst>
+  </p:cSld>
+  <p:clrMapOvr>
+    <a:masterClrMapping/>
+  </p:clrMapOvr>
+</p:notes>
+</file>
+
 <file path=ppt/notesSlides/notesSlide3.xml><?xml version="1.0" encoding="utf-8"?>
 <p:notes xmlns:a="http://schemas.openxmlformats.org/drawingml/2006/main" xmlns:r="http://schemas.openxmlformats.org/officeDocument/2006/relationships" xmlns:p="http://schemas.openxmlformats.org/presentationml/2006/main">
   <p:cSld>
@@ -1852,7 +2475,7 @@
           <a:p>
             <a:r>
               <a:rPr lang="en-US" dirty="0"/>
-              <a:t>Este es el número que resume el enfoque del trabajo: la mayoría de las reglas no dependen de que el programador se acuerde de comprobarlas.</a:t>
+              <a:t>Captura tomada del prototipo en funcionamiento. El marco y la chapa se dibujan desde el propio DOM sobre los elementos que aplican cada regla, así que señalan el control real y no una anotación puesta a mano.</a:t>
             </a:r>
             <a:endParaRPr lang="en-US" dirty="0"/>
           </a:p>
@@ -2486,7 +3109,7 @@
                 <a:ea typeface="Cambria" pitchFamily="34" charset="-122"/>
                 <a:cs typeface="Cambria" pitchFamily="34" charset="-120"/>
               </a:rPr>
-              <a:t>Caso 1: un cliente pide más de lo que hay</a:t>
+              <a:t>En pantalla: Catálogo y alta de producto</a:t>
             </a:r>
             <a:endParaRPr lang="en-US" sz="3400" dirty="0"/>
           </a:p>
@@ -2525,25 +3148,114 @@
                 <a:ea typeface="Calibri" pitchFamily="34" charset="-122"/>
                 <a:cs typeface="Calibri" pitchFamily="34" charset="-120"/>
               </a:rPr>
-              <a:t>Qué ocurre exactamente cuando se rompe la RN-12</a:t>
+              <a:t>La misma regla, vista por el cliente y por el administrador</a:t>
             </a:r>
             <a:endParaRPr lang="en-US" sz="1400" dirty="0"/>
           </a:p>
         </p:txBody>
       </p:sp>
-      <p:sp>
-        <p:nvSpPr>
-          <p:cNvPr id="4" name="Shape 2"/>
+      <p:pic>
+        <p:nvPicPr>
+          <p:cNvPr id="4" name="Image 0" descr="/tmp/claude-0/-home-user-VetPetSurco/b8d13659-c8d7-578f-913d-52522fae5ff2/scratchpad/ppt/capturas/02-catalogo.png">    </p:cNvPr>
+          <p:cNvPicPr>
+            <a:picLocks noChangeAspect="1"/>
+          </p:cNvPicPr>
+          <p:nvPr/>
+        </p:nvPicPr>
+        <p:blipFill>
+          <a:blip r:embed="rId1"/>
+          <a:stretch>
+            <a:fillRect/>
+          </a:stretch>
+        </p:blipFill>
+        <p:spPr>
+          <a:xfrm>
+            <a:off x="3042180" y="1627632"/>
+            <a:ext cx="2785319" cy="1639701"/>
+          </a:xfrm>
+          <a:prstGeom prst="rect">
+            <a:avLst/>
+          </a:prstGeom>
+        </p:spPr>
+      </p:pic>
+      <p:pic>
+        <p:nvPicPr>
+          <p:cNvPr id="5" name="Image 1" descr="/tmp/claude-0/-home-user-VetPetSurco/b8d13659-c8d7-578f-913d-52522fae5ff2/scratchpad/ppt/capturas/10-alta.png">    </p:cNvPr>
+          <p:cNvPicPr>
+            <a:picLocks noChangeAspect="1"/>
+          </p:cNvPicPr>
+          <p:nvPr/>
+        </p:nvPicPr>
+        <p:blipFill>
+          <a:blip r:embed="rId2"/>
+          <a:stretch>
+            <a:fillRect/>
+          </a:stretch>
+        </p:blipFill>
+        <p:spPr>
+          <a:xfrm>
+            <a:off x="3042180" y="3341161"/>
+            <a:ext cx="2785319" cy="2785319"/>
+          </a:xfrm>
+          <a:prstGeom prst="rect">
+            <a:avLst/>
+          </a:prstGeom>
+        </p:spPr>
+      </p:pic>
+      <p:sp>
+        <p:nvSpPr>
+          <p:cNvPr id="6" name="Text 2"/>
+          <p:cNvSpPr txBox="1"/>
+          <p:nvPr/>
+        </p:nvSpPr>
+        <p:spPr>
+          <a:xfrm>
+            <a:off x="8485632" y="1645920"/>
+            <a:ext cx="3108960" cy="347472"/>
+          </a:xfrm>
+          <a:prstGeom prst="rect">
+            <a:avLst/>
+          </a:prstGeom>
+          <a:noFill/>
+          <a:ln/>
+        </p:spPr>
+        <p:txBody>
+          <a:bodyPr wrap="square" lIns="0" tIns="0" rIns="0" bIns="0" rtlCol="0" anchor="ctr"/>
+          <a:lstStyle/>
+          <a:p>
+            <a:pPr indent="0" marL="0">
+              <a:buNone/>
+            </a:pPr>
+            <a:r>
+              <a:rPr lang="en-US" sz="1600" b="1" dirty="0">
+                <a:solidFill>
+                  <a:srgbClr val="14524A"/>
+                </a:solidFill>
+                <a:latin typeface="Cambria" pitchFamily="34" charset="0"/>
+                <a:ea typeface="Cambria" pitchFamily="34" charset="-122"/>
+                <a:cs typeface="Cambria" pitchFamily="34" charset="-120"/>
+              </a:rPr>
+              <a:t>Reglas enmarcadas</a:t>
+            </a:r>
+            <a:endParaRPr lang="en-US" sz="1600" dirty="0"/>
+          </a:p>
+        </p:txBody>
+      </p:sp>
+      <p:sp>
+        <p:nvSpPr>
+          <p:cNvPr id="7" name="Shape 3"/>
           <p:cNvSpPr/>
           <p:nvPr/>
         </p:nvSpPr>
         <p:spPr>
           <a:xfrm>
-            <a:off x="640080" y="1792224"/>
-            <a:ext cx="402336" cy="402336"/>
-          </a:xfrm>
-          <a:prstGeom prst="ellipse">
-            <a:avLst/>
+            <a:off x="8485632" y="2157984"/>
+            <a:ext cx="841248" cy="329184"/>
+          </a:xfrm>
+          <a:prstGeom prst="roundRect">
+            <a:avLst>
+              <a:gd name="adj" fmla="val 138889"/>
+            </a:avLst>
           </a:prstGeom>
           <a:solidFill>
             <a:srgbClr val="E8A33D"/>
@@ -2558,14 +3270,14 @@
       </p:sp>
       <p:sp>
         <p:nvSpPr>
-          <p:cNvPr id="5" name="Text 3"/>
-          <p:cNvSpPr txBox="1"/>
-          <p:nvPr/>
-        </p:nvSpPr>
-        <p:spPr>
-          <a:xfrm>
-            <a:off x="640080" y="1792224"/>
-            <a:ext cx="402336" cy="402336"/>
+          <p:cNvPr id="8" name="Text 4"/>
+          <p:cNvSpPr txBox="1"/>
+          <p:nvPr/>
+        </p:nvSpPr>
+        <p:spPr>
+          <a:xfrm>
+            <a:off x="8485632" y="2157984"/>
+            <a:ext cx="841248" cy="329184"/>
           </a:xfrm>
           <a:prstGeom prst="rect">
             <a:avLst/>
@@ -2581,7 +3293,7 @@
               <a:buNone/>
             </a:pPr>
             <a:r>
-              <a:rPr lang="en-US" sz="1300" b="1" dirty="0">
+              <a:rPr lang="en-US" sz="1050" b="1" dirty="0">
                 <a:solidFill>
                   <a:srgbClr val="14524A"/>
                 </a:solidFill>
@@ -2589,61 +3301,22 @@
                 <a:ea typeface="Calibri" pitchFamily="34" charset="-122"/>
                 <a:cs typeface="Calibri" pitchFamily="34" charset="-120"/>
               </a:rPr>
-              <a:t>1</a:t>
-            </a:r>
-            <a:endParaRPr lang="en-US" sz="1300" dirty="0"/>
-          </a:p>
-        </p:txBody>
-      </p:sp>
-      <p:sp>
-        <p:nvSpPr>
-          <p:cNvPr id="6" name="Text 4"/>
-          <p:cNvSpPr txBox="1"/>
-          <p:nvPr/>
-        </p:nvSpPr>
-        <p:spPr>
-          <a:xfrm>
-            <a:off x="1225296" y="1719072"/>
-            <a:ext cx="3749040" cy="310896"/>
-          </a:xfrm>
-          <a:prstGeom prst="rect">
-            <a:avLst/>
-          </a:prstGeom>
-          <a:noFill/>
-          <a:ln/>
-        </p:spPr>
-        <p:txBody>
-          <a:bodyPr wrap="square" lIns="0" tIns="0" rIns="0" bIns="0" rtlCol="0" anchor="ctr"/>
-          <a:lstStyle/>
-          <a:p>
-            <a:pPr indent="0" marL="0">
-              <a:buNone/>
-            </a:pPr>
-            <a:r>
-              <a:rPr lang="en-US" sz="1350" b="1" dirty="0">
-                <a:solidFill>
-                  <a:srgbClr val="14524A"/>
-                </a:solidFill>
-                <a:latin typeface="Calibri" pitchFamily="34" charset="0"/>
-                <a:ea typeface="Calibri" pitchFamily="34" charset="-122"/>
-                <a:cs typeface="Calibri" pitchFamily="34" charset="-120"/>
-              </a:rPr>
-              <a:t>El cliente arma el pedido</a:t>
-            </a:r>
-            <a:endParaRPr lang="en-US" sz="1350" dirty="0"/>
-          </a:p>
-        </p:txBody>
-      </p:sp>
-      <p:sp>
-        <p:nvSpPr>
-          <p:cNvPr id="7" name="Text 5"/>
-          <p:cNvSpPr txBox="1"/>
-          <p:nvPr/>
-        </p:nvSpPr>
-        <p:spPr>
-          <a:xfrm>
-            <a:off x="5120640" y="1700784"/>
-            <a:ext cx="6446520" cy="658368"/>
+              <a:t>RN-05</a:t>
+            </a:r>
+            <a:endParaRPr lang="en-US" sz="1050" dirty="0"/>
+          </a:p>
+        </p:txBody>
+      </p:sp>
+      <p:sp>
+        <p:nvSpPr>
+          <p:cNvPr id="9" name="Text 5"/>
+          <p:cNvSpPr txBox="1"/>
+          <p:nvPr/>
+        </p:nvSpPr>
+        <p:spPr>
+          <a:xfrm>
+            <a:off x="8485632" y="2560320"/>
+            <a:ext cx="3108960" cy="603504"/>
           </a:xfrm>
           <a:prstGeom prst="rect">
             <a:avLst/>
@@ -2659,7 +3332,7 @@
               <a:buNone/>
             </a:pPr>
             <a:r>
-              <a:rPr lang="en-US" sz="1200" dirty="0">
+              <a:rPr lang="en-US" sz="1150" dirty="0">
                 <a:solidFill>
                   <a:srgbClr val="5D6B66"/>
                 </a:solidFill>
@@ -2667,25 +3340,27 @@
                 <a:ea typeface="Calibri" pitchFamily="34" charset="-122"/>
                 <a:cs typeface="Calibri" pitchFamily="34" charset="-120"/>
               </a:rPr>
-              <a:t>Pide 5 unidades de «Vitaminas 60 tabs». El carrito acepta la cantidad porque es mayor que cero (RN-10).</a:t>
-            </a:r>
-            <a:endParaRPr lang="en-US" sz="1200" dirty="0"/>
-          </a:p>
-        </p:txBody>
-      </p:sp>
-      <p:sp>
-        <p:nvSpPr>
-          <p:cNvPr id="8" name="Shape 6"/>
+              <a:t>El SKU identifica al producto y no se puede repetir.</a:t>
+            </a:r>
+            <a:endParaRPr lang="en-US" sz="1150" dirty="0"/>
+          </a:p>
+        </p:txBody>
+      </p:sp>
+      <p:sp>
+        <p:nvSpPr>
+          <p:cNvPr id="10" name="Shape 6"/>
           <p:cNvSpPr/>
           <p:nvPr/>
         </p:nvSpPr>
         <p:spPr>
           <a:xfrm>
-            <a:off x="640080" y="2651760"/>
-            <a:ext cx="402336" cy="402336"/>
-          </a:xfrm>
-          <a:prstGeom prst="ellipse">
-            <a:avLst/>
+            <a:off x="8485632" y="3182112"/>
+            <a:ext cx="841248" cy="329184"/>
+          </a:xfrm>
+          <a:prstGeom prst="roundRect">
+            <a:avLst>
+              <a:gd name="adj" fmla="val 138889"/>
+            </a:avLst>
           </a:prstGeom>
           <a:solidFill>
             <a:srgbClr val="E8A33D"/>
@@ -2700,14 +3375,14 @@
       </p:sp>
       <p:sp>
         <p:nvSpPr>
-          <p:cNvPr id="9" name="Text 7"/>
-          <p:cNvSpPr txBox="1"/>
-          <p:nvPr/>
-        </p:nvSpPr>
-        <p:spPr>
-          <a:xfrm>
-            <a:off x="640080" y="2651760"/>
-            <a:ext cx="402336" cy="402336"/>
+          <p:cNvPr id="11" name="Text 7"/>
+          <p:cNvSpPr txBox="1"/>
+          <p:nvPr/>
+        </p:nvSpPr>
+        <p:spPr>
+          <a:xfrm>
+            <a:off x="8485632" y="3182112"/>
+            <a:ext cx="841248" cy="329184"/>
           </a:xfrm>
           <a:prstGeom prst="rect">
             <a:avLst/>
@@ -2723,7 +3398,7 @@
               <a:buNone/>
             </a:pPr>
             <a:r>
-              <a:rPr lang="en-US" sz="1300" b="1" dirty="0">
+              <a:rPr lang="en-US" sz="1050" b="1" dirty="0">
                 <a:solidFill>
                   <a:srgbClr val="14524A"/>
                 </a:solidFill>
@@ -2731,61 +3406,22 @@
                 <a:ea typeface="Calibri" pitchFamily="34" charset="-122"/>
                 <a:cs typeface="Calibri" pitchFamily="34" charset="-120"/>
               </a:rPr>
-              <a:t>2</a:t>
-            </a:r>
-            <a:endParaRPr lang="en-US" sz="1300" dirty="0"/>
-          </a:p>
-        </p:txBody>
-      </p:sp>
-      <p:sp>
-        <p:nvSpPr>
-          <p:cNvPr id="10" name="Text 8"/>
-          <p:cNvSpPr txBox="1"/>
-          <p:nvPr/>
-        </p:nvSpPr>
-        <p:spPr>
-          <a:xfrm>
-            <a:off x="1225296" y="2578608"/>
-            <a:ext cx="3749040" cy="310896"/>
-          </a:xfrm>
-          <a:prstGeom prst="rect">
-            <a:avLst/>
-          </a:prstGeom>
-          <a:noFill/>
-          <a:ln/>
-        </p:spPr>
-        <p:txBody>
-          <a:bodyPr wrap="square" lIns="0" tIns="0" rIns="0" bIns="0" rtlCol="0" anchor="ctr"/>
-          <a:lstStyle/>
-          <a:p>
-            <a:pPr indent="0" marL="0">
-              <a:buNone/>
-            </a:pPr>
-            <a:r>
-              <a:rPr lang="en-US" sz="1350" b="1" dirty="0">
-                <a:solidFill>
-                  <a:srgbClr val="14524A"/>
-                </a:solidFill>
-                <a:latin typeface="Calibri" pitchFamily="34" charset="0"/>
-                <a:ea typeface="Calibri" pitchFamily="34" charset="-122"/>
-                <a:cs typeface="Calibri" pitchFamily="34" charset="-120"/>
-              </a:rPr>
-              <a:t>Se confirma el pedido</a:t>
-            </a:r>
-            <a:endParaRPr lang="en-US" sz="1350" dirty="0"/>
-          </a:p>
-        </p:txBody>
-      </p:sp>
-      <p:sp>
-        <p:nvSpPr>
-          <p:cNvPr id="11" name="Text 9"/>
-          <p:cNvSpPr txBox="1"/>
-          <p:nvPr/>
-        </p:nvSpPr>
-        <p:spPr>
-          <a:xfrm>
-            <a:off x="5120640" y="2560320"/>
-            <a:ext cx="6446520" cy="658368"/>
+              <a:t>RN-06</a:t>
+            </a:r>
+            <a:endParaRPr lang="en-US" sz="1050" dirty="0"/>
+          </a:p>
+        </p:txBody>
+      </p:sp>
+      <p:sp>
+        <p:nvSpPr>
+          <p:cNvPr id="12" name="Text 8"/>
+          <p:cNvSpPr txBox="1"/>
+          <p:nvPr/>
+        </p:nvSpPr>
+        <p:spPr>
+          <a:xfrm>
+            <a:off x="8485632" y="3584448"/>
+            <a:ext cx="3108960" cy="603504"/>
           </a:xfrm>
           <a:prstGeom prst="rect">
             <a:avLst/>
@@ -2801,7 +3437,7 @@
               <a:buNone/>
             </a:pPr>
             <a:r>
-              <a:rPr lang="en-US" sz="1200" dirty="0">
+              <a:rPr lang="en-US" sz="1150" dirty="0">
                 <a:solidFill>
                   <a:srgbClr val="5D6B66"/>
                 </a:solidFill>
@@ -2809,25 +3445,27 @@
                 <a:ea typeface="Calibri" pitchFamily="34" charset="-122"/>
                 <a:cs typeface="Calibri" pitchFamily="34" charset="-120"/>
               </a:rPr>
-              <a:t>sp_confirmar_pedido abre la transacción y bloquea la fila del producto con el cursor FOR UPDATE.</a:t>
-            </a:r>
-            <a:endParaRPr lang="en-US" sz="1200" dirty="0"/>
-          </a:p>
-        </p:txBody>
-      </p:sp>
-      <p:sp>
-        <p:nvSpPr>
-          <p:cNvPr id="12" name="Shape 10"/>
+              <a:t>No se registra un producto con precio cero o negativo.</a:t>
+            </a:r>
+            <a:endParaRPr lang="en-US" sz="1150" dirty="0"/>
+          </a:p>
+        </p:txBody>
+      </p:sp>
+      <p:sp>
+        <p:nvSpPr>
+          <p:cNvPr id="13" name="Shape 9"/>
           <p:cNvSpPr/>
           <p:nvPr/>
         </p:nvSpPr>
         <p:spPr>
           <a:xfrm>
-            <a:off x="640080" y="3511296"/>
-            <a:ext cx="402336" cy="402336"/>
-          </a:xfrm>
-          <a:prstGeom prst="ellipse">
-            <a:avLst/>
+            <a:off x="8485632" y="4206240"/>
+            <a:ext cx="841248" cy="329184"/>
+          </a:xfrm>
+          <a:prstGeom prst="roundRect">
+            <a:avLst>
+              <a:gd name="adj" fmla="val 138889"/>
+            </a:avLst>
           </a:prstGeom>
           <a:solidFill>
             <a:srgbClr val="E8A33D"/>
@@ -2842,14 +3480,14 @@
       </p:sp>
       <p:sp>
         <p:nvSpPr>
-          <p:cNvPr id="13" name="Text 11"/>
-          <p:cNvSpPr txBox="1"/>
-          <p:nvPr/>
-        </p:nvSpPr>
-        <p:spPr>
-          <a:xfrm>
-            <a:off x="640080" y="3511296"/>
-            <a:ext cx="402336" cy="402336"/>
+          <p:cNvPr id="14" name="Text 10"/>
+          <p:cNvSpPr txBox="1"/>
+          <p:nvPr/>
+        </p:nvSpPr>
+        <p:spPr>
+          <a:xfrm>
+            <a:off x="8485632" y="4206240"/>
+            <a:ext cx="841248" cy="329184"/>
           </a:xfrm>
           <a:prstGeom prst="rect">
             <a:avLst/>
@@ -2865,7 +3503,7 @@
               <a:buNone/>
             </a:pPr>
             <a:r>
-              <a:rPr lang="en-US" sz="1300" b="1" dirty="0">
+              <a:rPr lang="en-US" sz="1050" b="1" dirty="0">
                 <a:solidFill>
                   <a:srgbClr val="14524A"/>
                 </a:solidFill>
@@ -2873,61 +3511,22 @@
                 <a:ea typeface="Calibri" pitchFamily="34" charset="-122"/>
                 <a:cs typeface="Calibri" pitchFamily="34" charset="-120"/>
               </a:rPr>
-              <a:t>3</a:t>
-            </a:r>
-            <a:endParaRPr lang="en-US" sz="1300" dirty="0"/>
-          </a:p>
-        </p:txBody>
-      </p:sp>
-      <p:sp>
-        <p:nvSpPr>
-          <p:cNvPr id="14" name="Text 12"/>
-          <p:cNvSpPr txBox="1"/>
-          <p:nvPr/>
-        </p:nvSpPr>
-        <p:spPr>
-          <a:xfrm>
-            <a:off x="1225296" y="3438144"/>
-            <a:ext cx="3749040" cy="310896"/>
-          </a:xfrm>
-          <a:prstGeom prst="rect">
-            <a:avLst/>
-          </a:prstGeom>
-          <a:noFill/>
-          <a:ln/>
-        </p:spPr>
-        <p:txBody>
-          <a:bodyPr wrap="square" lIns="0" tIns="0" rIns="0" bIns="0" rtlCol="0" anchor="ctr"/>
-          <a:lstStyle/>
-          <a:p>
-            <a:pPr indent="0" marL="0">
-              <a:buNone/>
-            </a:pPr>
-            <a:r>
-              <a:rPr lang="en-US" sz="1350" b="1" dirty="0">
-                <a:solidFill>
-                  <a:srgbClr val="14524A"/>
-                </a:solidFill>
-                <a:latin typeface="Calibri" pitchFamily="34" charset="0"/>
-                <a:ea typeface="Calibri" pitchFamily="34" charset="-122"/>
-                <a:cs typeface="Calibri" pitchFamily="34" charset="-120"/>
-              </a:rPr>
-              <a:t>La comparación falla</a:t>
-            </a:r>
-            <a:endParaRPr lang="en-US" sz="1350" dirty="0"/>
-          </a:p>
-        </p:txBody>
-      </p:sp>
-      <p:sp>
-        <p:nvSpPr>
-          <p:cNvPr id="15" name="Text 13"/>
-          <p:cNvSpPr txBox="1"/>
-          <p:nvPr/>
-        </p:nvSpPr>
-        <p:spPr>
-          <a:xfrm>
-            <a:off x="5120640" y="3419856"/>
-            <a:ext cx="6446520" cy="658368"/>
+              <a:t>RN-09</a:t>
+            </a:r>
+            <a:endParaRPr lang="en-US" sz="1050" dirty="0"/>
+          </a:p>
+        </p:txBody>
+      </p:sp>
+      <p:sp>
+        <p:nvSpPr>
+          <p:cNvPr id="15" name="Text 11"/>
+          <p:cNvSpPr txBox="1"/>
+          <p:nvPr/>
+        </p:nvSpPr>
+        <p:spPr>
+          <a:xfrm>
+            <a:off x="8485632" y="4608576"/>
+            <a:ext cx="3108960" cy="603504"/>
           </a:xfrm>
           <a:prstGeom prst="rect">
             <a:avLst/>
@@ -2943,7 +3542,7 @@
               <a:buNone/>
             </a:pPr>
             <a:r>
-              <a:rPr lang="en-US" sz="1200" dirty="0">
+              <a:rPr lang="en-US" sz="1150" dirty="0">
                 <a:solidFill>
                   <a:srgbClr val="5D6B66"/>
                 </a:solidFill>
@@ -2951,25 +3550,27 @@
                 <a:ea typeface="Calibri" pitchFamily="34" charset="-122"/>
                 <a:cs typeface="Calibri" pitchFamily="34" charset="-120"/>
               </a:rPr>
-              <a:t>El stock real es 3 y se piden 5. La RN-12 no se cumple.</a:t>
-            </a:r>
-            <a:endParaRPr lang="en-US" sz="1200" dirty="0"/>
-          </a:p>
-        </p:txBody>
-      </p:sp>
-      <p:sp>
-        <p:nvSpPr>
-          <p:cNvPr id="16" name="Shape 14"/>
+              <a:t>Agregar dos veces acumula la cantidad, no crea otra línea.</a:t>
+            </a:r>
+            <a:endParaRPr lang="en-US" sz="1150" dirty="0"/>
+          </a:p>
+        </p:txBody>
+      </p:sp>
+      <p:sp>
+        <p:nvSpPr>
+          <p:cNvPr id="16" name="Shape 12"/>
           <p:cNvSpPr/>
           <p:nvPr/>
         </p:nvSpPr>
         <p:spPr>
           <a:xfrm>
-            <a:off x="640080" y="4370832"/>
-            <a:ext cx="402336" cy="402336"/>
-          </a:xfrm>
-          <a:prstGeom prst="ellipse">
-            <a:avLst/>
+            <a:off x="8485632" y="5230368"/>
+            <a:ext cx="841248" cy="329184"/>
+          </a:xfrm>
+          <a:prstGeom prst="roundRect">
+            <a:avLst>
+              <a:gd name="adj" fmla="val 138889"/>
+            </a:avLst>
           </a:prstGeom>
           <a:solidFill>
             <a:srgbClr val="E8A33D"/>
@@ -2984,14 +3585,14 @@
       </p:sp>
       <p:sp>
         <p:nvSpPr>
-          <p:cNvPr id="17" name="Text 15"/>
-          <p:cNvSpPr txBox="1"/>
-          <p:nvPr/>
-        </p:nvSpPr>
-        <p:spPr>
-          <a:xfrm>
-            <a:off x="640080" y="4370832"/>
-            <a:ext cx="402336" cy="402336"/>
+          <p:cNvPr id="17" name="Text 13"/>
+          <p:cNvSpPr txBox="1"/>
+          <p:nvPr/>
+        </p:nvSpPr>
+        <p:spPr>
+          <a:xfrm>
+            <a:off x="8485632" y="5230368"/>
+            <a:ext cx="841248" cy="329184"/>
           </a:xfrm>
           <a:prstGeom prst="rect">
             <a:avLst/>
@@ -3007,7 +3608,7 @@
               <a:buNone/>
             </a:pPr>
             <a:r>
-              <a:rPr lang="en-US" sz="1300" b="1" dirty="0">
+              <a:rPr lang="en-US" sz="1050" b="1" dirty="0">
                 <a:solidFill>
                   <a:srgbClr val="14524A"/>
                 </a:solidFill>
@@ -3015,61 +3616,22 @@
                 <a:ea typeface="Calibri" pitchFamily="34" charset="-122"/>
                 <a:cs typeface="Calibri" pitchFamily="34" charset="-120"/>
               </a:rPr>
-              <a:t>4</a:t>
-            </a:r>
-            <a:endParaRPr lang="en-US" sz="1300" dirty="0"/>
-          </a:p>
-        </p:txBody>
-      </p:sp>
-      <p:sp>
-        <p:nvSpPr>
-          <p:cNvPr id="18" name="Text 16"/>
-          <p:cNvSpPr txBox="1"/>
-          <p:nvPr/>
-        </p:nvSpPr>
-        <p:spPr>
-          <a:xfrm>
-            <a:off x="1225296" y="4297680"/>
-            <a:ext cx="3749040" cy="310896"/>
-          </a:xfrm>
-          <a:prstGeom prst="rect">
-            <a:avLst/>
-          </a:prstGeom>
-          <a:noFill/>
-          <a:ln/>
-        </p:spPr>
-        <p:txBody>
-          <a:bodyPr wrap="square" lIns="0" tIns="0" rIns="0" bIns="0" rtlCol="0" anchor="ctr"/>
-          <a:lstStyle/>
-          <a:p>
-            <a:pPr indent="0" marL="0">
-              <a:buNone/>
-            </a:pPr>
-            <a:r>
-              <a:rPr lang="en-US" sz="1350" b="1" dirty="0">
-                <a:solidFill>
-                  <a:srgbClr val="14524A"/>
-                </a:solidFill>
-                <a:latin typeface="Calibri" pitchFamily="34" charset="0"/>
-                <a:ea typeface="Calibri" pitchFamily="34" charset="-122"/>
-                <a:cs typeface="Calibri" pitchFamily="34" charset="-120"/>
-              </a:rPr>
-              <a:t>El motor aborta</a:t>
-            </a:r>
-            <a:endParaRPr lang="en-US" sz="1350" dirty="0"/>
-          </a:p>
-        </p:txBody>
-      </p:sp>
-      <p:sp>
-        <p:nvSpPr>
-          <p:cNvPr id="19" name="Text 17"/>
-          <p:cNvSpPr txBox="1"/>
-          <p:nvPr/>
-        </p:nvSpPr>
-        <p:spPr>
-          <a:xfrm>
-            <a:off x="5120640" y="4279392"/>
-            <a:ext cx="6446520" cy="658368"/>
+              <a:t>RN-10</a:t>
+            </a:r>
+            <a:endParaRPr lang="en-US" sz="1050" dirty="0"/>
+          </a:p>
+        </p:txBody>
+      </p:sp>
+      <p:sp>
+        <p:nvSpPr>
+          <p:cNvPr id="18" name="Text 14"/>
+          <p:cNvSpPr txBox="1"/>
+          <p:nvPr/>
+        </p:nvSpPr>
+        <p:spPr>
+          <a:xfrm>
+            <a:off x="8485632" y="5632704"/>
+            <a:ext cx="3108960" cy="603504"/>
           </a:xfrm>
           <a:prstGeom prst="rect">
             <a:avLst/>
@@ -3085,7 +3647,7 @@
               <a:buNone/>
             </a:pPr>
             <a:r>
-              <a:rPr lang="en-US" sz="1200" dirty="0">
+              <a:rPr lang="en-US" sz="1150" dirty="0">
                 <a:solidFill>
                   <a:srgbClr val="5D6B66"/>
                 </a:solidFill>
@@ -3093,217 +3655,9 @@
                 <a:ea typeface="Calibri" pitchFamily="34" charset="-122"/>
                 <a:cs typeface="Calibri" pitchFamily="34" charset="-120"/>
               </a:rPr>
-              <a:t>SIGNAL SQLSTATE '45000' con el mensaje «Stock insuficiente -&gt; Vitaminas (pedido: 5, disponible: 3)».</a:t>
-            </a:r>
-            <a:endParaRPr lang="en-US" sz="1200" dirty="0"/>
-          </a:p>
-        </p:txBody>
-      </p:sp>
-      <p:sp>
-        <p:nvSpPr>
-          <p:cNvPr id="20" name="Shape 18"/>
-          <p:cNvSpPr/>
-          <p:nvPr/>
-        </p:nvSpPr>
-        <p:spPr>
-          <a:xfrm>
-            <a:off x="640080" y="5230368"/>
-            <a:ext cx="402336" cy="402336"/>
-          </a:xfrm>
-          <a:prstGeom prst="ellipse">
-            <a:avLst/>
-          </a:prstGeom>
-          <a:solidFill>
-            <a:srgbClr val="E8A33D"/>
-          </a:solidFill>
-          <a:ln w="12700">
-            <a:solidFill>
-              <a:srgbClr val="E8A33D"/>
-            </a:solidFill>
-            <a:prstDash val="solid"/>
-          </a:ln>
-        </p:spPr>
-      </p:sp>
-      <p:sp>
-        <p:nvSpPr>
-          <p:cNvPr id="21" name="Text 19"/>
-          <p:cNvSpPr txBox="1"/>
-          <p:nvPr/>
-        </p:nvSpPr>
-        <p:spPr>
-          <a:xfrm>
-            <a:off x="640080" y="5230368"/>
-            <a:ext cx="402336" cy="402336"/>
-          </a:xfrm>
-          <a:prstGeom prst="rect">
-            <a:avLst/>
-          </a:prstGeom>
-          <a:noFill/>
-          <a:ln/>
-        </p:spPr>
-        <p:txBody>
-          <a:bodyPr wrap="square" lIns="0" tIns="0" rIns="0" bIns="0" rtlCol="0" anchor="ctr"/>
-          <a:lstStyle/>
-          <a:p>
-            <a:pPr algn="ctr" indent="0" marL="0">
-              <a:buNone/>
-            </a:pPr>
-            <a:r>
-              <a:rPr lang="en-US" sz="1300" b="1" dirty="0">
-                <a:solidFill>
-                  <a:srgbClr val="14524A"/>
-                </a:solidFill>
-                <a:latin typeface="Calibri" pitchFamily="34" charset="0"/>
-                <a:ea typeface="Calibri" pitchFamily="34" charset="-122"/>
-                <a:cs typeface="Calibri" pitchFamily="34" charset="-120"/>
-              </a:rPr>
-              <a:t>5</a:t>
-            </a:r>
-            <a:endParaRPr lang="en-US" sz="1300" dirty="0"/>
-          </a:p>
-        </p:txBody>
-      </p:sp>
-      <p:sp>
-        <p:nvSpPr>
-          <p:cNvPr id="22" name="Text 20"/>
-          <p:cNvSpPr txBox="1"/>
-          <p:nvPr/>
-        </p:nvSpPr>
-        <p:spPr>
-          <a:xfrm>
-            <a:off x="1225296" y="5157216"/>
-            <a:ext cx="3749040" cy="310896"/>
-          </a:xfrm>
-          <a:prstGeom prst="rect">
-            <a:avLst/>
-          </a:prstGeom>
-          <a:noFill/>
-          <a:ln/>
-        </p:spPr>
-        <p:txBody>
-          <a:bodyPr wrap="square" lIns="0" tIns="0" rIns="0" bIns="0" rtlCol="0" anchor="ctr"/>
-          <a:lstStyle/>
-          <a:p>
-            <a:pPr indent="0" marL="0">
-              <a:buNone/>
-            </a:pPr>
-            <a:r>
-              <a:rPr lang="en-US" sz="1350" b="1" dirty="0">
-                <a:solidFill>
-                  <a:srgbClr val="14524A"/>
-                </a:solidFill>
-                <a:latin typeface="Calibri" pitchFamily="34" charset="0"/>
-                <a:ea typeface="Calibri" pitchFamily="34" charset="-122"/>
-                <a:cs typeface="Calibri" pitchFamily="34" charset="-120"/>
-              </a:rPr>
-              <a:t>Se revierte todo</a:t>
-            </a:r>
-            <a:endParaRPr lang="en-US" sz="1350" dirty="0"/>
-          </a:p>
-        </p:txBody>
-      </p:sp>
-      <p:sp>
-        <p:nvSpPr>
-          <p:cNvPr id="23" name="Text 21"/>
-          <p:cNvSpPr txBox="1"/>
-          <p:nvPr/>
-        </p:nvSpPr>
-        <p:spPr>
-          <a:xfrm>
-            <a:off x="5120640" y="5138928"/>
-            <a:ext cx="6446520" cy="658368"/>
-          </a:xfrm>
-          <a:prstGeom prst="rect">
-            <a:avLst/>
-          </a:prstGeom>
-          <a:noFill/>
-          <a:ln/>
-        </p:spPr>
-        <p:txBody>
-          <a:bodyPr wrap="square" lIns="0" tIns="0" rIns="0" bIns="0" rtlCol="0" anchor="t"/>
-          <a:lstStyle/>
-          <a:p>
-            <a:pPr indent="0" marL="0">
-              <a:buNone/>
-            </a:pPr>
-            <a:r>
-              <a:rPr lang="en-US" sz="1200" dirty="0">
-                <a:solidFill>
-                  <a:srgbClr val="5D6B66"/>
-                </a:solidFill>
-                <a:latin typeface="Calibri" pitchFamily="34" charset="0"/>
-                <a:ea typeface="Calibri" pitchFamily="34" charset="-122"/>
-                <a:cs typeface="Calibri" pitchFamily="34" charset="-120"/>
-              </a:rPr>
-              <a:t>El EXIT HANDLER ejecuta ROLLBACK: el pedido sigue en PENDIENTE y el stock sigue siendo 3.</a:t>
-            </a:r>
-            <a:endParaRPr lang="en-US" sz="1200" dirty="0"/>
-          </a:p>
-        </p:txBody>
-      </p:sp>
-      <p:sp>
-        <p:nvSpPr>
-          <p:cNvPr id="24" name="Shape 22"/>
-          <p:cNvSpPr/>
-          <p:nvPr/>
-        </p:nvSpPr>
-        <p:spPr>
-          <a:xfrm>
-            <a:off x="640080" y="5998464"/>
-            <a:ext cx="10911535" cy="566928"/>
-          </a:xfrm>
-          <a:prstGeom prst="roundRect">
-            <a:avLst>
-              <a:gd name="adj" fmla="val 8065"/>
-            </a:avLst>
-          </a:prstGeom>
-          <a:solidFill>
-            <a:srgbClr val="EEF5F1"/>
-          </a:solidFill>
-          <a:ln w="12700">
-            <a:solidFill>
-              <a:srgbClr val="D9E5DF"/>
-            </a:solidFill>
-            <a:prstDash val="solid"/>
-          </a:ln>
-        </p:spPr>
-      </p:sp>
-      <p:sp>
-        <p:nvSpPr>
-          <p:cNvPr id="25" name="Text 23"/>
-          <p:cNvSpPr txBox="1"/>
-          <p:nvPr/>
-        </p:nvSpPr>
-        <p:spPr>
-          <a:xfrm>
-            <a:off x="914400" y="5998464"/>
-            <a:ext cx="10362895" cy="566928"/>
-          </a:xfrm>
-          <a:prstGeom prst="rect">
-            <a:avLst/>
-          </a:prstGeom>
-          <a:noFill/>
-          <a:ln/>
-        </p:spPr>
-        <p:txBody>
-          <a:bodyPr wrap="square" lIns="0" tIns="0" rIns="0" bIns="0" rtlCol="0" anchor="ctr"/>
-          <a:lstStyle/>
-          <a:p>
-            <a:pPr indent="0" marL="0">
-              <a:buNone/>
-            </a:pPr>
-            <a:r>
-              <a:rPr lang="en-US" sz="1200" b="1" dirty="0">
-                <a:solidFill>
-                  <a:srgbClr val="14524A"/>
-                </a:solidFill>
-                <a:latin typeface="Calibri" pitchFamily="34" charset="0"/>
-                <a:ea typeface="Calibri" pitchFamily="34" charset="-122"/>
-                <a:cs typeface="Calibri" pitchFamily="34" charset="-120"/>
-              </a:rPr>
-              <a:t>Y si todo lo anterior fallara, la restricción CHECK (stock_actual &gt;= 0) de la RN-07 seguiría impidiendo un inventario negativo.</a:t>
-            </a:r>
-            <a:endParaRPr lang="en-US" sz="1200" dirty="0"/>
+              <a:t>El campo de cantidad no admite cero ni números negativos.</a:t>
+            </a:r>
+            <a:endParaRPr lang="en-US" sz="1150" dirty="0"/>
           </a:p>
         </p:txBody>
       </p:sp>
@@ -3365,7 +3719,7 @@
                 <a:ea typeface="Cambria" pitchFamily="34" charset="-122"/>
                 <a:cs typeface="Cambria" pitchFamily="34" charset="-120"/>
               </a:rPr>
-              <a:t>Caso 2: dos clientes piden el mismo horario</a:t>
+              <a:t>En pantalla: Carrito con pedido rechazado</a:t>
             </a:r>
             <a:endParaRPr lang="en-US" sz="3400" dirty="0"/>
           </a:p>
@@ -3404,25 +3758,90 @@
                 <a:ea typeface="Calibri" pitchFamily="34" charset="-122"/>
                 <a:cs typeface="Calibri" pitchFamily="34" charset="-120"/>
               </a:rPr>
-              <a:t>Qué ocurre cuando dos personas pulsan «reservar» a la vez (RN-17)</a:t>
+              <a:t>El cliente pide 50 unidades de un producto con 3 en stock</a:t>
             </a:r>
             <a:endParaRPr lang="en-US" sz="1400" dirty="0"/>
           </a:p>
         </p:txBody>
       </p:sp>
-      <p:sp>
-        <p:nvSpPr>
-          <p:cNvPr id="4" name="Shape 2"/>
+      <p:pic>
+        <p:nvPicPr>
+          <p:cNvPr id="4" name="Image 0" descr="/tmp/claude-0/-home-user-VetPetSurco/b8d13659-c8d7-578f-913d-52522fae5ff2/scratchpad/ppt/capturas/04-carrito-bloqueado.png">    </p:cNvPr>
+          <p:cNvPicPr>
+            <a:picLocks noChangeAspect="1"/>
+          </p:cNvPicPr>
+          <p:nvPr/>
+        </p:nvPicPr>
+        <p:blipFill>
+          <a:blip r:embed="rId1"/>
+          <a:stretch>
+            <a:fillRect/>
+          </a:stretch>
+        </p:blipFill>
+        <p:spPr>
+          <a:xfrm>
+            <a:off x="1668790" y="1627632"/>
+            <a:ext cx="5532100" cy="4498848"/>
+          </a:xfrm>
+          <a:prstGeom prst="rect">
+            <a:avLst/>
+          </a:prstGeom>
+        </p:spPr>
+      </p:pic>
+      <p:sp>
+        <p:nvSpPr>
+          <p:cNvPr id="5" name="Text 2"/>
+          <p:cNvSpPr txBox="1"/>
+          <p:nvPr/>
+        </p:nvSpPr>
+        <p:spPr>
+          <a:xfrm>
+            <a:off x="8485632" y="1645920"/>
+            <a:ext cx="3108960" cy="347472"/>
+          </a:xfrm>
+          <a:prstGeom prst="rect">
+            <a:avLst/>
+          </a:prstGeom>
+          <a:noFill/>
+          <a:ln/>
+        </p:spPr>
+        <p:txBody>
+          <a:bodyPr wrap="square" lIns="0" tIns="0" rIns="0" bIns="0" rtlCol="0" anchor="ctr"/>
+          <a:lstStyle/>
+          <a:p>
+            <a:pPr indent="0" marL="0">
+              <a:buNone/>
+            </a:pPr>
+            <a:r>
+              <a:rPr lang="en-US" sz="1600" b="1" dirty="0">
+                <a:solidFill>
+                  <a:srgbClr val="14524A"/>
+                </a:solidFill>
+                <a:latin typeface="Cambria" pitchFamily="34" charset="0"/>
+                <a:ea typeface="Cambria" pitchFamily="34" charset="-122"/>
+                <a:cs typeface="Cambria" pitchFamily="34" charset="-120"/>
+              </a:rPr>
+              <a:t>Reglas enmarcadas</a:t>
+            </a:r>
+            <a:endParaRPr lang="en-US" sz="1600" dirty="0"/>
+          </a:p>
+        </p:txBody>
+      </p:sp>
+      <p:sp>
+        <p:nvSpPr>
+          <p:cNvPr id="6" name="Shape 3"/>
           <p:cNvSpPr/>
           <p:nvPr/>
         </p:nvSpPr>
         <p:spPr>
           <a:xfrm>
-            <a:off x="640080" y="1883664"/>
-            <a:ext cx="402336" cy="402336"/>
-          </a:xfrm>
-          <a:prstGeom prst="ellipse">
-            <a:avLst/>
+            <a:off x="8485632" y="2157984"/>
+            <a:ext cx="841248" cy="329184"/>
+          </a:xfrm>
+          <a:prstGeom prst="roundRect">
+            <a:avLst>
+              <a:gd name="adj" fmla="val 138889"/>
+            </a:avLst>
           </a:prstGeom>
           <a:solidFill>
             <a:srgbClr val="E8A33D"/>
@@ -3437,14 +3856,14 @@
       </p:sp>
       <p:sp>
         <p:nvSpPr>
-          <p:cNvPr id="5" name="Text 3"/>
-          <p:cNvSpPr txBox="1"/>
-          <p:nvPr/>
-        </p:nvSpPr>
-        <p:spPr>
-          <a:xfrm>
-            <a:off x="640080" y="1883664"/>
-            <a:ext cx="402336" cy="402336"/>
+          <p:cNvPr id="7" name="Text 4"/>
+          <p:cNvSpPr txBox="1"/>
+          <p:nvPr/>
+        </p:nvSpPr>
+        <p:spPr>
+          <a:xfrm>
+            <a:off x="8485632" y="2157984"/>
+            <a:ext cx="841248" cy="329184"/>
           </a:xfrm>
           <a:prstGeom prst="rect">
             <a:avLst/>
@@ -3460,7 +3879,7 @@
               <a:buNone/>
             </a:pPr>
             <a:r>
-              <a:rPr lang="en-US" sz="1300" b="1" dirty="0">
+              <a:rPr lang="en-US" sz="1050" b="1" dirty="0">
                 <a:solidFill>
                   <a:srgbClr val="14524A"/>
                 </a:solidFill>
@@ -3468,61 +3887,22 @@
                 <a:ea typeface="Calibri" pitchFamily="34" charset="-122"/>
                 <a:cs typeface="Calibri" pitchFamily="34" charset="-120"/>
               </a:rPr>
-              <a:t>1</a:t>
-            </a:r>
-            <a:endParaRPr lang="en-US" sz="1300" dirty="0"/>
-          </a:p>
-        </p:txBody>
-      </p:sp>
-      <p:sp>
-        <p:nvSpPr>
-          <p:cNvPr id="6" name="Text 4"/>
-          <p:cNvSpPr txBox="1"/>
-          <p:nvPr/>
-        </p:nvSpPr>
-        <p:spPr>
-          <a:xfrm>
-            <a:off x="1225296" y="1810512"/>
-            <a:ext cx="3749040" cy="310896"/>
-          </a:xfrm>
-          <a:prstGeom prst="rect">
-            <a:avLst/>
-          </a:prstGeom>
-          <a:noFill/>
-          <a:ln/>
-        </p:spPr>
-        <p:txBody>
-          <a:bodyPr wrap="square" lIns="0" tIns="0" rIns="0" bIns="0" rtlCol="0" anchor="ctr"/>
-          <a:lstStyle/>
-          <a:p>
-            <a:pPr indent="0" marL="0">
-              <a:buNone/>
-            </a:pPr>
-            <a:r>
-              <a:rPr lang="en-US" sz="1350" b="1" dirty="0">
-                <a:solidFill>
-                  <a:srgbClr val="14524A"/>
-                </a:solidFill>
-                <a:latin typeface="Calibri" pitchFamily="34" charset="0"/>
-                <a:ea typeface="Calibri" pitchFamily="34" charset="-122"/>
-                <a:cs typeface="Calibri" pitchFamily="34" charset="-120"/>
-              </a:rPr>
-              <a:t>Ana reserva</a:t>
-            </a:r>
-            <a:endParaRPr lang="en-US" sz="1350" dirty="0"/>
-          </a:p>
-        </p:txBody>
-      </p:sp>
-      <p:sp>
-        <p:nvSpPr>
-          <p:cNvPr id="7" name="Text 5"/>
-          <p:cNvSpPr txBox="1"/>
-          <p:nvPr/>
-        </p:nvSpPr>
-        <p:spPr>
-          <a:xfrm>
-            <a:off x="5120640" y="1792224"/>
-            <a:ext cx="6446520" cy="658368"/>
+              <a:t>RN-12</a:t>
+            </a:r>
+            <a:endParaRPr lang="en-US" sz="1050" dirty="0"/>
+          </a:p>
+        </p:txBody>
+      </p:sp>
+      <p:sp>
+        <p:nvSpPr>
+          <p:cNvPr id="8" name="Text 5"/>
+          <p:cNvSpPr txBox="1"/>
+          <p:nvPr/>
+        </p:nvSpPr>
+        <p:spPr>
+          <a:xfrm>
+            <a:off x="8485632" y="2560320"/>
+            <a:ext cx="3108960" cy="603504"/>
           </a:xfrm>
           <a:prstGeom prst="rect">
             <a:avLst/>
@@ -3538,7 +3918,7 @@
               <a:buNone/>
             </a:pPr>
             <a:r>
-              <a:rPr lang="en-US" sz="1200" dirty="0">
+              <a:rPr lang="en-US" sz="1150" dirty="0">
                 <a:solidFill>
                   <a:srgbClr val="5D6B66"/>
                 </a:solidFill>
@@ -3546,25 +3926,27 @@
                 <a:ea typeface="Calibri" pitchFamily="34" charset="-122"/>
                 <a:cs typeface="Calibri" pitchFamily="34" charset="-120"/>
               </a:rPr>
-              <a:t>Martes 10:00 con la veterinaria Lucía Bernal. El INSERT en citas se registra sin problema.</a:t>
-            </a:r>
-            <a:endParaRPr lang="en-US" sz="1200" dirty="0"/>
-          </a:p>
-        </p:txBody>
-      </p:sp>
-      <p:sp>
-        <p:nvSpPr>
-          <p:cNvPr id="8" name="Shape 6"/>
+              <a:t>Falla una línea y no se registra ninguna parte del pedido.</a:t>
+            </a:r>
+            <a:endParaRPr lang="en-US" sz="1150" dirty="0"/>
+          </a:p>
+        </p:txBody>
+      </p:sp>
+      <p:sp>
+        <p:nvSpPr>
+          <p:cNvPr id="9" name="Shape 6"/>
           <p:cNvSpPr/>
           <p:nvPr/>
         </p:nvSpPr>
         <p:spPr>
           <a:xfrm>
-            <a:off x="640080" y="2852928"/>
-            <a:ext cx="402336" cy="402336"/>
-          </a:xfrm>
-          <a:prstGeom prst="ellipse">
-            <a:avLst/>
+            <a:off x="8485632" y="3182112"/>
+            <a:ext cx="841248" cy="329184"/>
+          </a:xfrm>
+          <a:prstGeom prst="roundRect">
+            <a:avLst>
+              <a:gd name="adj" fmla="val 138889"/>
+            </a:avLst>
           </a:prstGeom>
           <a:solidFill>
             <a:srgbClr val="E8A33D"/>
@@ -3579,14 +3961,14 @@
       </p:sp>
       <p:sp>
         <p:nvSpPr>
-          <p:cNvPr id="9" name="Text 7"/>
-          <p:cNvSpPr txBox="1"/>
-          <p:nvPr/>
-        </p:nvSpPr>
-        <p:spPr>
-          <a:xfrm>
-            <a:off x="640080" y="2852928"/>
-            <a:ext cx="402336" cy="402336"/>
+          <p:cNvPr id="10" name="Text 7"/>
+          <p:cNvSpPr txBox="1"/>
+          <p:nvPr/>
+        </p:nvSpPr>
+        <p:spPr>
+          <a:xfrm>
+            <a:off x="8485632" y="3182112"/>
+            <a:ext cx="841248" cy="329184"/>
           </a:xfrm>
           <a:prstGeom prst="rect">
             <a:avLst/>
@@ -3602,7 +3984,7 @@
               <a:buNone/>
             </a:pPr>
             <a:r>
-              <a:rPr lang="en-US" sz="1300" b="1" dirty="0">
+              <a:rPr lang="en-US" sz="1050" b="1" dirty="0">
                 <a:solidFill>
                   <a:srgbClr val="14524A"/>
                 </a:solidFill>
@@ -3610,61 +3992,22 @@
                 <a:ea typeface="Calibri" pitchFamily="34" charset="-122"/>
                 <a:cs typeface="Calibri" pitchFamily="34" charset="-120"/>
               </a:rPr>
-              <a:t>2</a:t>
-            </a:r>
-            <a:endParaRPr lang="en-US" sz="1300" dirty="0"/>
-          </a:p>
-        </p:txBody>
-      </p:sp>
-      <p:sp>
-        <p:nvSpPr>
-          <p:cNvPr id="10" name="Text 8"/>
-          <p:cNvSpPr txBox="1"/>
-          <p:nvPr/>
-        </p:nvSpPr>
-        <p:spPr>
-          <a:xfrm>
-            <a:off x="1225296" y="2779776"/>
-            <a:ext cx="3749040" cy="310896"/>
-          </a:xfrm>
-          <a:prstGeom prst="rect">
-            <a:avLst/>
-          </a:prstGeom>
-          <a:noFill/>
-          <a:ln/>
-        </p:spPr>
-        <p:txBody>
-          <a:bodyPr wrap="square" lIns="0" tIns="0" rIns="0" bIns="0" rtlCol="0" anchor="ctr"/>
-          <a:lstStyle/>
-          <a:p>
-            <a:pPr indent="0" marL="0">
-              <a:buNone/>
-            </a:pPr>
-            <a:r>
-              <a:rPr lang="en-US" sz="1350" b="1" dirty="0">
-                <a:solidFill>
-                  <a:srgbClr val="14524A"/>
-                </a:solidFill>
-                <a:latin typeface="Calibri" pitchFamily="34" charset="0"/>
-                <a:ea typeface="Calibri" pitchFamily="34" charset="-122"/>
-                <a:cs typeface="Calibri" pitchFamily="34" charset="-120"/>
-              </a:rPr>
-              <a:t>Marco intenta el mismo bloque</a:t>
-            </a:r>
-            <a:endParaRPr lang="en-US" sz="1350" dirty="0"/>
-          </a:p>
-        </p:txBody>
-      </p:sp>
-      <p:sp>
-        <p:nvSpPr>
-          <p:cNvPr id="11" name="Text 9"/>
-          <p:cNvSpPr txBox="1"/>
-          <p:nvPr/>
-        </p:nvSpPr>
-        <p:spPr>
-          <a:xfrm>
-            <a:off x="5120640" y="2761488"/>
-            <a:ext cx="6446520" cy="658368"/>
+              <a:t>RN-11</a:t>
+            </a:r>
+            <a:endParaRPr lang="en-US" sz="1050" dirty="0"/>
+          </a:p>
+        </p:txBody>
+      </p:sp>
+      <p:sp>
+        <p:nvSpPr>
+          <p:cNvPr id="11" name="Text 8"/>
+          <p:cNvSpPr txBox="1"/>
+          <p:nvPr/>
+        </p:nvSpPr>
+        <p:spPr>
+          <a:xfrm>
+            <a:off x="8485632" y="3584448"/>
+            <a:ext cx="3108960" cy="603504"/>
           </a:xfrm>
           <a:prstGeom prst="rect">
             <a:avLst/>
@@ -3680,7 +4023,7 @@
               <a:buNone/>
             </a:pPr>
             <a:r>
-              <a:rPr lang="en-US" sz="1200" dirty="0">
+              <a:rPr lang="en-US" sz="1150" dirty="0">
                 <a:solidFill>
                   <a:srgbClr val="5D6B66"/>
                 </a:solidFill>
@@ -3688,25 +4031,27 @@
                 <a:ea typeface="Calibri" pitchFamily="34" charset="-122"/>
                 <a:cs typeface="Calibri" pitchFamily="34" charset="-120"/>
               </a:rPr>
-              <a:t>Un segundo después envía la misma fecha y hora con la misma veterinaria.</a:t>
-            </a:r>
-            <a:endParaRPr lang="en-US" sz="1200" dirty="0"/>
-          </a:p>
-        </p:txBody>
-      </p:sp>
-      <p:sp>
-        <p:nvSpPr>
-          <p:cNvPr id="12" name="Shape 10"/>
+              <a:t>El precio unitario queda congelado al agregar al carrito.</a:t>
+            </a:r>
+            <a:endParaRPr lang="en-US" sz="1150" dirty="0"/>
+          </a:p>
+        </p:txBody>
+      </p:sp>
+      <p:sp>
+        <p:nvSpPr>
+          <p:cNvPr id="12" name="Shape 9"/>
           <p:cNvSpPr/>
           <p:nvPr/>
         </p:nvSpPr>
         <p:spPr>
           <a:xfrm>
-            <a:off x="640080" y="3822192"/>
-            <a:ext cx="402336" cy="402336"/>
-          </a:xfrm>
-          <a:prstGeom prst="ellipse">
-            <a:avLst/>
+            <a:off x="8485632" y="4206240"/>
+            <a:ext cx="841248" cy="329184"/>
+          </a:xfrm>
+          <a:prstGeom prst="roundRect">
+            <a:avLst>
+              <a:gd name="adj" fmla="val 138889"/>
+            </a:avLst>
           </a:prstGeom>
           <a:solidFill>
             <a:srgbClr val="E8A33D"/>
@@ -3721,14 +4066,14 @@
       </p:sp>
       <p:sp>
         <p:nvSpPr>
-          <p:cNvPr id="13" name="Text 11"/>
-          <p:cNvSpPr txBox="1"/>
-          <p:nvPr/>
-        </p:nvSpPr>
-        <p:spPr>
-          <a:xfrm>
-            <a:off x="640080" y="3822192"/>
-            <a:ext cx="402336" cy="402336"/>
+          <p:cNvPr id="13" name="Text 10"/>
+          <p:cNvSpPr txBox="1"/>
+          <p:nvPr/>
+        </p:nvSpPr>
+        <p:spPr>
+          <a:xfrm>
+            <a:off x="8485632" y="4206240"/>
+            <a:ext cx="841248" cy="329184"/>
           </a:xfrm>
           <a:prstGeom prst="rect">
             <a:avLst/>
@@ -3744,7 +4089,7 @@
               <a:buNone/>
             </a:pPr>
             <a:r>
-              <a:rPr lang="en-US" sz="1300" b="1" dirty="0">
+              <a:rPr lang="en-US" sz="1050" b="1" dirty="0">
                 <a:solidFill>
                   <a:srgbClr val="14524A"/>
                 </a:solidFill>
@@ -3752,61 +4097,22 @@
                 <a:ea typeface="Calibri" pitchFamily="34" charset="-122"/>
                 <a:cs typeface="Calibri" pitchFamily="34" charset="-120"/>
               </a:rPr>
-              <a:t>3</a:t>
-            </a:r>
-            <a:endParaRPr lang="en-US" sz="1300" dirty="0"/>
-          </a:p>
-        </p:txBody>
-      </p:sp>
-      <p:sp>
-        <p:nvSpPr>
-          <p:cNvPr id="14" name="Text 12"/>
-          <p:cNvSpPr txBox="1"/>
-          <p:nvPr/>
-        </p:nvSpPr>
-        <p:spPr>
-          <a:xfrm>
-            <a:off x="1225296" y="3749040"/>
-            <a:ext cx="3749040" cy="310896"/>
-          </a:xfrm>
-          <a:prstGeom prst="rect">
-            <a:avLst/>
-          </a:prstGeom>
-          <a:noFill/>
-          <a:ln/>
-        </p:spPr>
-        <p:txBody>
-          <a:bodyPr wrap="square" lIns="0" tIns="0" rIns="0" bIns="0" rtlCol="0" anchor="ctr"/>
-          <a:lstStyle/>
-          <a:p>
-            <a:pPr indent="0" marL="0">
-              <a:buNone/>
-            </a:pPr>
-            <a:r>
-              <a:rPr lang="en-US" sz="1350" b="1" dirty="0">
-                <a:solidFill>
-                  <a:srgbClr val="14524A"/>
-                </a:solidFill>
-                <a:latin typeface="Calibri" pitchFamily="34" charset="0"/>
-                <a:ea typeface="Calibri" pitchFamily="34" charset="-122"/>
-                <a:cs typeface="Calibri" pitchFamily="34" charset="-120"/>
-              </a:rPr>
-              <a:t>La base de datos lo rechaza</a:t>
-            </a:r>
-            <a:endParaRPr lang="en-US" sz="1350" dirty="0"/>
-          </a:p>
-        </p:txBody>
-      </p:sp>
-      <p:sp>
-        <p:nvSpPr>
-          <p:cNvPr id="15" name="Text 13"/>
-          <p:cNvSpPr txBox="1"/>
-          <p:nvPr/>
-        </p:nvSpPr>
-        <p:spPr>
-          <a:xfrm>
-            <a:off x="5120640" y="3730752"/>
-            <a:ext cx="6446520" cy="658368"/>
+              <a:t>RN-10</a:t>
+            </a:r>
+            <a:endParaRPr lang="en-US" sz="1050" dirty="0"/>
+          </a:p>
+        </p:txBody>
+      </p:sp>
+      <p:sp>
+        <p:nvSpPr>
+          <p:cNvPr id="14" name="Text 11"/>
+          <p:cNvSpPr txBox="1"/>
+          <p:nvPr/>
+        </p:nvSpPr>
+        <p:spPr>
+          <a:xfrm>
+            <a:off x="8485632" y="4608576"/>
+            <a:ext cx="3108960" cy="603504"/>
           </a:xfrm>
           <a:prstGeom prst="rect">
             <a:avLst/>
@@ -3822,7 +4128,7 @@
               <a:buNone/>
             </a:pPr>
             <a:r>
-              <a:rPr lang="en-US" sz="1200" dirty="0">
+              <a:rPr lang="en-US" sz="1150" dirty="0">
                 <a:solidFill>
                   <a:srgbClr val="5D6B66"/>
                 </a:solidFill>
@@ -3830,25 +4136,27 @@
                 <a:ea typeface="Calibri" pitchFamily="34" charset="-122"/>
                 <a:cs typeface="Calibri" pitchFamily="34" charset="-120"/>
               </a:rPr>
-              <a:t>uk_agenda (veterinario_id, fecha_hora) devuelve el error 1062: Duplicate entry.</a:t>
-            </a:r>
-            <a:endParaRPr lang="en-US" sz="1200" dirty="0"/>
-          </a:p>
-        </p:txBody>
-      </p:sp>
-      <p:sp>
-        <p:nvSpPr>
-          <p:cNvPr id="16" name="Shape 14"/>
+              <a:t>La columna de cantidad solo acepta enteros mayores que cero.</a:t>
+            </a:r>
+            <a:endParaRPr lang="en-US" sz="1150" dirty="0"/>
+          </a:p>
+        </p:txBody>
+      </p:sp>
+      <p:sp>
+        <p:nvSpPr>
+          <p:cNvPr id="15" name="Shape 12"/>
           <p:cNvSpPr/>
           <p:nvPr/>
         </p:nvSpPr>
         <p:spPr>
           <a:xfrm>
-            <a:off x="640080" y="4791456"/>
-            <a:ext cx="402336" cy="402336"/>
-          </a:xfrm>
-          <a:prstGeom prst="ellipse">
-            <a:avLst/>
+            <a:off x="8485632" y="5230368"/>
+            <a:ext cx="841248" cy="329184"/>
+          </a:xfrm>
+          <a:prstGeom prst="roundRect">
+            <a:avLst>
+              <a:gd name="adj" fmla="val 138889"/>
+            </a:avLst>
           </a:prstGeom>
           <a:solidFill>
             <a:srgbClr val="E8A33D"/>
@@ -3863,14 +4171,14 @@
       </p:sp>
       <p:sp>
         <p:nvSpPr>
-          <p:cNvPr id="17" name="Text 15"/>
-          <p:cNvSpPr txBox="1"/>
-          <p:nvPr/>
-        </p:nvSpPr>
-        <p:spPr>
-          <a:xfrm>
-            <a:off x="640080" y="4791456"/>
-            <a:ext cx="402336" cy="402336"/>
+          <p:cNvPr id="16" name="Text 13"/>
+          <p:cNvSpPr txBox="1"/>
+          <p:nvPr/>
+        </p:nvSpPr>
+        <p:spPr>
+          <a:xfrm>
+            <a:off x="8485632" y="5230368"/>
+            <a:ext cx="841248" cy="329184"/>
           </a:xfrm>
           <a:prstGeom prst="rect">
             <a:avLst/>
@@ -3886,7 +4194,7 @@
               <a:buNone/>
             </a:pPr>
             <a:r>
-              <a:rPr lang="en-US" sz="1300" b="1" dirty="0">
+              <a:rPr lang="en-US" sz="1050" b="1" dirty="0">
                 <a:solidFill>
                   <a:srgbClr val="14524A"/>
                 </a:solidFill>
@@ -3894,61 +4202,22 @@
                 <a:ea typeface="Calibri" pitchFamily="34" charset="-122"/>
                 <a:cs typeface="Calibri" pitchFamily="34" charset="-120"/>
               </a:rPr>
-              <a:t>4</a:t>
-            </a:r>
-            <a:endParaRPr lang="en-US" sz="1300" dirty="0"/>
-          </a:p>
-        </p:txBody>
-      </p:sp>
-      <p:sp>
-        <p:nvSpPr>
-          <p:cNvPr id="18" name="Text 16"/>
-          <p:cNvSpPr txBox="1"/>
-          <p:nvPr/>
-        </p:nvSpPr>
-        <p:spPr>
-          <a:xfrm>
-            <a:off x="1225296" y="4718304"/>
-            <a:ext cx="3749040" cy="310896"/>
-          </a:xfrm>
-          <a:prstGeom prst="rect">
-            <a:avLst/>
-          </a:prstGeom>
-          <a:noFill/>
-          <a:ln/>
-        </p:spPr>
-        <p:txBody>
-          <a:bodyPr wrap="square" lIns="0" tIns="0" rIns="0" bIns="0" rtlCol="0" anchor="ctr"/>
-          <a:lstStyle/>
-          <a:p>
-            <a:pPr indent="0" marL="0">
-              <a:buNone/>
-            </a:pPr>
-            <a:r>
-              <a:rPr lang="en-US" sz="1350" b="1" dirty="0">
-                <a:solidFill>
-                  <a:srgbClr val="14524A"/>
-                </a:solidFill>
-                <a:latin typeface="Calibri" pitchFamily="34" charset="0"/>
-                <a:ea typeface="Calibri" pitchFamily="34" charset="-122"/>
-                <a:cs typeface="Calibri" pitchFamily="34" charset="-120"/>
-              </a:rPr>
-              <a:t>La aplicación reacciona</a:t>
-            </a:r>
-            <a:endParaRPr lang="en-US" sz="1350" dirty="0"/>
-          </a:p>
-        </p:txBody>
-      </p:sp>
-      <p:sp>
-        <p:nvSpPr>
-          <p:cNvPr id="19" name="Text 17"/>
-          <p:cNvSpPr txBox="1"/>
-          <p:nvPr/>
-        </p:nvSpPr>
-        <p:spPr>
-          <a:xfrm>
-            <a:off x="5120640" y="4700016"/>
-            <a:ext cx="6446520" cy="658368"/>
+              <a:t>RN-14</a:t>
+            </a:r>
+            <a:endParaRPr lang="en-US" sz="1050" dirty="0"/>
+          </a:p>
+        </p:txBody>
+      </p:sp>
+      <p:sp>
+        <p:nvSpPr>
+          <p:cNvPr id="17" name="Text 14"/>
+          <p:cNvSpPr txBox="1"/>
+          <p:nvPr/>
+        </p:nvSpPr>
+        <p:spPr>
+          <a:xfrm>
+            <a:off x="8485632" y="5632704"/>
+            <a:ext cx="3108960" cy="603504"/>
           </a:xfrm>
           <a:prstGeom prst="rect">
             <a:avLst/>
@@ -3964,7 +4233,7 @@
               <a:buNone/>
             </a:pPr>
             <a:r>
-              <a:rPr lang="en-US" sz="1200" dirty="0">
+              <a:rPr lang="en-US" sz="1150" dirty="0">
                 <a:solidFill>
                   <a:srgbClr val="5D6B66"/>
                 </a:solidFill>
@@ -3972,75 +4241,9 @@
                 <a:ea typeface="Calibri" pitchFamily="34" charset="-122"/>
                 <a:cs typeface="Calibri" pitchFamily="34" charset="-120"/>
               </a:rPr>
-              <a:t>Captura el error, marca el bloque como no disponible y le ofrece a Marco el siguiente horario libre.</a:t>
-            </a:r>
-            <a:endParaRPr lang="en-US" sz="1200" dirty="0"/>
-          </a:p>
-        </p:txBody>
-      </p:sp>
-      <p:sp>
-        <p:nvSpPr>
-          <p:cNvPr id="20" name="Shape 18"/>
-          <p:cNvSpPr/>
-          <p:nvPr/>
-        </p:nvSpPr>
-        <p:spPr>
-          <a:xfrm>
-            <a:off x="640080" y="5742432"/>
-            <a:ext cx="10911535" cy="786384"/>
-          </a:xfrm>
-          <a:prstGeom prst="roundRect">
-            <a:avLst>
-              <a:gd name="adj" fmla="val 5814"/>
-            </a:avLst>
-          </a:prstGeom>
-          <a:solidFill>
-            <a:srgbClr val="14524A"/>
-          </a:solidFill>
-          <a:ln w="12700">
-            <a:solidFill>
-              <a:srgbClr val="14524A"/>
-            </a:solidFill>
-            <a:prstDash val="solid"/>
-          </a:ln>
-        </p:spPr>
-      </p:sp>
-      <p:sp>
-        <p:nvSpPr>
-          <p:cNvPr id="21" name="Text 19"/>
-          <p:cNvSpPr txBox="1"/>
-          <p:nvPr/>
-        </p:nvSpPr>
-        <p:spPr>
-          <a:xfrm>
-            <a:off x="950976" y="5742432"/>
-            <a:ext cx="10289743" cy="786384"/>
-          </a:xfrm>
-          <a:prstGeom prst="rect">
-            <a:avLst/>
-          </a:prstGeom>
-          <a:noFill/>
-          <a:ln/>
-        </p:spPr>
-        <p:txBody>
-          <a:bodyPr wrap="square" lIns="0" tIns="0" rIns="0" bIns="0" rtlCol="0" anchor="ctr"/>
-          <a:lstStyle/>
-          <a:p>
-            <a:pPr indent="0" marL="0">
-              <a:buNone/>
-            </a:pPr>
-            <a:r>
-              <a:rPr lang="en-US" sz="1250" b="1" dirty="0">
-                <a:solidFill>
-                  <a:srgbClr val="FFFFFF"/>
-                </a:solidFill>
-                <a:latin typeface="Calibri" pitchFamily="34" charset="0"/>
-                <a:ea typeface="Calibri" pitchFamily="34" charset="-122"/>
-                <a:cs typeface="Calibri" pitchFamily="34" charset="-120"/>
-              </a:rPr>
-              <a:t>Un «if» en la aplicación no habría bastado: entre la comprobación y el guardado caben las dos reservas. La restricción UNIQUE resuelve el empate dentro del motor.</a:t>
-            </a:r>
-            <a:endParaRPr lang="en-US" sz="1250" dirty="0"/>
+              <a:t>El pedido se marca como compra directa o como suscripción.</a:t>
+            </a:r>
+            <a:endParaRPr lang="en-US" sz="1150" dirty="0"/>
           </a:p>
         </p:txBody>
       </p:sp>
@@ -4102,7 +4305,7 @@
                 <a:ea typeface="Cambria" pitchFamily="34" charset="-122"/>
                 <a:cs typeface="Cambria" pitchFamily="34" charset="-120"/>
               </a:rPr>
-              <a:t>Por qué las bajamos a la base de datos</a:t>
+              <a:t>En pantalla: Agenda de citas</a:t>
             </a:r>
             <a:endParaRPr lang="en-US" sz="3400" dirty="0"/>
           </a:p>
@@ -4141,34 +4344,97 @@
                 <a:ea typeface="Calibri" pitchFamily="34" charset="-122"/>
                 <a:cs typeface="Calibri" pitchFamily="34" charset="-120"/>
               </a:rPr>
-              <a:t>Tres razones por las que una regla no se queda solo en el código de la aplicación</a:t>
+              <a:t>Los bloques ya reservados con ese veterinario aparecen tachados</a:t>
             </a:r>
             <a:endParaRPr lang="en-US" sz="1400" dirty="0"/>
           </a:p>
         </p:txBody>
       </p:sp>
-      <p:sp>
-        <p:nvSpPr>
-          <p:cNvPr id="4" name="Shape 2"/>
+      <p:pic>
+        <p:nvPicPr>
+          <p:cNvPr id="4" name="Image 0" descr="/tmp/claude-0/-home-user-VetPetSurco/b8d13659-c8d7-578f-913d-52522fae5ff2/scratchpad/ppt/capturas/05-agenda.png">    </p:cNvPr>
+          <p:cNvPicPr>
+            <a:picLocks noChangeAspect="1"/>
+          </p:cNvPicPr>
+          <p:nvPr/>
+        </p:nvPicPr>
+        <p:blipFill>
+          <a:blip r:embed="rId1"/>
+          <a:stretch>
+            <a:fillRect/>
+          </a:stretch>
+        </p:blipFill>
+        <p:spPr>
+          <a:xfrm>
+            <a:off x="1394858" y="1627632"/>
+            <a:ext cx="6079965" cy="4498848"/>
+          </a:xfrm>
+          <a:prstGeom prst="rect">
+            <a:avLst/>
+          </a:prstGeom>
+        </p:spPr>
+      </p:pic>
+      <p:sp>
+        <p:nvSpPr>
+          <p:cNvPr id="5" name="Text 2"/>
+          <p:cNvSpPr txBox="1"/>
+          <p:nvPr/>
+        </p:nvSpPr>
+        <p:spPr>
+          <a:xfrm>
+            <a:off x="8485632" y="1645920"/>
+            <a:ext cx="3108960" cy="347472"/>
+          </a:xfrm>
+          <a:prstGeom prst="rect">
+            <a:avLst/>
+          </a:prstGeom>
+          <a:noFill/>
+          <a:ln/>
+        </p:spPr>
+        <p:txBody>
+          <a:bodyPr wrap="square" lIns="0" tIns="0" rIns="0" bIns="0" rtlCol="0" anchor="ctr"/>
+          <a:lstStyle/>
+          <a:p>
+            <a:pPr indent="0" marL="0">
+              <a:buNone/>
+            </a:pPr>
+            <a:r>
+              <a:rPr lang="en-US" sz="1600" b="1" dirty="0">
+                <a:solidFill>
+                  <a:srgbClr val="14524A"/>
+                </a:solidFill>
+                <a:latin typeface="Cambria" pitchFamily="34" charset="0"/>
+                <a:ea typeface="Cambria" pitchFamily="34" charset="-122"/>
+                <a:cs typeface="Cambria" pitchFamily="34" charset="-120"/>
+              </a:rPr>
+              <a:t>Reglas enmarcadas</a:t>
+            </a:r>
+            <a:endParaRPr lang="en-US" sz="1600" dirty="0"/>
+          </a:p>
+        </p:txBody>
+      </p:sp>
+      <p:sp>
+        <p:nvSpPr>
+          <p:cNvPr id="6" name="Shape 3"/>
           <p:cNvSpPr/>
           <p:nvPr/>
         </p:nvSpPr>
         <p:spPr>
           <a:xfrm>
-            <a:off x="640080" y="1773936"/>
-            <a:ext cx="3417722" cy="3621024"/>
+            <a:off x="8485632" y="2157984"/>
+            <a:ext cx="841248" cy="329184"/>
           </a:xfrm>
           <a:prstGeom prst="roundRect">
             <a:avLst>
-              <a:gd name="adj" fmla="val 1338"/>
+              <a:gd name="adj" fmla="val 138889"/>
             </a:avLst>
           </a:prstGeom>
           <a:solidFill>
-            <a:srgbClr val="EEF5F1"/>
+            <a:srgbClr val="E8A33D"/>
           </a:solidFill>
           <a:ln w="12700">
             <a:solidFill>
-              <a:srgbClr val="D9E5DF"/>
+              <a:srgbClr val="E8A33D"/>
             </a:solidFill>
             <a:prstDash val="solid"/>
           </a:ln>
@@ -4176,53 +4442,53 @@
       </p:sp>
       <p:sp>
         <p:nvSpPr>
-          <p:cNvPr id="5" name="Text 3"/>
-          <p:cNvSpPr txBox="1"/>
-          <p:nvPr/>
-        </p:nvSpPr>
-        <p:spPr>
-          <a:xfrm>
-            <a:off x="914400" y="1956816"/>
-            <a:ext cx="2869082" cy="1078992"/>
-          </a:xfrm>
-          <a:prstGeom prst="rect">
-            <a:avLst/>
-          </a:prstGeom>
-          <a:noFill/>
-          <a:ln/>
-        </p:spPr>
-        <p:txBody>
-          <a:bodyPr wrap="square" lIns="0" tIns="0" rIns="0" bIns="0" rtlCol="0" anchor="ctr"/>
-          <a:lstStyle/>
-          <a:p>
-            <a:pPr indent="0" marL="0">
-              <a:buNone/>
-            </a:pPr>
-            <a:r>
-              <a:rPr lang="en-US" sz="6000" b="1" dirty="0">
-                <a:solidFill>
-                  <a:srgbClr val="E8A33D"/>
-                </a:solidFill>
-                <a:latin typeface="Cambria" pitchFamily="34" charset="0"/>
-                <a:ea typeface="Cambria" pitchFamily="34" charset="-122"/>
-                <a:cs typeface="Cambria" pitchFamily="34" charset="-120"/>
-              </a:rPr>
-              <a:t>01</a:t>
-            </a:r>
-            <a:endParaRPr lang="en-US" sz="6000" dirty="0"/>
-          </a:p>
-        </p:txBody>
-      </p:sp>
-      <p:sp>
-        <p:nvSpPr>
-          <p:cNvPr id="6" name="Text 4"/>
-          <p:cNvSpPr txBox="1"/>
-          <p:nvPr/>
-        </p:nvSpPr>
-        <p:spPr>
-          <a:xfrm>
-            <a:off x="914400" y="3072384"/>
-            <a:ext cx="2869082" cy="768096"/>
+          <p:cNvPr id="7" name="Text 4"/>
+          <p:cNvSpPr txBox="1"/>
+          <p:nvPr/>
+        </p:nvSpPr>
+        <p:spPr>
+          <a:xfrm>
+            <a:off x="8485632" y="2157984"/>
+            <a:ext cx="841248" cy="329184"/>
+          </a:xfrm>
+          <a:prstGeom prst="rect">
+            <a:avLst/>
+          </a:prstGeom>
+          <a:noFill/>
+          <a:ln/>
+        </p:spPr>
+        <p:txBody>
+          <a:bodyPr wrap="square" lIns="0" tIns="0" rIns="0" bIns="0" rtlCol="0" anchor="ctr"/>
+          <a:lstStyle/>
+          <a:p>
+            <a:pPr algn="ctr" indent="0" marL="0">
+              <a:buNone/>
+            </a:pPr>
+            <a:r>
+              <a:rPr lang="en-US" sz="1050" b="1" dirty="0">
+                <a:solidFill>
+                  <a:srgbClr val="14524A"/>
+                </a:solidFill>
+                <a:latin typeface="Calibri" pitchFamily="34" charset="0"/>
+                <a:ea typeface="Calibri" pitchFamily="34" charset="-122"/>
+                <a:cs typeface="Calibri" pitchFamily="34" charset="-120"/>
+              </a:rPr>
+              <a:t>RN-04</a:t>
+            </a:r>
+            <a:endParaRPr lang="en-US" sz="1050" dirty="0"/>
+          </a:p>
+        </p:txBody>
+      </p:sp>
+      <p:sp>
+        <p:nvSpPr>
+          <p:cNvPr id="8" name="Text 5"/>
+          <p:cNvSpPr txBox="1"/>
+          <p:nvPr/>
+        </p:nvSpPr>
+        <p:spPr>
+          <a:xfrm>
+            <a:off x="8485632" y="2560320"/>
+            <a:ext cx="3108960" cy="603504"/>
           </a:xfrm>
           <a:prstGeom prst="rect">
             <a:avLst/>
@@ -4238,46 +4504,7 @@
               <a:buNone/>
             </a:pPr>
             <a:r>
-              <a:rPr lang="en-US" sz="1900" b="1" dirty="0">
-                <a:solidFill>
-                  <a:srgbClr val="14524A"/>
-                </a:solidFill>
-                <a:latin typeface="Cambria" pitchFamily="34" charset="0"/>
-                <a:ea typeface="Cambria" pitchFamily="34" charset="-122"/>
-                <a:cs typeface="Cambria" pitchFamily="34" charset="-120"/>
-              </a:rPr>
-              <a:t>La app no es la única puerta</a:t>
-            </a:r>
-            <a:endParaRPr lang="en-US" sz="1900" dirty="0"/>
-          </a:p>
-        </p:txBody>
-      </p:sp>
-      <p:sp>
-        <p:nvSpPr>
-          <p:cNvPr id="7" name="Text 5"/>
-          <p:cNvSpPr txBox="1"/>
-          <p:nvPr/>
-        </p:nvSpPr>
-        <p:spPr>
-          <a:xfrm>
-            <a:off x="914400" y="3877056"/>
-            <a:ext cx="2869082" cy="1371600"/>
-          </a:xfrm>
-          <a:prstGeom prst="rect">
-            <a:avLst/>
-          </a:prstGeom>
-          <a:noFill/>
-          <a:ln/>
-        </p:spPr>
-        <p:txBody>
-          <a:bodyPr wrap="square" lIns="0" tIns="0" rIns="0" bIns="0" rtlCol="0" anchor="t"/>
-          <a:lstStyle/>
-          <a:p>
-            <a:pPr indent="0" marL="0">
-              <a:buNone/>
-            </a:pPr>
-            <a:r>
-              <a:rPr lang="en-US" sz="1200" dirty="0">
+              <a:rPr lang="en-US" sz="1150" dirty="0">
                 <a:solidFill>
                   <a:srgbClr val="5D6B66"/>
                 </a:solidFill>
@@ -4285,34 +4512,34 @@
                 <a:ea typeface="Calibri" pitchFamily="34" charset="-122"/>
                 <a:cs typeface="Calibri" pitchFamily="34" charset="-120"/>
               </a:rPr>
-              <a:t>Un script de carga, una consulta manual o una segunda aplicación escriben directo en la tabla. La restricción del motor no se puede rodear por ningún camino.</a:t>
-            </a:r>
-            <a:endParaRPr lang="en-US" sz="1200" dirty="0"/>
-          </a:p>
-        </p:txBody>
-      </p:sp>
-      <p:sp>
-        <p:nvSpPr>
-          <p:cNvPr id="8" name="Shape 6"/>
+              <a:t>El desplegable solo ofrece las mascotas de la cuenta que entró.</a:t>
+            </a:r>
+            <a:endParaRPr lang="en-US" sz="1150" dirty="0"/>
+          </a:p>
+        </p:txBody>
+      </p:sp>
+      <p:sp>
+        <p:nvSpPr>
+          <p:cNvPr id="9" name="Shape 6"/>
           <p:cNvSpPr/>
           <p:nvPr/>
         </p:nvSpPr>
         <p:spPr>
           <a:xfrm>
-            <a:off x="4386986" y="1773936"/>
-            <a:ext cx="3417722" cy="3621024"/>
+            <a:off x="8485632" y="3182112"/>
+            <a:ext cx="841248" cy="329184"/>
           </a:xfrm>
           <a:prstGeom prst="roundRect">
             <a:avLst>
-              <a:gd name="adj" fmla="val 1338"/>
+              <a:gd name="adj" fmla="val 138889"/>
             </a:avLst>
           </a:prstGeom>
           <a:solidFill>
-            <a:srgbClr val="EEF5F1"/>
+            <a:srgbClr val="E8A33D"/>
           </a:solidFill>
           <a:ln w="12700">
             <a:solidFill>
-              <a:srgbClr val="D9E5DF"/>
+              <a:srgbClr val="E8A33D"/>
             </a:solidFill>
             <a:prstDash val="solid"/>
           </a:ln>
@@ -4320,53 +4547,53 @@
       </p:sp>
       <p:sp>
         <p:nvSpPr>
-          <p:cNvPr id="9" name="Text 7"/>
-          <p:cNvSpPr txBox="1"/>
-          <p:nvPr/>
-        </p:nvSpPr>
-        <p:spPr>
-          <a:xfrm>
-            <a:off x="4661306" y="1956816"/>
-            <a:ext cx="2869082" cy="1078992"/>
-          </a:xfrm>
-          <a:prstGeom prst="rect">
-            <a:avLst/>
-          </a:prstGeom>
-          <a:noFill/>
-          <a:ln/>
-        </p:spPr>
-        <p:txBody>
-          <a:bodyPr wrap="square" lIns="0" tIns="0" rIns="0" bIns="0" rtlCol="0" anchor="ctr"/>
-          <a:lstStyle/>
-          <a:p>
-            <a:pPr indent="0" marL="0">
-              <a:buNone/>
-            </a:pPr>
-            <a:r>
-              <a:rPr lang="en-US" sz="6000" b="1" dirty="0">
-                <a:solidFill>
-                  <a:srgbClr val="E8A33D"/>
-                </a:solidFill>
-                <a:latin typeface="Cambria" pitchFamily="34" charset="0"/>
-                <a:ea typeface="Cambria" pitchFamily="34" charset="-122"/>
-                <a:cs typeface="Cambria" pitchFamily="34" charset="-120"/>
-              </a:rPr>
-              <a:t>02</a:t>
-            </a:r>
-            <a:endParaRPr lang="en-US" sz="6000" dirty="0"/>
-          </a:p>
-        </p:txBody>
-      </p:sp>
-      <p:sp>
-        <p:nvSpPr>
-          <p:cNvPr id="10" name="Text 8"/>
-          <p:cNvSpPr txBox="1"/>
-          <p:nvPr/>
-        </p:nvSpPr>
-        <p:spPr>
-          <a:xfrm>
-            <a:off x="4661306" y="3072384"/>
-            <a:ext cx="2869082" cy="768096"/>
+          <p:cNvPr id="10" name="Text 7"/>
+          <p:cNvSpPr txBox="1"/>
+          <p:nvPr/>
+        </p:nvSpPr>
+        <p:spPr>
+          <a:xfrm>
+            <a:off x="8485632" y="3182112"/>
+            <a:ext cx="841248" cy="329184"/>
+          </a:xfrm>
+          <a:prstGeom prst="rect">
+            <a:avLst/>
+          </a:prstGeom>
+          <a:noFill/>
+          <a:ln/>
+        </p:spPr>
+        <p:txBody>
+          <a:bodyPr wrap="square" lIns="0" tIns="0" rIns="0" bIns="0" rtlCol="0" anchor="ctr"/>
+          <a:lstStyle/>
+          <a:p>
+            <a:pPr algn="ctr" indent="0" marL="0">
+              <a:buNone/>
+            </a:pPr>
+            <a:r>
+              <a:rPr lang="en-US" sz="1050" b="1" dirty="0">
+                <a:solidFill>
+                  <a:srgbClr val="14524A"/>
+                </a:solidFill>
+                <a:latin typeface="Calibri" pitchFamily="34" charset="0"/>
+                <a:ea typeface="Calibri" pitchFamily="34" charset="-122"/>
+                <a:cs typeface="Calibri" pitchFamily="34" charset="-120"/>
+              </a:rPr>
+              <a:t>RN-17</a:t>
+            </a:r>
+            <a:endParaRPr lang="en-US" sz="1050" dirty="0"/>
+          </a:p>
+        </p:txBody>
+      </p:sp>
+      <p:sp>
+        <p:nvSpPr>
+          <p:cNvPr id="11" name="Text 8"/>
+          <p:cNvSpPr txBox="1"/>
+          <p:nvPr/>
+        </p:nvSpPr>
+        <p:spPr>
+          <a:xfrm>
+            <a:off x="8485632" y="3584448"/>
+            <a:ext cx="3108960" cy="603504"/>
           </a:xfrm>
           <a:prstGeom prst="rect">
             <a:avLst/>
@@ -4382,46 +4609,7 @@
               <a:buNone/>
             </a:pPr>
             <a:r>
-              <a:rPr lang="en-US" sz="1900" b="1" dirty="0">
-                <a:solidFill>
-                  <a:srgbClr val="14524A"/>
-                </a:solidFill>
-                <a:latin typeface="Cambria" pitchFamily="34" charset="0"/>
-                <a:ea typeface="Cambria" pitchFamily="34" charset="-122"/>
-                <a:cs typeface="Cambria" pitchFamily="34" charset="-120"/>
-              </a:rPr>
-              <a:t>La concurrencia no perdona</a:t>
-            </a:r>
-            <a:endParaRPr lang="en-US" sz="1900" dirty="0"/>
-          </a:p>
-        </p:txBody>
-      </p:sp>
-      <p:sp>
-        <p:nvSpPr>
-          <p:cNvPr id="11" name="Text 9"/>
-          <p:cNvSpPr txBox="1"/>
-          <p:nvPr/>
-        </p:nvSpPr>
-        <p:spPr>
-          <a:xfrm>
-            <a:off x="4661306" y="3877056"/>
-            <a:ext cx="2869082" cy="1371600"/>
-          </a:xfrm>
-          <a:prstGeom prst="rect">
-            <a:avLst/>
-          </a:prstGeom>
-          <a:noFill/>
-          <a:ln/>
-        </p:spPr>
-        <p:txBody>
-          <a:bodyPr wrap="square" lIns="0" tIns="0" rIns="0" bIns="0" rtlCol="0" anchor="t"/>
-          <a:lstStyle/>
-          <a:p>
-            <a:pPr indent="0" marL="0">
-              <a:buNone/>
-            </a:pPr>
-            <a:r>
-              <a:rPr lang="en-US" sz="1200" dirty="0">
+              <a:rPr lang="en-US" sz="1150" dirty="0">
                 <a:solidFill>
                   <a:srgbClr val="5D6B66"/>
                 </a:solidFill>
@@ -4429,192 +4617,9 @@
                 <a:ea typeface="Calibri" pitchFamily="34" charset="-122"/>
                 <a:cs typeface="Calibri" pitchFamily="34" charset="-120"/>
               </a:rPr>
-              <a:t>Dos usuarios simultáneos pueden pasar ambos por el mismo «if» antes de que cualquiera guarde. UNIQUE y FOR UPDATE deciden el empate; una comprobación en memoria, no.</a:t>
-            </a:r>
-            <a:endParaRPr lang="en-US" sz="1200" dirty="0"/>
-          </a:p>
-        </p:txBody>
-      </p:sp>
-      <p:sp>
-        <p:nvSpPr>
-          <p:cNvPr id="12" name="Shape 10"/>
-          <p:cNvSpPr/>
-          <p:nvPr/>
-        </p:nvSpPr>
-        <p:spPr>
-          <a:xfrm>
-            <a:off x="8133893" y="1773936"/>
-            <a:ext cx="3417722" cy="3621024"/>
-          </a:xfrm>
-          <a:prstGeom prst="roundRect">
-            <a:avLst>
-              <a:gd name="adj" fmla="val 1338"/>
-            </a:avLst>
-          </a:prstGeom>
-          <a:solidFill>
-            <a:srgbClr val="14524A"/>
-          </a:solidFill>
-          <a:ln w="12700">
-            <a:solidFill>
-              <a:srgbClr val="14524A"/>
-            </a:solidFill>
-            <a:prstDash val="solid"/>
-          </a:ln>
-        </p:spPr>
-      </p:sp>
-      <p:sp>
-        <p:nvSpPr>
-          <p:cNvPr id="13" name="Text 11"/>
-          <p:cNvSpPr txBox="1"/>
-          <p:nvPr/>
-        </p:nvSpPr>
-        <p:spPr>
-          <a:xfrm>
-            <a:off x="8408213" y="1956816"/>
-            <a:ext cx="2869082" cy="1078992"/>
-          </a:xfrm>
-          <a:prstGeom prst="rect">
-            <a:avLst/>
-          </a:prstGeom>
-          <a:noFill/>
-          <a:ln/>
-        </p:spPr>
-        <p:txBody>
-          <a:bodyPr wrap="square" lIns="0" tIns="0" rIns="0" bIns="0" rtlCol="0" anchor="ctr"/>
-          <a:lstStyle/>
-          <a:p>
-            <a:pPr indent="0" marL="0">
-              <a:buNone/>
-            </a:pPr>
-            <a:r>
-              <a:rPr lang="en-US" sz="6000" b="1" dirty="0">
-                <a:solidFill>
-                  <a:srgbClr val="E8A33D"/>
-                </a:solidFill>
-                <a:latin typeface="Cambria" pitchFamily="34" charset="0"/>
-                <a:ea typeface="Cambria" pitchFamily="34" charset="-122"/>
-                <a:cs typeface="Cambria" pitchFamily="34" charset="-120"/>
-              </a:rPr>
-              <a:t>03</a:t>
-            </a:r>
-            <a:endParaRPr lang="en-US" sz="6000" dirty="0"/>
-          </a:p>
-        </p:txBody>
-      </p:sp>
-      <p:sp>
-        <p:nvSpPr>
-          <p:cNvPr id="14" name="Text 12"/>
-          <p:cNvSpPr txBox="1"/>
-          <p:nvPr/>
-        </p:nvSpPr>
-        <p:spPr>
-          <a:xfrm>
-            <a:off x="8408213" y="3072384"/>
-            <a:ext cx="2869082" cy="768096"/>
-          </a:xfrm>
-          <a:prstGeom prst="rect">
-            <a:avLst/>
-          </a:prstGeom>
-          <a:noFill/>
-          <a:ln/>
-        </p:spPr>
-        <p:txBody>
-          <a:bodyPr wrap="square" lIns="0" tIns="0" rIns="0" bIns="0" rtlCol="0" anchor="t"/>
-          <a:lstStyle/>
-          <a:p>
-            <a:pPr indent="0" marL="0">
-              <a:buNone/>
-            </a:pPr>
-            <a:r>
-              <a:rPr lang="en-US" sz="1900" b="1" dirty="0">
-                <a:solidFill>
-                  <a:srgbClr val="FFFFFF"/>
-                </a:solidFill>
-                <a:latin typeface="Cambria" pitchFamily="34" charset="0"/>
-                <a:ea typeface="Cambria" pitchFamily="34" charset="-122"/>
-                <a:cs typeface="Cambria" pitchFamily="34" charset="-120"/>
-              </a:rPr>
-              <a:t>La regla queda documentada</a:t>
-            </a:r>
-            <a:endParaRPr lang="en-US" sz="1900" dirty="0"/>
-          </a:p>
-        </p:txBody>
-      </p:sp>
-      <p:sp>
-        <p:nvSpPr>
-          <p:cNvPr id="15" name="Text 13"/>
-          <p:cNvSpPr txBox="1"/>
-          <p:nvPr/>
-        </p:nvSpPr>
-        <p:spPr>
-          <a:xfrm>
-            <a:off x="8408213" y="3877056"/>
-            <a:ext cx="2869082" cy="1371600"/>
-          </a:xfrm>
-          <a:prstGeom prst="rect">
-            <a:avLst/>
-          </a:prstGeom>
-          <a:noFill/>
-          <a:ln/>
-        </p:spPr>
-        <p:txBody>
-          <a:bodyPr wrap="square" lIns="0" tIns="0" rIns="0" bIns="0" rtlCol="0" anchor="t"/>
-          <a:lstStyle/>
-          <a:p>
-            <a:pPr indent="0" marL="0">
-              <a:buNone/>
-            </a:pPr>
-            <a:r>
-              <a:rPr lang="en-US" sz="1200" dirty="0">
-                <a:solidFill>
-                  <a:srgbClr val="CFE3DC"/>
-                </a:solidFill>
-                <a:latin typeface="Calibri" pitchFamily="34" charset="0"/>
-                <a:ea typeface="Calibri" pitchFamily="34" charset="-122"/>
-                <a:cs typeface="Calibri" pitchFamily="34" charset="-120"/>
-              </a:rPr>
-              <a:t>El esquema es la fuente de verdad: quien lea las tablas entiende la regla sin abrir una sola clase Java, y no puede quedar desactualizada respecto del código.</a:t>
-            </a:r>
-            <a:endParaRPr lang="en-US" sz="1200" dirty="0"/>
-          </a:p>
-        </p:txBody>
-      </p:sp>
-      <p:sp>
-        <p:nvSpPr>
-          <p:cNvPr id="16" name="Text 14"/>
-          <p:cNvSpPr txBox="1"/>
-          <p:nvPr/>
-        </p:nvSpPr>
-        <p:spPr>
-          <a:xfrm>
-            <a:off x="640080" y="6309360"/>
-            <a:ext cx="10911535" cy="292608"/>
-          </a:xfrm>
-          <a:prstGeom prst="rect">
-            <a:avLst/>
-          </a:prstGeom>
-          <a:noFill/>
-          <a:ln/>
-        </p:spPr>
-        <p:txBody>
-          <a:bodyPr wrap="square" lIns="0" tIns="0" rIns="0" bIns="0" rtlCol="0" anchor="ctr"/>
-          <a:lstStyle/>
-          <a:p>
-            <a:pPr indent="0" marL="0">
-              <a:buNone/>
-            </a:pPr>
-            <a:r>
-              <a:rPr lang="en-US" sz="1000" i="1" dirty="0">
-                <a:solidFill>
-                  <a:srgbClr val="5D6B66"/>
-                </a:solidFill>
-                <a:latin typeface="Calibri" pitchFamily="34" charset="0"/>
-                <a:ea typeface="Calibri" pitchFamily="34" charset="-122"/>
-                <a:cs typeface="Calibri" pitchFamily="34" charset="-120"/>
-              </a:rPr>
-              <a:t>La aplicación sigue validando: no para sustituir a la base de datos, sino para dar al usuario un mensaje claro antes de intentarlo.</a:t>
-            </a:r>
-            <a:endParaRPr lang="en-US" sz="1000" dirty="0"/>
+              <a:t>Las 10:00 y las 11:00 están ocupadas: no se pueden seleccionar.</a:t>
+            </a:r>
+            <a:endParaRPr lang="en-US" sz="1150" dirty="0"/>
           </a:p>
         </p:txBody>
       </p:sp>
@@ -4629,13 +4634,6 @@
 <file path=ppt/slides/slide13.xml><?xml version="1.0" encoding="utf-8"?>
 <p:sld xmlns:a="http://schemas.openxmlformats.org/drawingml/2006/main" xmlns:r="http://schemas.openxmlformats.org/officeDocument/2006/relationships" xmlns:p="http://schemas.openxmlformats.org/presentationml/2006/main">
   <p:cSld name="Slide 13">
-    <p:bg>
-      <p:bgPr>
-        <a:solidFill>
-          <a:srgbClr val="14524A"/>
-        </a:solidFill>
-      </p:bgPr>
-    </p:bg>
     <p:spTree>
       <p:nvGrpSpPr>
         <p:cNvPr id="1" name=""/>
@@ -4658,34 +4656,34 @@
         </p:nvSpPr>
         <p:spPr>
           <a:xfrm>
-            <a:off x="640080" y="822960"/>
-            <a:ext cx="10911535" cy="731520"/>
-          </a:xfrm>
-          <a:prstGeom prst="rect">
-            <a:avLst/>
-          </a:prstGeom>
-          <a:noFill/>
-          <a:ln/>
-        </p:spPr>
-        <p:txBody>
-          <a:bodyPr wrap="square" lIns="0" tIns="0" rIns="0" bIns="0" rtlCol="0" anchor="ctr"/>
-          <a:lstStyle/>
-          <a:p>
-            <a:pPr indent="0" marL="0">
-              <a:buNone/>
-            </a:pPr>
-            <a:r>
-              <a:rPr lang="en-US" sz="3800" b="1" dirty="0">
-                <a:solidFill>
-                  <a:srgbClr val="FFFFFF"/>
+            <a:off x="640080" y="384048"/>
+            <a:ext cx="10911535" cy="658368"/>
+          </a:xfrm>
+          <a:prstGeom prst="rect">
+            <a:avLst/>
+          </a:prstGeom>
+          <a:noFill/>
+          <a:ln/>
+        </p:spPr>
+        <p:txBody>
+          <a:bodyPr wrap="square" lIns="0" tIns="0" rIns="0" bIns="0" rtlCol="0" anchor="ctr"/>
+          <a:lstStyle/>
+          <a:p>
+            <a:pPr indent="0" marL="0">
+              <a:buNone/>
+            </a:pPr>
+            <a:r>
+              <a:rPr lang="en-US" sz="3400" b="1" dirty="0">
+                <a:solidFill>
+                  <a:srgbClr val="14524A"/>
                 </a:solidFill>
                 <a:latin typeface="Cambria" pitchFamily="34" charset="0"/>
                 <a:ea typeface="Cambria" pitchFamily="34" charset="-122"/>
                 <a:cs typeface="Cambria" pitchFamily="34" charset="-120"/>
               </a:rPr>
-              <a:t>Lo que garantizan estas reglas</a:t>
-            </a:r>
-            <a:endParaRPr lang="en-US" sz="3800" dirty="0"/>
+              <a:t>En pantalla: Mascotas y suscripción</a:t>
+            </a:r>
+            <a:endParaRPr lang="en-US" sz="3400" dirty="0"/>
           </a:p>
         </p:txBody>
       </p:sp>
@@ -4697,86 +4695,176 @@
         </p:nvSpPr>
         <p:spPr>
           <a:xfrm>
-            <a:off x="640080" y="1554480"/>
-            <a:ext cx="10911535" cy="365760"/>
-          </a:xfrm>
-          <a:prstGeom prst="rect">
-            <a:avLst/>
-          </a:prstGeom>
-          <a:noFill/>
-          <a:ln/>
-        </p:spPr>
-        <p:txBody>
-          <a:bodyPr wrap="square" lIns="0" tIns="0" rIns="0" bIns="0" rtlCol="0" anchor="ctr"/>
-          <a:lstStyle/>
-          <a:p>
-            <a:pPr indent="0" marL="0">
-              <a:buNone/>
-            </a:pPr>
-            <a:r>
-              <a:rPr lang="en-US" sz="1500" dirty="0">
-                <a:solidFill>
-                  <a:srgbClr val="CFE3DC"/>
-                </a:solidFill>
-                <a:latin typeface="Calibri" pitchFamily="34" charset="0"/>
-                <a:ea typeface="Calibri" pitchFamily="34" charset="-122"/>
-                <a:cs typeface="Calibri" pitchFamily="34" charset="-120"/>
-              </a:rPr>
-              <a:t>El negocio no depende de que alguien recuerde comprobar cada condición</a:t>
-            </a:r>
-            <a:endParaRPr lang="en-US" sz="1500" dirty="0"/>
-          </a:p>
-        </p:txBody>
-      </p:sp>
-      <p:sp>
-        <p:nvSpPr>
-          <p:cNvPr id="4" name="Text 2"/>
-          <p:cNvSpPr txBox="1"/>
-          <p:nvPr/>
-        </p:nvSpPr>
-        <p:spPr>
-          <a:xfrm>
-            <a:off x="640080" y="2395728"/>
-            <a:ext cx="2480996" cy="1097280"/>
-          </a:xfrm>
-          <a:prstGeom prst="rect">
-            <a:avLst/>
-          </a:prstGeom>
-          <a:noFill/>
-          <a:ln/>
-        </p:spPr>
-        <p:txBody>
-          <a:bodyPr wrap="square" lIns="0" tIns="0" rIns="0" bIns="0" rtlCol="0" anchor="ctr"/>
-          <a:lstStyle/>
-          <a:p>
-            <a:pPr algn="ctr" indent="0" marL="0">
-              <a:buNone/>
-            </a:pPr>
-            <a:r>
-              <a:rPr lang="en-US" sz="6600" b="1" dirty="0">
-                <a:solidFill>
-                  <a:srgbClr val="E8A33D"/>
+            <a:off x="640080" y="1042416"/>
+            <a:ext cx="10911535" cy="384048"/>
+          </a:xfrm>
+          <a:prstGeom prst="rect">
+            <a:avLst/>
+          </a:prstGeom>
+          <a:noFill/>
+          <a:ln/>
+        </p:spPr>
+        <p:txBody>
+          <a:bodyPr wrap="square" lIns="0" tIns="0" rIns="0" bIns="0" rtlCol="0" anchor="ctr"/>
+          <a:lstStyle/>
+          <a:p>
+            <a:pPr indent="0" marL="0">
+              <a:buNone/>
+            </a:pPr>
+            <a:r>
+              <a:rPr lang="en-US" sz="1400" dirty="0">
+                <a:solidFill>
+                  <a:srgbClr val="5D6B66"/>
+                </a:solidFill>
+                <a:latin typeface="Calibri" pitchFamily="34" charset="0"/>
+                <a:ea typeface="Calibri" pitchFamily="34" charset="-122"/>
+                <a:cs typeface="Calibri" pitchFamily="34" charset="-120"/>
+              </a:rPr>
+              <a:t>El cliente gobierna su propio plan mensual</a:t>
+            </a:r>
+            <a:endParaRPr lang="en-US" sz="1400" dirty="0"/>
+          </a:p>
+        </p:txBody>
+      </p:sp>
+      <p:pic>
+        <p:nvPicPr>
+          <p:cNvPr id="4" name="Image 0" descr="/tmp/claude-0/-home-user-VetPetSurco/b8d13659-c8d7-578f-913d-52522fae5ff2/scratchpad/ppt/capturas/06-mascotas.png">    </p:cNvPr>
+          <p:cNvPicPr>
+            <a:picLocks noChangeAspect="1"/>
+          </p:cNvPicPr>
+          <p:nvPr/>
+        </p:nvPicPr>
+        <p:blipFill>
+          <a:blip r:embed="rId1"/>
+          <a:stretch>
+            <a:fillRect/>
+          </a:stretch>
+        </p:blipFill>
+        <p:spPr>
+          <a:xfrm>
+            <a:off x="640080" y="1929832"/>
+            <a:ext cx="7589520" cy="3894447"/>
+          </a:xfrm>
+          <a:prstGeom prst="rect">
+            <a:avLst/>
+          </a:prstGeom>
+        </p:spPr>
+      </p:pic>
+      <p:sp>
+        <p:nvSpPr>
+          <p:cNvPr id="5" name="Text 2"/>
+          <p:cNvSpPr txBox="1"/>
+          <p:nvPr/>
+        </p:nvSpPr>
+        <p:spPr>
+          <a:xfrm>
+            <a:off x="8485632" y="1645920"/>
+            <a:ext cx="3108960" cy="347472"/>
+          </a:xfrm>
+          <a:prstGeom prst="rect">
+            <a:avLst/>
+          </a:prstGeom>
+          <a:noFill/>
+          <a:ln/>
+        </p:spPr>
+        <p:txBody>
+          <a:bodyPr wrap="square" lIns="0" tIns="0" rIns="0" bIns="0" rtlCol="0" anchor="ctr"/>
+          <a:lstStyle/>
+          <a:p>
+            <a:pPr indent="0" marL="0">
+              <a:buNone/>
+            </a:pPr>
+            <a:r>
+              <a:rPr lang="en-US" sz="1600" b="1" dirty="0">
+                <a:solidFill>
+                  <a:srgbClr val="14524A"/>
                 </a:solidFill>
                 <a:latin typeface="Cambria" pitchFamily="34" charset="0"/>
                 <a:ea typeface="Cambria" pitchFamily="34" charset="-122"/>
                 <a:cs typeface="Cambria" pitchFamily="34" charset="-120"/>
               </a:rPr>
-              <a:t>20</a:t>
-            </a:r>
-            <a:endParaRPr lang="en-US" sz="6600" dirty="0"/>
-          </a:p>
-        </p:txBody>
-      </p:sp>
-      <p:sp>
-        <p:nvSpPr>
-          <p:cNvPr id="5" name="Text 3"/>
-          <p:cNvSpPr txBox="1"/>
-          <p:nvPr/>
-        </p:nvSpPr>
-        <p:spPr>
-          <a:xfrm>
-            <a:off x="640080" y="3511296"/>
-            <a:ext cx="2480996" cy="731520"/>
+              <a:t>Reglas enmarcadas</a:t>
+            </a:r>
+            <a:endParaRPr lang="en-US" sz="1600" dirty="0"/>
+          </a:p>
+        </p:txBody>
+      </p:sp>
+      <p:sp>
+        <p:nvSpPr>
+          <p:cNvPr id="6" name="Shape 3"/>
+          <p:cNvSpPr/>
+          <p:nvPr/>
+        </p:nvSpPr>
+        <p:spPr>
+          <a:xfrm>
+            <a:off x="8485632" y="2157984"/>
+            <a:ext cx="841248" cy="329184"/>
+          </a:xfrm>
+          <a:prstGeom prst="roundRect">
+            <a:avLst>
+              <a:gd name="adj" fmla="val 138889"/>
+            </a:avLst>
+          </a:prstGeom>
+          <a:solidFill>
+            <a:srgbClr val="E8A33D"/>
+          </a:solidFill>
+          <a:ln w="12700">
+            <a:solidFill>
+              <a:srgbClr val="E8A33D"/>
+            </a:solidFill>
+            <a:prstDash val="solid"/>
+          </a:ln>
+        </p:spPr>
+      </p:sp>
+      <p:sp>
+        <p:nvSpPr>
+          <p:cNvPr id="7" name="Text 4"/>
+          <p:cNvSpPr txBox="1"/>
+          <p:nvPr/>
+        </p:nvSpPr>
+        <p:spPr>
+          <a:xfrm>
+            <a:off x="8485632" y="2157984"/>
+            <a:ext cx="841248" cy="329184"/>
+          </a:xfrm>
+          <a:prstGeom prst="rect">
+            <a:avLst/>
+          </a:prstGeom>
+          <a:noFill/>
+          <a:ln/>
+        </p:spPr>
+        <p:txBody>
+          <a:bodyPr wrap="square" lIns="0" tIns="0" rIns="0" bIns="0" rtlCol="0" anchor="ctr"/>
+          <a:lstStyle/>
+          <a:p>
+            <a:pPr algn="ctr" indent="0" marL="0">
+              <a:buNone/>
+            </a:pPr>
+            <a:r>
+              <a:rPr lang="en-US" sz="1050" b="1" dirty="0">
+                <a:solidFill>
+                  <a:srgbClr val="14524A"/>
+                </a:solidFill>
+                <a:latin typeface="Calibri" pitchFamily="34" charset="0"/>
+                <a:ea typeface="Calibri" pitchFamily="34" charset="-122"/>
+                <a:cs typeface="Calibri" pitchFamily="34" charset="-120"/>
+              </a:rPr>
+              <a:t>RN-04</a:t>
+            </a:r>
+            <a:endParaRPr lang="en-US" sz="1050" dirty="0"/>
+          </a:p>
+        </p:txBody>
+      </p:sp>
+      <p:sp>
+        <p:nvSpPr>
+          <p:cNvPr id="8" name="Text 5"/>
+          <p:cNvSpPr txBox="1"/>
+          <p:nvPr/>
+        </p:nvSpPr>
+        <p:spPr>
+          <a:xfrm>
+            <a:off x="8485632" y="2560320"/>
+            <a:ext cx="3108960" cy="603504"/>
           </a:xfrm>
           <a:prstGeom prst="rect">
             <a:avLst/>
@@ -4788,197 +4876,476 @@
           <a:bodyPr wrap="square" lIns="0" tIns="0" rIns="0" bIns="0" rtlCol="0" anchor="t"/>
           <a:lstStyle/>
           <a:p>
+            <a:pPr indent="0" marL="0">
+              <a:buNone/>
+            </a:pPr>
+            <a:r>
+              <a:rPr lang="en-US" sz="1150" dirty="0">
+                <a:solidFill>
+                  <a:srgbClr val="5D6B66"/>
+                </a:solidFill>
+                <a:latin typeface="Calibri" pitchFamily="34" charset="0"/>
+                <a:ea typeface="Calibri" pitchFamily="34" charset="-122"/>
+                <a:cs typeface="Calibri" pitchFamily="34" charset="-120"/>
+              </a:rPr>
+              <a:t>Solo aparecen las mascotas registradas por este cliente.</a:t>
+            </a:r>
+            <a:endParaRPr lang="en-US" sz="1150" dirty="0"/>
+          </a:p>
+        </p:txBody>
+      </p:sp>
+      <p:sp>
+        <p:nvSpPr>
+          <p:cNvPr id="9" name="Shape 6"/>
+          <p:cNvSpPr/>
+          <p:nvPr/>
+        </p:nvSpPr>
+        <p:spPr>
+          <a:xfrm>
+            <a:off x="8485632" y="3182112"/>
+            <a:ext cx="841248" cy="329184"/>
+          </a:xfrm>
+          <a:prstGeom prst="roundRect">
+            <a:avLst>
+              <a:gd name="adj" fmla="val 138889"/>
+            </a:avLst>
+          </a:prstGeom>
+          <a:solidFill>
+            <a:srgbClr val="E8A33D"/>
+          </a:solidFill>
+          <a:ln w="12700">
+            <a:solidFill>
+              <a:srgbClr val="E8A33D"/>
+            </a:solidFill>
+            <a:prstDash val="solid"/>
+          </a:ln>
+        </p:spPr>
+      </p:sp>
+      <p:sp>
+        <p:nvSpPr>
+          <p:cNvPr id="10" name="Text 7"/>
+          <p:cNvSpPr txBox="1"/>
+          <p:nvPr/>
+        </p:nvSpPr>
+        <p:spPr>
+          <a:xfrm>
+            <a:off x="8485632" y="3182112"/>
+            <a:ext cx="841248" cy="329184"/>
+          </a:xfrm>
+          <a:prstGeom prst="rect">
+            <a:avLst/>
+          </a:prstGeom>
+          <a:noFill/>
+          <a:ln/>
+        </p:spPr>
+        <p:txBody>
+          <a:bodyPr wrap="square" lIns="0" tIns="0" rIns="0" bIns="0" rtlCol="0" anchor="ctr"/>
+          <a:lstStyle/>
+          <a:p>
             <a:pPr algn="ctr" indent="0" marL="0">
-              <a:lnSpc>
-                <a:spcPts val="1800"/>
-              </a:lnSpc>
-              <a:buNone/>
-            </a:pPr>
-            <a:r>
-              <a:rPr lang="en-US" sz="1300" dirty="0">
-                <a:solidFill>
-                  <a:srgbClr val="CFE3DC"/>
-                </a:solidFill>
-                <a:latin typeface="Calibri" pitchFamily="34" charset="0"/>
-                <a:ea typeface="Calibri" pitchFamily="34" charset="-122"/>
-                <a:cs typeface="Calibri" pitchFamily="34" charset="-120"/>
-              </a:rPr>
-              <a:t>reglas</a:t>
-            </a:r>
-            <a:endParaRPr lang="en-US" sz="1300" dirty="0"/>
-          </a:p>
+              <a:buNone/>
+            </a:pPr>
+            <a:r>
+              <a:rPr lang="en-US" sz="1050" b="1" dirty="0">
+                <a:solidFill>
+                  <a:srgbClr val="14524A"/>
+                </a:solidFill>
+                <a:latin typeface="Calibri" pitchFamily="34" charset="0"/>
+                <a:ea typeface="Calibri" pitchFamily="34" charset="-122"/>
+                <a:cs typeface="Calibri" pitchFamily="34" charset="-120"/>
+              </a:rPr>
+              <a:t>RN-15</a:t>
+            </a:r>
+            <a:endParaRPr lang="en-US" sz="1050" dirty="0"/>
+          </a:p>
+        </p:txBody>
+      </p:sp>
+      <p:sp>
+        <p:nvSpPr>
+          <p:cNvPr id="11" name="Text 8"/>
+          <p:cNvSpPr txBox="1"/>
+          <p:nvPr/>
+        </p:nvSpPr>
+        <p:spPr>
+          <a:xfrm>
+            <a:off x="8485632" y="3584448"/>
+            <a:ext cx="3108960" cy="603504"/>
+          </a:xfrm>
+          <a:prstGeom prst="rect">
+            <a:avLst/>
+          </a:prstGeom>
+          <a:noFill/>
+          <a:ln/>
+        </p:spPr>
+        <p:txBody>
+          <a:bodyPr wrap="square" lIns="0" tIns="0" rIns="0" bIns="0" rtlCol="0" anchor="t"/>
+          <a:lstStyle/>
+          <a:p>
+            <a:pPr indent="0" marL="0">
+              <a:buNone/>
+            </a:pPr>
+            <a:r>
+              <a:rPr lang="en-US" sz="1150" dirty="0">
+                <a:solidFill>
+                  <a:srgbClr val="5D6B66"/>
+                </a:solidFill>
+                <a:latin typeface="Calibri" pitchFamily="34" charset="0"/>
+                <a:ea typeface="Calibri" pitchFamily="34" charset="-122"/>
+                <a:cs typeface="Calibri" pitchFamily="34" charset="-120"/>
+              </a:rPr>
+              <a:t>Pausar o cancelar está siempre disponible, sin trámite.</a:t>
+            </a:r>
+            <a:endParaRPr lang="en-US" sz="1150" dirty="0"/>
+          </a:p>
+        </p:txBody>
+      </p:sp>
+      <p:sp>
+        <p:nvSpPr>
+          <p:cNvPr id="12" name="Shape 9"/>
+          <p:cNvSpPr/>
+          <p:nvPr/>
+        </p:nvSpPr>
+        <p:spPr>
+          <a:xfrm>
+            <a:off x="8485632" y="4206240"/>
+            <a:ext cx="841248" cy="329184"/>
+          </a:xfrm>
+          <a:prstGeom prst="roundRect">
+            <a:avLst>
+              <a:gd name="adj" fmla="val 138889"/>
+            </a:avLst>
+          </a:prstGeom>
+          <a:solidFill>
+            <a:srgbClr val="E8A33D"/>
+          </a:solidFill>
+          <a:ln w="12700">
+            <a:solidFill>
+              <a:srgbClr val="E8A33D"/>
+            </a:solidFill>
+            <a:prstDash val="solid"/>
+          </a:ln>
+        </p:spPr>
+      </p:sp>
+      <p:sp>
+        <p:nvSpPr>
+          <p:cNvPr id="13" name="Text 10"/>
+          <p:cNvSpPr txBox="1"/>
+          <p:nvPr/>
+        </p:nvSpPr>
+        <p:spPr>
+          <a:xfrm>
+            <a:off x="8485632" y="4206240"/>
+            <a:ext cx="841248" cy="329184"/>
+          </a:xfrm>
+          <a:prstGeom prst="rect">
+            <a:avLst/>
+          </a:prstGeom>
+          <a:noFill/>
+          <a:ln/>
+        </p:spPr>
+        <p:txBody>
+          <a:bodyPr wrap="square" lIns="0" tIns="0" rIns="0" bIns="0" rtlCol="0" anchor="ctr"/>
+          <a:lstStyle/>
           <a:p>
             <a:pPr algn="ctr" indent="0" marL="0">
-              <a:lnSpc>
-                <a:spcPts val="1800"/>
-              </a:lnSpc>
-              <a:buNone/>
-            </a:pPr>
-            <a:r>
-              <a:rPr lang="en-US" sz="1300" dirty="0">
-                <a:solidFill>
-                  <a:srgbClr val="CFE3DC"/>
-                </a:solidFill>
-                <a:latin typeface="Calibri" pitchFamily="34" charset="0"/>
-                <a:ea typeface="Calibri" pitchFamily="34" charset="-122"/>
-                <a:cs typeface="Calibri" pitchFamily="34" charset="-120"/>
-              </a:rPr>
-              <a:t>identificadas</a:t>
-            </a:r>
-            <a:endParaRPr lang="en-US" sz="1300" dirty="0"/>
-          </a:p>
-        </p:txBody>
-      </p:sp>
-      <p:sp>
-        <p:nvSpPr>
-          <p:cNvPr id="6" name="Text 4"/>
-          <p:cNvSpPr txBox="1"/>
-          <p:nvPr/>
-        </p:nvSpPr>
-        <p:spPr>
-          <a:xfrm>
-            <a:off x="3450260" y="2395728"/>
-            <a:ext cx="2480996" cy="1097280"/>
-          </a:xfrm>
-          <a:prstGeom prst="rect">
-            <a:avLst/>
-          </a:prstGeom>
-          <a:noFill/>
-          <a:ln/>
-        </p:spPr>
-        <p:txBody>
-          <a:bodyPr wrap="square" lIns="0" tIns="0" rIns="0" bIns="0" rtlCol="0" anchor="ctr"/>
-          <a:lstStyle/>
-          <a:p>
-            <a:pPr algn="ctr" indent="0" marL="0">
-              <a:buNone/>
-            </a:pPr>
-            <a:r>
-              <a:rPr lang="en-US" sz="6600" b="1" dirty="0">
-                <a:solidFill>
-                  <a:srgbClr val="E8A33D"/>
+              <a:buNone/>
+            </a:pPr>
+            <a:r>
+              <a:rPr lang="en-US" sz="1050" b="1" dirty="0">
+                <a:solidFill>
+                  <a:srgbClr val="14524A"/>
+                </a:solidFill>
+                <a:latin typeface="Calibri" pitchFamily="34" charset="0"/>
+                <a:ea typeface="Calibri" pitchFamily="34" charset="-122"/>
+                <a:cs typeface="Calibri" pitchFamily="34" charset="-120"/>
+              </a:rPr>
+              <a:t>RN-16</a:t>
+            </a:r>
+            <a:endParaRPr lang="en-US" sz="1050" dirty="0"/>
+          </a:p>
+        </p:txBody>
+      </p:sp>
+      <p:sp>
+        <p:nvSpPr>
+          <p:cNvPr id="14" name="Text 11"/>
+          <p:cNvSpPr txBox="1"/>
+          <p:nvPr/>
+        </p:nvSpPr>
+        <p:spPr>
+          <a:xfrm>
+            <a:off x="8485632" y="4608576"/>
+            <a:ext cx="3108960" cy="603504"/>
+          </a:xfrm>
+          <a:prstGeom prst="rect">
+            <a:avLst/>
+          </a:prstGeom>
+          <a:noFill/>
+          <a:ln/>
+        </p:spPr>
+        <p:txBody>
+          <a:bodyPr wrap="square" lIns="0" tIns="0" rIns="0" bIns="0" rtlCol="0" anchor="t"/>
+          <a:lstStyle/>
+          <a:p>
+            <a:pPr indent="0" marL="0">
+              <a:buNone/>
+            </a:pPr>
+            <a:r>
+              <a:rPr lang="en-US" sz="1150" dirty="0">
+                <a:solidFill>
+                  <a:srgbClr val="5D6B66"/>
+                </a:solidFill>
+                <a:latin typeface="Calibri" pitchFamily="34" charset="0"/>
+                <a:ea typeface="Calibri" pitchFamily="34" charset="-122"/>
+                <a:cs typeface="Calibri" pitchFamily="34" charset="-120"/>
+              </a:rPr>
+              <a:t>Cada plan muestra su frecuencia y su próximo despacho.</a:t>
+            </a:r>
+            <a:endParaRPr lang="en-US" sz="1150" dirty="0"/>
+          </a:p>
+        </p:txBody>
+      </p:sp>
+    </p:spTree>
+  </p:cSld>
+  <p:clrMapOvr>
+    <a:masterClrMapping/>
+  </p:clrMapOvr>
+</p:sld>
+</file>
+
+<file path=ppt/slides/slide14.xml><?xml version="1.0" encoding="utf-8"?>
+<p:sld xmlns:a="http://schemas.openxmlformats.org/drawingml/2006/main" xmlns:r="http://schemas.openxmlformats.org/officeDocument/2006/relationships" xmlns:p="http://schemas.openxmlformats.org/presentationml/2006/main">
+  <p:cSld name="Slide 14">
+    <p:spTree>
+      <p:nvGrpSpPr>
+        <p:cNvPr id="1" name=""/>
+        <p:cNvGrpSpPr/>
+        <p:nvPr/>
+      </p:nvGrpSpPr>
+      <p:grpSpPr>
+        <a:xfrm>
+          <a:off x="0" y="0"/>
+          <a:ext cx="0" cy="0"/>
+          <a:chOff x="0" y="0"/>
+          <a:chExt cx="0" cy="0"/>
+        </a:xfrm>
+      </p:grpSpPr>
+      <p:sp>
+        <p:nvSpPr>
+          <p:cNvPr id="2" name="Text 0"/>
+          <p:cNvSpPr txBox="1"/>
+          <p:nvPr/>
+        </p:nvSpPr>
+        <p:spPr>
+          <a:xfrm>
+            <a:off x="640080" y="384048"/>
+            <a:ext cx="10911535" cy="658368"/>
+          </a:xfrm>
+          <a:prstGeom prst="rect">
+            <a:avLst/>
+          </a:prstGeom>
+          <a:noFill/>
+          <a:ln/>
+        </p:spPr>
+        <p:txBody>
+          <a:bodyPr wrap="square" lIns="0" tIns="0" rIns="0" bIns="0" rtlCol="0" anchor="ctr"/>
+          <a:lstStyle/>
+          <a:p>
+            <a:pPr indent="0" marL="0">
+              <a:buNone/>
+            </a:pPr>
+            <a:r>
+              <a:rPr lang="en-US" sz="3400" b="1" dirty="0">
+                <a:solidFill>
+                  <a:srgbClr val="14524A"/>
                 </a:solidFill>
                 <a:latin typeface="Cambria" pitchFamily="34" charset="0"/>
                 <a:ea typeface="Cambria" pitchFamily="34" charset="-122"/>
                 <a:cs typeface="Cambria" pitchFamily="34" charset="-120"/>
               </a:rPr>
-              <a:t>14</a:t>
-            </a:r>
-            <a:endParaRPr lang="en-US" sz="6600" dirty="0"/>
-          </a:p>
-        </p:txBody>
-      </p:sp>
-      <p:sp>
-        <p:nvSpPr>
-          <p:cNvPr id="7" name="Text 5"/>
-          <p:cNvSpPr txBox="1"/>
-          <p:nvPr/>
-        </p:nvSpPr>
-        <p:spPr>
-          <a:xfrm>
-            <a:off x="3450260" y="3511296"/>
-            <a:ext cx="2480996" cy="731520"/>
-          </a:xfrm>
-          <a:prstGeom prst="rect">
-            <a:avLst/>
-          </a:prstGeom>
-          <a:noFill/>
-          <a:ln/>
-        </p:spPr>
-        <p:txBody>
-          <a:bodyPr wrap="square" lIns="0" tIns="0" rIns="0" bIns="0" rtlCol="0" anchor="t"/>
-          <a:lstStyle/>
-          <a:p>
-            <a:pPr algn="ctr" indent="0" marL="0">
-              <a:lnSpc>
-                <a:spcPts val="1800"/>
-              </a:lnSpc>
-              <a:buNone/>
-            </a:pPr>
-            <a:r>
-              <a:rPr lang="en-US" sz="1300" dirty="0">
-                <a:solidFill>
-                  <a:srgbClr val="CFE3DC"/>
-                </a:solidFill>
-                <a:latin typeface="Calibri" pitchFamily="34" charset="0"/>
-                <a:ea typeface="Calibri" pitchFamily="34" charset="-122"/>
-                <a:cs typeface="Calibri" pitchFamily="34" charset="-120"/>
-              </a:rPr>
-              <a:t>imposibles</a:t>
-            </a:r>
-            <a:endParaRPr lang="en-US" sz="1300" dirty="0"/>
-          </a:p>
-          <a:p>
-            <a:pPr algn="ctr" indent="0" marL="0">
-              <a:lnSpc>
-                <a:spcPts val="1800"/>
-              </a:lnSpc>
-              <a:buNone/>
-            </a:pPr>
-            <a:r>
-              <a:rPr lang="en-US" sz="1300" dirty="0">
-                <a:solidFill>
-                  <a:srgbClr val="CFE3DC"/>
-                </a:solidFill>
-                <a:latin typeface="Calibri" pitchFamily="34" charset="0"/>
-                <a:ea typeface="Calibri" pitchFamily="34" charset="-122"/>
-                <a:cs typeface="Calibri" pitchFamily="34" charset="-120"/>
-              </a:rPr>
-              <a:t>de violar</a:t>
-            </a:r>
-            <a:endParaRPr lang="en-US" sz="1300" dirty="0"/>
-          </a:p>
-        </p:txBody>
-      </p:sp>
-      <p:sp>
-        <p:nvSpPr>
-          <p:cNvPr id="8" name="Text 6"/>
-          <p:cNvSpPr txBox="1"/>
-          <p:nvPr/>
-        </p:nvSpPr>
-        <p:spPr>
-          <a:xfrm>
-            <a:off x="6260440" y="2395728"/>
-            <a:ext cx="2480996" cy="1097280"/>
-          </a:xfrm>
-          <a:prstGeom prst="rect">
-            <a:avLst/>
-          </a:prstGeom>
-          <a:noFill/>
-          <a:ln/>
-        </p:spPr>
-        <p:txBody>
-          <a:bodyPr wrap="square" lIns="0" tIns="0" rIns="0" bIns="0" rtlCol="0" anchor="ctr"/>
-          <a:lstStyle/>
-          <a:p>
-            <a:pPr algn="ctr" indent="0" marL="0">
-              <a:buNone/>
-            </a:pPr>
-            <a:r>
-              <a:rPr lang="en-US" sz="6600" b="1" dirty="0">
-                <a:solidFill>
-                  <a:srgbClr val="E8A33D"/>
+              <a:t>En pantalla: Ficha clínica</a:t>
+            </a:r>
+            <a:endParaRPr lang="en-US" sz="3400" dirty="0"/>
+          </a:p>
+        </p:txBody>
+      </p:sp>
+      <p:sp>
+        <p:nvSpPr>
+          <p:cNvPr id="3" name="Text 1"/>
+          <p:cNvSpPr txBox="1"/>
+          <p:nvPr/>
+        </p:nvSpPr>
+        <p:spPr>
+          <a:xfrm>
+            <a:off x="640080" y="1042416"/>
+            <a:ext cx="10911535" cy="384048"/>
+          </a:xfrm>
+          <a:prstGeom prst="rect">
+            <a:avLst/>
+          </a:prstGeom>
+          <a:noFill/>
+          <a:ln/>
+        </p:spPr>
+        <p:txBody>
+          <a:bodyPr wrap="square" lIns="0" tIns="0" rIns="0" bIns="0" rtlCol="0" anchor="ctr"/>
+          <a:lstStyle/>
+          <a:p>
+            <a:pPr indent="0" marL="0">
+              <a:buNone/>
+            </a:pPr>
+            <a:r>
+              <a:rPr lang="en-US" sz="1400" dirty="0">
+                <a:solidFill>
+                  <a:srgbClr val="5D6B66"/>
+                </a:solidFill>
+                <a:latin typeface="Calibri" pitchFamily="34" charset="0"/>
+                <a:ea typeface="Calibri" pitchFamily="34" charset="-122"/>
+                <a:cs typeface="Calibri" pitchFamily="34" charset="-120"/>
+              </a:rPr>
+              <a:t>El veterinario cierra la cita y programa el próximo control</a:t>
+            </a:r>
+            <a:endParaRPr lang="en-US" sz="1400" dirty="0"/>
+          </a:p>
+        </p:txBody>
+      </p:sp>
+      <p:pic>
+        <p:nvPicPr>
+          <p:cNvPr id="4" name="Image 0" descr="/tmp/claude-0/-home-user-VetPetSurco/b8d13659-c8d7-578f-913d-52522fae5ff2/scratchpad/ppt/capturas/07-clinica.png">    </p:cNvPr>
+          <p:cNvPicPr>
+            <a:picLocks noChangeAspect="1"/>
+          </p:cNvPicPr>
+          <p:nvPr/>
+        </p:nvPicPr>
+        <p:blipFill>
+          <a:blip r:embed="rId1"/>
+          <a:stretch>
+            <a:fillRect/>
+          </a:stretch>
+        </p:blipFill>
+        <p:spPr>
+          <a:xfrm>
+            <a:off x="2554823" y="1627632"/>
+            <a:ext cx="3760034" cy="4498848"/>
+          </a:xfrm>
+          <a:prstGeom prst="rect">
+            <a:avLst/>
+          </a:prstGeom>
+        </p:spPr>
+      </p:pic>
+      <p:sp>
+        <p:nvSpPr>
+          <p:cNvPr id="5" name="Text 2"/>
+          <p:cNvSpPr txBox="1"/>
+          <p:nvPr/>
+        </p:nvSpPr>
+        <p:spPr>
+          <a:xfrm>
+            <a:off x="8485632" y="1645920"/>
+            <a:ext cx="3108960" cy="347472"/>
+          </a:xfrm>
+          <a:prstGeom prst="rect">
+            <a:avLst/>
+          </a:prstGeom>
+          <a:noFill/>
+          <a:ln/>
+        </p:spPr>
+        <p:txBody>
+          <a:bodyPr wrap="square" lIns="0" tIns="0" rIns="0" bIns="0" rtlCol="0" anchor="ctr"/>
+          <a:lstStyle/>
+          <a:p>
+            <a:pPr indent="0" marL="0">
+              <a:buNone/>
+            </a:pPr>
+            <a:r>
+              <a:rPr lang="en-US" sz="1600" b="1" dirty="0">
+                <a:solidFill>
+                  <a:srgbClr val="14524A"/>
                 </a:solidFill>
                 <a:latin typeface="Cambria" pitchFamily="34" charset="0"/>
                 <a:ea typeface="Cambria" pitchFamily="34" charset="-122"/>
                 <a:cs typeface="Cambria" pitchFamily="34" charset="-120"/>
               </a:rPr>
-              <a:t>8</a:t>
-            </a:r>
-            <a:endParaRPr lang="en-US" sz="6600" dirty="0"/>
-          </a:p>
-        </p:txBody>
-      </p:sp>
-      <p:sp>
-        <p:nvSpPr>
-          <p:cNvPr id="9" name="Text 7"/>
-          <p:cNvSpPr txBox="1"/>
-          <p:nvPr/>
-        </p:nvSpPr>
-        <p:spPr>
-          <a:xfrm>
-            <a:off x="6260440" y="3511296"/>
-            <a:ext cx="2480996" cy="731520"/>
+              <a:t>Reglas enmarcadas</a:t>
+            </a:r>
+            <a:endParaRPr lang="en-US" sz="1600" dirty="0"/>
+          </a:p>
+        </p:txBody>
+      </p:sp>
+      <p:sp>
+        <p:nvSpPr>
+          <p:cNvPr id="6" name="Shape 3"/>
+          <p:cNvSpPr/>
+          <p:nvPr/>
+        </p:nvSpPr>
+        <p:spPr>
+          <a:xfrm>
+            <a:off x="8485632" y="2157984"/>
+            <a:ext cx="841248" cy="329184"/>
+          </a:xfrm>
+          <a:prstGeom prst="roundRect">
+            <a:avLst>
+              <a:gd name="adj" fmla="val 138889"/>
+            </a:avLst>
+          </a:prstGeom>
+          <a:solidFill>
+            <a:srgbClr val="E8A33D"/>
+          </a:solidFill>
+          <a:ln w="12700">
+            <a:solidFill>
+              <a:srgbClr val="E8A33D"/>
+            </a:solidFill>
+            <a:prstDash val="solid"/>
+          </a:ln>
+        </p:spPr>
+      </p:sp>
+      <p:sp>
+        <p:nvSpPr>
+          <p:cNvPr id="7" name="Text 4"/>
+          <p:cNvSpPr txBox="1"/>
+          <p:nvPr/>
+        </p:nvSpPr>
+        <p:spPr>
+          <a:xfrm>
+            <a:off x="8485632" y="2157984"/>
+            <a:ext cx="841248" cy="329184"/>
+          </a:xfrm>
+          <a:prstGeom prst="rect">
+            <a:avLst/>
+          </a:prstGeom>
+          <a:noFill/>
+          <a:ln/>
+        </p:spPr>
+        <p:txBody>
+          <a:bodyPr wrap="square" lIns="0" tIns="0" rIns="0" bIns="0" rtlCol="0" anchor="ctr"/>
+          <a:lstStyle/>
+          <a:p>
+            <a:pPr algn="ctr" indent="0" marL="0">
+              <a:buNone/>
+            </a:pPr>
+            <a:r>
+              <a:rPr lang="en-US" sz="1050" b="1" dirty="0">
+                <a:solidFill>
+                  <a:srgbClr val="14524A"/>
+                </a:solidFill>
+                <a:latin typeface="Calibri" pitchFamily="34" charset="0"/>
+                <a:ea typeface="Calibri" pitchFamily="34" charset="-122"/>
+                <a:cs typeface="Calibri" pitchFamily="34" charset="-120"/>
+              </a:rPr>
+              <a:t>RN-18</a:t>
+            </a:r>
+            <a:endParaRPr lang="en-US" sz="1050" dirty="0"/>
+          </a:p>
+        </p:txBody>
+      </p:sp>
+      <p:sp>
+        <p:nvSpPr>
+          <p:cNvPr id="8" name="Text 5"/>
+          <p:cNvSpPr txBox="1"/>
+          <p:nvPr/>
+        </p:nvSpPr>
+        <p:spPr>
+          <a:xfrm>
+            <a:off x="8485632" y="2560320"/>
+            <a:ext cx="3108960" cy="603504"/>
           </a:xfrm>
           <a:prstGeom prst="rect">
             <a:avLst/>
@@ -4990,83 +5357,2499 @@
           <a:bodyPr wrap="square" lIns="0" tIns="0" rIns="0" bIns="0" rtlCol="0" anchor="t"/>
           <a:lstStyle/>
           <a:p>
+            <a:pPr indent="0" marL="0">
+              <a:buNone/>
+            </a:pPr>
+            <a:r>
+              <a:rPr lang="en-US" sz="1150" dirty="0">
+                <a:solidFill>
+                  <a:srgbClr val="5D6B66"/>
+                </a:solidFill>
+                <a:latin typeface="Calibri" pitchFamily="34" charset="0"/>
+                <a:ea typeface="Calibri" pitchFamily="34" charset="-122"/>
+                <a:cs typeface="Calibri" pitchFamily="34" charset="-120"/>
+              </a:rPr>
+              <a:t>Toda cita termina en ATENDIDA, CANCELADA o NO_ASISTIO.</a:t>
+            </a:r>
+            <a:endParaRPr lang="en-US" sz="1150" dirty="0"/>
+          </a:p>
+        </p:txBody>
+      </p:sp>
+      <p:sp>
+        <p:nvSpPr>
+          <p:cNvPr id="9" name="Shape 6"/>
+          <p:cNvSpPr/>
+          <p:nvPr/>
+        </p:nvSpPr>
+        <p:spPr>
+          <a:xfrm>
+            <a:off x="8485632" y="3182112"/>
+            <a:ext cx="841248" cy="329184"/>
+          </a:xfrm>
+          <a:prstGeom prst="roundRect">
+            <a:avLst>
+              <a:gd name="adj" fmla="val 138889"/>
+            </a:avLst>
+          </a:prstGeom>
+          <a:solidFill>
+            <a:srgbClr val="E8A33D"/>
+          </a:solidFill>
+          <a:ln w="12700">
+            <a:solidFill>
+              <a:srgbClr val="E8A33D"/>
+            </a:solidFill>
+            <a:prstDash val="solid"/>
+          </a:ln>
+        </p:spPr>
+      </p:sp>
+      <p:sp>
+        <p:nvSpPr>
+          <p:cNvPr id="10" name="Text 7"/>
+          <p:cNvSpPr txBox="1"/>
+          <p:nvPr/>
+        </p:nvSpPr>
+        <p:spPr>
+          <a:xfrm>
+            <a:off x="8485632" y="3182112"/>
+            <a:ext cx="841248" cy="329184"/>
+          </a:xfrm>
+          <a:prstGeom prst="rect">
+            <a:avLst/>
+          </a:prstGeom>
+          <a:noFill/>
+          <a:ln/>
+        </p:spPr>
+        <p:txBody>
+          <a:bodyPr wrap="square" lIns="0" tIns="0" rIns="0" bIns="0" rtlCol="0" anchor="ctr"/>
+          <a:lstStyle/>
+          <a:p>
             <a:pPr algn="ctr" indent="0" marL="0">
-              <a:lnSpc>
-                <a:spcPts val="1800"/>
-              </a:lnSpc>
-              <a:buNone/>
-            </a:pPr>
-            <a:r>
-              <a:rPr lang="en-US" sz="1300" dirty="0">
-                <a:solidFill>
-                  <a:srgbClr val="CFE3DC"/>
-                </a:solidFill>
-                <a:latin typeface="Calibri" pitchFamily="34" charset="0"/>
-                <a:ea typeface="Calibri" pitchFamily="34" charset="-122"/>
-                <a:cs typeface="Calibri" pitchFamily="34" charset="-120"/>
-              </a:rPr>
-              <a:t>tablas con</a:t>
-            </a:r>
-            <a:endParaRPr lang="en-US" sz="1300" dirty="0"/>
-          </a:p>
+              <a:buNone/>
+            </a:pPr>
+            <a:r>
+              <a:rPr lang="en-US" sz="1050" b="1" dirty="0">
+                <a:solidFill>
+                  <a:srgbClr val="14524A"/>
+                </a:solidFill>
+                <a:latin typeface="Calibri" pitchFamily="34" charset="0"/>
+                <a:ea typeface="Calibri" pitchFamily="34" charset="-122"/>
+                <a:cs typeface="Calibri" pitchFamily="34" charset="-120"/>
+              </a:rPr>
+              <a:t>RN-19</a:t>
+            </a:r>
+            <a:endParaRPr lang="en-US" sz="1050" dirty="0"/>
+          </a:p>
+        </p:txBody>
+      </p:sp>
+      <p:sp>
+        <p:nvSpPr>
+          <p:cNvPr id="11" name="Text 8"/>
+          <p:cNvSpPr txBox="1"/>
+          <p:nvPr/>
+        </p:nvSpPr>
+        <p:spPr>
+          <a:xfrm>
+            <a:off x="8485632" y="3584448"/>
+            <a:ext cx="3108960" cy="603504"/>
+          </a:xfrm>
+          <a:prstGeom prst="rect">
+            <a:avLst/>
+          </a:prstGeom>
+          <a:noFill/>
+          <a:ln/>
+        </p:spPr>
+        <p:txBody>
+          <a:bodyPr wrap="square" lIns="0" tIns="0" rIns="0" bIns="0" rtlCol="0" anchor="t"/>
+          <a:lstStyle/>
+          <a:p>
+            <a:pPr indent="0" marL="0">
+              <a:buNone/>
+            </a:pPr>
+            <a:r>
+              <a:rPr lang="en-US" sz="1150" dirty="0">
+                <a:solidFill>
+                  <a:srgbClr val="5D6B66"/>
+                </a:solidFill>
+                <a:latin typeface="Calibri" pitchFamily="34" charset="0"/>
+                <a:ea typeface="Calibri" pitchFamily="34" charset="-122"/>
+                <a:cs typeface="Calibri" pitchFamily="34" charset="-120"/>
+              </a:rPr>
+              <a:t>Una cita ya atendida no admite un segundo registro clínico.</a:t>
+            </a:r>
+            <a:endParaRPr lang="en-US" sz="1150" dirty="0"/>
+          </a:p>
+        </p:txBody>
+      </p:sp>
+      <p:sp>
+        <p:nvSpPr>
+          <p:cNvPr id="12" name="Shape 9"/>
+          <p:cNvSpPr/>
+          <p:nvPr/>
+        </p:nvSpPr>
+        <p:spPr>
+          <a:xfrm>
+            <a:off x="8485632" y="4206240"/>
+            <a:ext cx="841248" cy="329184"/>
+          </a:xfrm>
+          <a:prstGeom prst="roundRect">
+            <a:avLst>
+              <a:gd name="adj" fmla="val 138889"/>
+            </a:avLst>
+          </a:prstGeom>
+          <a:solidFill>
+            <a:srgbClr val="E8A33D"/>
+          </a:solidFill>
+          <a:ln w="12700">
+            <a:solidFill>
+              <a:srgbClr val="E8A33D"/>
+            </a:solidFill>
+            <a:prstDash val="solid"/>
+          </a:ln>
+        </p:spPr>
+      </p:sp>
+      <p:sp>
+        <p:nvSpPr>
+          <p:cNvPr id="13" name="Text 10"/>
+          <p:cNvSpPr txBox="1"/>
+          <p:nvPr/>
+        </p:nvSpPr>
+        <p:spPr>
+          <a:xfrm>
+            <a:off x="8485632" y="4206240"/>
+            <a:ext cx="841248" cy="329184"/>
+          </a:xfrm>
+          <a:prstGeom prst="rect">
+            <a:avLst/>
+          </a:prstGeom>
+          <a:noFill/>
+          <a:ln/>
+        </p:spPr>
+        <p:txBody>
+          <a:bodyPr wrap="square" lIns="0" tIns="0" rIns="0" bIns="0" rtlCol="0" anchor="ctr"/>
+          <a:lstStyle/>
           <a:p>
             <a:pPr algn="ctr" indent="0" marL="0">
-              <a:lnSpc>
-                <a:spcPts val="1800"/>
-              </a:lnSpc>
-              <a:buNone/>
-            </a:pPr>
-            <a:r>
-              <a:rPr lang="en-US" sz="1300" dirty="0">
-                <a:solidFill>
-                  <a:srgbClr val="CFE3DC"/>
-                </a:solidFill>
-                <a:latin typeface="Calibri" pitchFamily="34" charset="0"/>
-                <a:ea typeface="Calibri" pitchFamily="34" charset="-122"/>
-                <a:cs typeface="Calibri" pitchFamily="34" charset="-120"/>
-              </a:rPr>
-              <a:t>restricciones</a:t>
-            </a:r>
-            <a:endParaRPr lang="en-US" sz="1300" dirty="0"/>
-          </a:p>
-        </p:txBody>
-      </p:sp>
-      <p:sp>
-        <p:nvSpPr>
-          <p:cNvPr id="10" name="Text 8"/>
-          <p:cNvSpPr txBox="1"/>
-          <p:nvPr/>
-        </p:nvSpPr>
-        <p:spPr>
-          <a:xfrm>
-            <a:off x="9070619" y="2395728"/>
-            <a:ext cx="2480996" cy="1097280"/>
-          </a:xfrm>
-          <a:prstGeom prst="rect">
-            <a:avLst/>
-          </a:prstGeom>
-          <a:noFill/>
-          <a:ln/>
-        </p:spPr>
-        <p:txBody>
-          <a:bodyPr wrap="square" lIns="0" tIns="0" rIns="0" bIns="0" rtlCol="0" anchor="ctr"/>
-          <a:lstStyle/>
-          <a:p>
-            <a:pPr algn="ctr" indent="0" marL="0">
-              <a:buNone/>
-            </a:pPr>
-            <a:r>
-              <a:rPr lang="en-US" sz="6600" b="1" dirty="0">
-                <a:solidFill>
-                  <a:srgbClr val="E8A33D"/>
+              <a:buNone/>
+            </a:pPr>
+            <a:r>
+              <a:rPr lang="en-US" sz="1050" b="1" dirty="0">
+                <a:solidFill>
+                  <a:srgbClr val="14524A"/>
+                </a:solidFill>
+                <a:latin typeface="Calibri" pitchFamily="34" charset="0"/>
+                <a:ea typeface="Calibri" pitchFamily="34" charset="-122"/>
+                <a:cs typeface="Calibri" pitchFamily="34" charset="-120"/>
+              </a:rPr>
+              <a:t>RN-20</a:t>
+            </a:r>
+            <a:endParaRPr lang="en-US" sz="1050" dirty="0"/>
+          </a:p>
+        </p:txBody>
+      </p:sp>
+      <p:sp>
+        <p:nvSpPr>
+          <p:cNvPr id="14" name="Text 11"/>
+          <p:cNvSpPr txBox="1"/>
+          <p:nvPr/>
+        </p:nvSpPr>
+        <p:spPr>
+          <a:xfrm>
+            <a:off x="8485632" y="4608576"/>
+            <a:ext cx="3108960" cy="603504"/>
+          </a:xfrm>
+          <a:prstGeom prst="rect">
+            <a:avLst/>
+          </a:prstGeom>
+          <a:noFill/>
+          <a:ln/>
+        </p:spPr>
+        <p:txBody>
+          <a:bodyPr wrap="square" lIns="0" tIns="0" rIns="0" bIns="0" rtlCol="0" anchor="t"/>
+          <a:lstStyle/>
+          <a:p>
+            <a:pPr indent="0" marL="0">
+              <a:buNone/>
+            </a:pPr>
+            <a:r>
+              <a:rPr lang="en-US" sz="1150" dirty="0">
+                <a:solidFill>
+                  <a:srgbClr val="5D6B66"/>
+                </a:solidFill>
+                <a:latin typeface="Calibri" pitchFamily="34" charset="0"/>
+                <a:ea typeface="Calibri" pitchFamily="34" charset="-122"/>
+                <a:cs typeface="Calibri" pitchFamily="34" charset="-120"/>
+              </a:rPr>
+              <a:t>La fecha del próximo control alimenta el recordatorio.</a:t>
+            </a:r>
+            <a:endParaRPr lang="en-US" sz="1150" dirty="0"/>
+          </a:p>
+        </p:txBody>
+      </p:sp>
+    </p:spTree>
+  </p:cSld>
+  <p:clrMapOvr>
+    <a:masterClrMapping/>
+  </p:clrMapOvr>
+</p:sld>
+</file>
+
+<file path=ppt/slides/slide15.xml><?xml version="1.0" encoding="utf-8"?>
+<p:sld xmlns:a="http://schemas.openxmlformats.org/drawingml/2006/main" xmlns:r="http://schemas.openxmlformats.org/officeDocument/2006/relationships" xmlns:p="http://schemas.openxmlformats.org/presentationml/2006/main">
+  <p:cSld name="Slide 15">
+    <p:spTree>
+      <p:nvGrpSpPr>
+        <p:cNvPr id="1" name=""/>
+        <p:cNvGrpSpPr/>
+        <p:nvPr/>
+      </p:nvGrpSpPr>
+      <p:grpSpPr>
+        <a:xfrm>
+          <a:off x="0" y="0"/>
+          <a:ext cx="0" cy="0"/>
+          <a:chOff x="0" y="0"/>
+          <a:chExt cx="0" cy="0"/>
+        </a:xfrm>
+      </p:grpSpPr>
+      <p:sp>
+        <p:nvSpPr>
+          <p:cNvPr id="2" name="Text 0"/>
+          <p:cNvSpPr txBox="1"/>
+          <p:nvPr/>
+        </p:nvSpPr>
+        <p:spPr>
+          <a:xfrm>
+            <a:off x="640080" y="384048"/>
+            <a:ext cx="10911535" cy="658368"/>
+          </a:xfrm>
+          <a:prstGeom prst="rect">
+            <a:avLst/>
+          </a:prstGeom>
+          <a:noFill/>
+          <a:ln/>
+        </p:spPr>
+        <p:txBody>
+          <a:bodyPr wrap="square" lIns="0" tIns="0" rIns="0" bIns="0" rtlCol="0" anchor="ctr"/>
+          <a:lstStyle/>
+          <a:p>
+            <a:pPr indent="0" marL="0">
+              <a:buNone/>
+            </a:pPr>
+            <a:r>
+              <a:rPr lang="en-US" sz="3400" b="1" dirty="0">
+                <a:solidFill>
+                  <a:srgbClr val="14524A"/>
                 </a:solidFill>
                 <a:latin typeface="Cambria" pitchFamily="34" charset="0"/>
                 <a:ea typeface="Cambria" pitchFamily="34" charset="-122"/>
                 <a:cs typeface="Cambria" pitchFamily="34" charset="-120"/>
               </a:rPr>
+              <a:t>En pantalla: Dashboard administrativo</a:t>
+            </a:r>
+            <a:endParaRPr lang="en-US" sz="3400" dirty="0"/>
+          </a:p>
+        </p:txBody>
+      </p:sp>
+      <p:sp>
+        <p:nvSpPr>
+          <p:cNvPr id="3" name="Text 1"/>
+          <p:cNvSpPr txBox="1"/>
+          <p:nvPr/>
+        </p:nvSpPr>
+        <p:spPr>
+          <a:xfrm>
+            <a:off x="640080" y="1042416"/>
+            <a:ext cx="10911535" cy="384048"/>
+          </a:xfrm>
+          <a:prstGeom prst="rect">
+            <a:avLst/>
+          </a:prstGeom>
+          <a:noFill/>
+          <a:ln/>
+        </p:spPr>
+        <p:txBody>
+          <a:bodyPr wrap="square" lIns="0" tIns="0" rIns="0" bIns="0" rtlCol="0" anchor="ctr"/>
+          <a:lstStyle/>
+          <a:p>
+            <a:pPr indent="0" marL="0">
+              <a:buNone/>
+            </a:pPr>
+            <a:r>
+              <a:rPr lang="en-US" sz="1400" dirty="0">
+                <a:solidFill>
+                  <a:srgbClr val="5D6B66"/>
+                </a:solidFill>
+                <a:latin typeface="Calibri" pitchFamily="34" charset="0"/>
+                <a:ea typeface="Calibri" pitchFamily="34" charset="-122"/>
+                <a:cs typeface="Calibri" pitchFamily="34" charset="-120"/>
+              </a:rPr>
+              <a:t>Inventario con semáforo y pedidos avanzando de estado</a:t>
+            </a:r>
+            <a:endParaRPr lang="en-US" sz="1400" dirty="0"/>
+          </a:p>
+        </p:txBody>
+      </p:sp>
+      <p:pic>
+        <p:nvPicPr>
+          <p:cNvPr id="4" name="Image 0" descr="/tmp/claude-0/-home-user-VetPetSurco/b8d13659-c8d7-578f-913d-52522fae5ff2/scratchpad/ppt/capturas/08-inventario.png">    </p:cNvPr>
+          <p:cNvPicPr>
+            <a:picLocks noChangeAspect="1"/>
+          </p:cNvPicPr>
+          <p:nvPr/>
+        </p:nvPicPr>
+        <p:blipFill>
+          <a:blip r:embed="rId1"/>
+          <a:stretch>
+            <a:fillRect/>
+          </a:stretch>
+        </p:blipFill>
+        <p:spPr>
+          <a:xfrm>
+            <a:off x="1898478" y="1627632"/>
+            <a:ext cx="5072725" cy="2966254"/>
+          </a:xfrm>
+          <a:prstGeom prst="rect">
+            <a:avLst/>
+          </a:prstGeom>
+        </p:spPr>
+      </p:pic>
+      <p:pic>
+        <p:nvPicPr>
+          <p:cNvPr id="5" name="Image 1" descr="/tmp/claude-0/-home-user-VetPetSurco/b8d13659-c8d7-578f-913d-52522fae5ff2/scratchpad/ppt/capturas/09-pedidos.png">    </p:cNvPr>
+          <p:cNvPicPr>
+            <a:picLocks noChangeAspect="1"/>
+          </p:cNvPicPr>
+          <p:nvPr/>
+        </p:nvPicPr>
+        <p:blipFill>
+          <a:blip r:embed="rId2"/>
+          <a:stretch>
+            <a:fillRect/>
+          </a:stretch>
+        </p:blipFill>
+        <p:spPr>
+          <a:xfrm>
+            <a:off x="1898478" y="4728344"/>
+            <a:ext cx="5072725" cy="1398136"/>
+          </a:xfrm>
+          <a:prstGeom prst="rect">
+            <a:avLst/>
+          </a:prstGeom>
+        </p:spPr>
+      </p:pic>
+      <p:sp>
+        <p:nvSpPr>
+          <p:cNvPr id="6" name="Text 2"/>
+          <p:cNvSpPr txBox="1"/>
+          <p:nvPr/>
+        </p:nvSpPr>
+        <p:spPr>
+          <a:xfrm>
+            <a:off x="8485632" y="1645920"/>
+            <a:ext cx="3108960" cy="347472"/>
+          </a:xfrm>
+          <a:prstGeom prst="rect">
+            <a:avLst/>
+          </a:prstGeom>
+          <a:noFill/>
+          <a:ln/>
+        </p:spPr>
+        <p:txBody>
+          <a:bodyPr wrap="square" lIns="0" tIns="0" rIns="0" bIns="0" rtlCol="0" anchor="ctr"/>
+          <a:lstStyle/>
+          <a:p>
+            <a:pPr indent="0" marL="0">
+              <a:buNone/>
+            </a:pPr>
+            <a:r>
+              <a:rPr lang="en-US" sz="1600" b="1" dirty="0">
+                <a:solidFill>
+                  <a:srgbClr val="14524A"/>
+                </a:solidFill>
+                <a:latin typeface="Cambria" pitchFamily="34" charset="0"/>
+                <a:ea typeface="Cambria" pitchFamily="34" charset="-122"/>
+                <a:cs typeface="Cambria" pitchFamily="34" charset="-120"/>
+              </a:rPr>
+              <a:t>Reglas enmarcadas</a:t>
+            </a:r>
+            <a:endParaRPr lang="en-US" sz="1600" dirty="0"/>
+          </a:p>
+        </p:txBody>
+      </p:sp>
+      <p:sp>
+        <p:nvSpPr>
+          <p:cNvPr id="7" name="Shape 3"/>
+          <p:cNvSpPr/>
+          <p:nvPr/>
+        </p:nvSpPr>
+        <p:spPr>
+          <a:xfrm>
+            <a:off x="8485632" y="2157984"/>
+            <a:ext cx="841248" cy="329184"/>
+          </a:xfrm>
+          <a:prstGeom prst="roundRect">
+            <a:avLst>
+              <a:gd name="adj" fmla="val 138889"/>
+            </a:avLst>
+          </a:prstGeom>
+          <a:solidFill>
+            <a:srgbClr val="E8A33D"/>
+          </a:solidFill>
+          <a:ln w="12700">
+            <a:solidFill>
+              <a:srgbClr val="E8A33D"/>
+            </a:solidFill>
+            <a:prstDash val="solid"/>
+          </a:ln>
+        </p:spPr>
+      </p:sp>
+      <p:sp>
+        <p:nvSpPr>
+          <p:cNvPr id="8" name="Text 4"/>
+          <p:cNvSpPr txBox="1"/>
+          <p:nvPr/>
+        </p:nvSpPr>
+        <p:spPr>
+          <a:xfrm>
+            <a:off x="8485632" y="2157984"/>
+            <a:ext cx="841248" cy="329184"/>
+          </a:xfrm>
+          <a:prstGeom prst="rect">
+            <a:avLst/>
+          </a:prstGeom>
+          <a:noFill/>
+          <a:ln/>
+        </p:spPr>
+        <p:txBody>
+          <a:bodyPr wrap="square" lIns="0" tIns="0" rIns="0" bIns="0" rtlCol="0" anchor="ctr"/>
+          <a:lstStyle/>
+          <a:p>
+            <a:pPr algn="ctr" indent="0" marL="0">
+              <a:buNone/>
+            </a:pPr>
+            <a:r>
+              <a:rPr lang="en-US" sz="1050" b="1" dirty="0">
+                <a:solidFill>
+                  <a:srgbClr val="14524A"/>
+                </a:solidFill>
+                <a:latin typeface="Calibri" pitchFamily="34" charset="0"/>
+                <a:ea typeface="Calibri" pitchFamily="34" charset="-122"/>
+                <a:cs typeface="Calibri" pitchFamily="34" charset="-120"/>
+              </a:rPr>
+              <a:t>RN-07</a:t>
+            </a:r>
+            <a:endParaRPr lang="en-US" sz="1050" dirty="0"/>
+          </a:p>
+        </p:txBody>
+      </p:sp>
+      <p:sp>
+        <p:nvSpPr>
+          <p:cNvPr id="9" name="Text 5"/>
+          <p:cNvSpPr txBox="1"/>
+          <p:nvPr/>
+        </p:nvSpPr>
+        <p:spPr>
+          <a:xfrm>
+            <a:off x="8485632" y="2560320"/>
+            <a:ext cx="3108960" cy="603504"/>
+          </a:xfrm>
+          <a:prstGeom prst="rect">
+            <a:avLst/>
+          </a:prstGeom>
+          <a:noFill/>
+          <a:ln/>
+        </p:spPr>
+        <p:txBody>
+          <a:bodyPr wrap="square" lIns="0" tIns="0" rIns="0" bIns="0" rtlCol="0" anchor="t"/>
+          <a:lstStyle/>
+          <a:p>
+            <a:pPr indent="0" marL="0">
+              <a:buNone/>
+            </a:pPr>
+            <a:r>
+              <a:rPr lang="en-US" sz="1150" dirty="0">
+                <a:solidFill>
+                  <a:srgbClr val="5D6B66"/>
+                </a:solidFill>
+                <a:latin typeface="Calibri" pitchFamily="34" charset="0"/>
+                <a:ea typeface="Calibri" pitchFamily="34" charset="-122"/>
+                <a:cs typeface="Calibri" pitchFamily="34" charset="-120"/>
+              </a:rPr>
+              <a:t>El stock mostrado nunca puede bajar de cero.</a:t>
+            </a:r>
+            <a:endParaRPr lang="en-US" sz="1150" dirty="0"/>
+          </a:p>
+        </p:txBody>
+      </p:sp>
+      <p:sp>
+        <p:nvSpPr>
+          <p:cNvPr id="10" name="Shape 6"/>
+          <p:cNvSpPr/>
+          <p:nvPr/>
+        </p:nvSpPr>
+        <p:spPr>
+          <a:xfrm>
+            <a:off x="8485632" y="3182112"/>
+            <a:ext cx="841248" cy="329184"/>
+          </a:xfrm>
+          <a:prstGeom prst="roundRect">
+            <a:avLst>
+              <a:gd name="adj" fmla="val 138889"/>
+            </a:avLst>
+          </a:prstGeom>
+          <a:solidFill>
+            <a:srgbClr val="E8A33D"/>
+          </a:solidFill>
+          <a:ln w="12700">
+            <a:solidFill>
+              <a:srgbClr val="E8A33D"/>
+            </a:solidFill>
+            <a:prstDash val="solid"/>
+          </a:ln>
+        </p:spPr>
+      </p:sp>
+      <p:sp>
+        <p:nvSpPr>
+          <p:cNvPr id="11" name="Text 7"/>
+          <p:cNvSpPr txBox="1"/>
+          <p:nvPr/>
+        </p:nvSpPr>
+        <p:spPr>
+          <a:xfrm>
+            <a:off x="8485632" y="3182112"/>
+            <a:ext cx="841248" cy="329184"/>
+          </a:xfrm>
+          <a:prstGeom prst="rect">
+            <a:avLst/>
+          </a:prstGeom>
+          <a:noFill/>
+          <a:ln/>
+        </p:spPr>
+        <p:txBody>
+          <a:bodyPr wrap="square" lIns="0" tIns="0" rIns="0" bIns="0" rtlCol="0" anchor="ctr"/>
+          <a:lstStyle/>
+          <a:p>
+            <a:pPr algn="ctr" indent="0" marL="0">
+              <a:buNone/>
+            </a:pPr>
+            <a:r>
+              <a:rPr lang="en-US" sz="1050" b="1" dirty="0">
+                <a:solidFill>
+                  <a:srgbClr val="14524A"/>
+                </a:solidFill>
+                <a:latin typeface="Calibri" pitchFamily="34" charset="0"/>
+                <a:ea typeface="Calibri" pitchFamily="34" charset="-122"/>
+                <a:cs typeface="Calibri" pitchFamily="34" charset="-120"/>
+              </a:rPr>
+              <a:t>RN-08</a:t>
+            </a:r>
+            <a:endParaRPr lang="en-US" sz="1050" dirty="0"/>
+          </a:p>
+        </p:txBody>
+      </p:sp>
+      <p:sp>
+        <p:nvSpPr>
+          <p:cNvPr id="12" name="Text 8"/>
+          <p:cNvSpPr txBox="1"/>
+          <p:nvPr/>
+        </p:nvSpPr>
+        <p:spPr>
+          <a:xfrm>
+            <a:off x="8485632" y="3584448"/>
+            <a:ext cx="3108960" cy="603504"/>
+          </a:xfrm>
+          <a:prstGeom prst="rect">
+            <a:avLst/>
+          </a:prstGeom>
+          <a:noFill/>
+          <a:ln/>
+        </p:spPr>
+        <p:txBody>
+          <a:bodyPr wrap="square" lIns="0" tIns="0" rIns="0" bIns="0" rtlCol="0" anchor="t"/>
+          <a:lstStyle/>
+          <a:p>
+            <a:pPr indent="0" marL="0">
+              <a:buNone/>
+            </a:pPr>
+            <a:r>
+              <a:rPr lang="en-US" sz="1150" dirty="0">
+                <a:solidFill>
+                  <a:srgbClr val="5D6B66"/>
+                </a:solidFill>
+                <a:latin typeface="Calibri" pitchFamily="34" charset="0"/>
+                <a:ea typeface="Calibri" pitchFamily="34" charset="-122"/>
+                <a:cs typeface="Calibri" pitchFamily="34" charset="-120"/>
+              </a:rPr>
+              <a:t>ROJO al llegar al reorden, ÁMBAR cerca, VERDE con holgura.</a:t>
+            </a:r>
+            <a:endParaRPr lang="en-US" sz="1150" dirty="0"/>
+          </a:p>
+        </p:txBody>
+      </p:sp>
+      <p:sp>
+        <p:nvSpPr>
+          <p:cNvPr id="13" name="Shape 9"/>
+          <p:cNvSpPr/>
+          <p:nvPr/>
+        </p:nvSpPr>
+        <p:spPr>
+          <a:xfrm>
+            <a:off x="8485632" y="4206240"/>
+            <a:ext cx="841248" cy="329184"/>
+          </a:xfrm>
+          <a:prstGeom prst="roundRect">
+            <a:avLst>
+              <a:gd name="adj" fmla="val 138889"/>
+            </a:avLst>
+          </a:prstGeom>
+          <a:solidFill>
+            <a:srgbClr val="E8A33D"/>
+          </a:solidFill>
+          <a:ln w="12700">
+            <a:solidFill>
+              <a:srgbClr val="E8A33D"/>
+            </a:solidFill>
+            <a:prstDash val="solid"/>
+          </a:ln>
+        </p:spPr>
+      </p:sp>
+      <p:sp>
+        <p:nvSpPr>
+          <p:cNvPr id="14" name="Text 10"/>
+          <p:cNvSpPr txBox="1"/>
+          <p:nvPr/>
+        </p:nvSpPr>
+        <p:spPr>
+          <a:xfrm>
+            <a:off x="8485632" y="4206240"/>
+            <a:ext cx="841248" cy="329184"/>
+          </a:xfrm>
+          <a:prstGeom prst="rect">
+            <a:avLst/>
+          </a:prstGeom>
+          <a:noFill/>
+          <a:ln/>
+        </p:spPr>
+        <p:txBody>
+          <a:bodyPr wrap="square" lIns="0" tIns="0" rIns="0" bIns="0" rtlCol="0" anchor="ctr"/>
+          <a:lstStyle/>
+          <a:p>
+            <a:pPr algn="ctr" indent="0" marL="0">
+              <a:buNone/>
+            </a:pPr>
+            <a:r>
+              <a:rPr lang="en-US" sz="1050" b="1" dirty="0">
+                <a:solidFill>
+                  <a:srgbClr val="14524A"/>
+                </a:solidFill>
+                <a:latin typeface="Calibri" pitchFamily="34" charset="0"/>
+                <a:ea typeface="Calibri" pitchFamily="34" charset="-122"/>
+                <a:cs typeface="Calibri" pitchFamily="34" charset="-120"/>
+              </a:rPr>
+              <a:t>RN-13</a:t>
+            </a:r>
+            <a:endParaRPr lang="en-US" sz="1050" dirty="0"/>
+          </a:p>
+        </p:txBody>
+      </p:sp>
+      <p:sp>
+        <p:nvSpPr>
+          <p:cNvPr id="15" name="Text 11"/>
+          <p:cNvSpPr txBox="1"/>
+          <p:nvPr/>
+        </p:nvSpPr>
+        <p:spPr>
+          <a:xfrm>
+            <a:off x="8485632" y="4608576"/>
+            <a:ext cx="3108960" cy="603504"/>
+          </a:xfrm>
+          <a:prstGeom prst="rect">
+            <a:avLst/>
+          </a:prstGeom>
+          <a:noFill/>
+          <a:ln/>
+        </p:spPr>
+        <p:txBody>
+          <a:bodyPr wrap="square" lIns="0" tIns="0" rIns="0" bIns="0" rtlCol="0" anchor="t"/>
+          <a:lstStyle/>
+          <a:p>
+            <a:pPr indent="0" marL="0">
+              <a:buNone/>
+            </a:pPr>
+            <a:r>
+              <a:rPr lang="en-US" sz="1150" dirty="0">
+                <a:solidFill>
+                  <a:srgbClr val="5D6B66"/>
+                </a:solidFill>
+                <a:latin typeface="Calibri" pitchFamily="34" charset="0"/>
+                <a:ea typeface="Calibri" pitchFamily="34" charset="-122"/>
+                <a:cs typeface="Calibri" pitchFamily="34" charset="-120"/>
+              </a:rPr>
+              <a:t>El botón solo ofrece el siguiente estado de la secuencia.</a:t>
+            </a:r>
+            <a:endParaRPr lang="en-US" sz="1150" dirty="0"/>
+          </a:p>
+        </p:txBody>
+      </p:sp>
+      <p:sp>
+        <p:nvSpPr>
+          <p:cNvPr id="16" name="Shape 12"/>
+          <p:cNvSpPr/>
+          <p:nvPr/>
+        </p:nvSpPr>
+        <p:spPr>
+          <a:xfrm>
+            <a:off x="8485632" y="5230368"/>
+            <a:ext cx="841248" cy="329184"/>
+          </a:xfrm>
+          <a:prstGeom prst="roundRect">
+            <a:avLst>
+              <a:gd name="adj" fmla="val 138889"/>
+            </a:avLst>
+          </a:prstGeom>
+          <a:solidFill>
+            <a:srgbClr val="E8A33D"/>
+          </a:solidFill>
+          <a:ln w="12700">
+            <a:solidFill>
+              <a:srgbClr val="E8A33D"/>
+            </a:solidFill>
+            <a:prstDash val="solid"/>
+          </a:ln>
+        </p:spPr>
+      </p:sp>
+      <p:sp>
+        <p:nvSpPr>
+          <p:cNvPr id="17" name="Text 13"/>
+          <p:cNvSpPr txBox="1"/>
+          <p:nvPr/>
+        </p:nvSpPr>
+        <p:spPr>
+          <a:xfrm>
+            <a:off x="8485632" y="5230368"/>
+            <a:ext cx="841248" cy="329184"/>
+          </a:xfrm>
+          <a:prstGeom prst="rect">
+            <a:avLst/>
+          </a:prstGeom>
+          <a:noFill/>
+          <a:ln/>
+        </p:spPr>
+        <p:txBody>
+          <a:bodyPr wrap="square" lIns="0" tIns="0" rIns="0" bIns="0" rtlCol="0" anchor="ctr"/>
+          <a:lstStyle/>
+          <a:p>
+            <a:pPr algn="ctr" indent="0" marL="0">
+              <a:buNone/>
+            </a:pPr>
+            <a:r>
+              <a:rPr lang="en-US" sz="1050" b="1" dirty="0">
+                <a:solidFill>
+                  <a:srgbClr val="14524A"/>
+                </a:solidFill>
+                <a:latin typeface="Calibri" pitchFamily="34" charset="0"/>
+                <a:ea typeface="Calibri" pitchFamily="34" charset="-122"/>
+                <a:cs typeface="Calibri" pitchFamily="34" charset="-120"/>
+              </a:rPr>
+              <a:t>RN-14</a:t>
+            </a:r>
+            <a:endParaRPr lang="en-US" sz="1050" dirty="0"/>
+          </a:p>
+        </p:txBody>
+      </p:sp>
+      <p:sp>
+        <p:nvSpPr>
+          <p:cNvPr id="18" name="Text 14"/>
+          <p:cNvSpPr txBox="1"/>
+          <p:nvPr/>
+        </p:nvSpPr>
+        <p:spPr>
+          <a:xfrm>
+            <a:off x="8485632" y="5632704"/>
+            <a:ext cx="3108960" cy="603504"/>
+          </a:xfrm>
+          <a:prstGeom prst="rect">
+            <a:avLst/>
+          </a:prstGeom>
+          <a:noFill/>
+          <a:ln/>
+        </p:spPr>
+        <p:txBody>
+          <a:bodyPr wrap="square" lIns="0" tIns="0" rIns="0" bIns="0" rtlCol="0" anchor="t"/>
+          <a:lstStyle/>
+          <a:p>
+            <a:pPr indent="0" marL="0">
+              <a:buNone/>
+            </a:pPr>
+            <a:r>
+              <a:rPr lang="en-US" sz="1150" dirty="0">
+                <a:solidFill>
+                  <a:srgbClr val="5D6B66"/>
+                </a:solidFill>
+                <a:latin typeface="Calibri" pitchFamily="34" charset="0"/>
+                <a:ea typeface="Calibri" pitchFamily="34" charset="-122"/>
+                <a:cs typeface="Calibri" pitchFamily="34" charset="-120"/>
+              </a:rPr>
+              <a:t>La columna origen separa la venta puntual de la recurrente.</a:t>
+            </a:r>
+            <a:endParaRPr lang="en-US" sz="1150" dirty="0"/>
+          </a:p>
+        </p:txBody>
+      </p:sp>
+    </p:spTree>
+  </p:cSld>
+  <p:clrMapOvr>
+    <a:masterClrMapping/>
+  </p:clrMapOvr>
+</p:sld>
+</file>
+
+<file path=ppt/slides/slide16.xml><?xml version="1.0" encoding="utf-8"?>
+<p:sld xmlns:a="http://schemas.openxmlformats.org/drawingml/2006/main" xmlns:r="http://schemas.openxmlformats.org/officeDocument/2006/relationships" xmlns:p="http://schemas.openxmlformats.org/presentationml/2006/main">
+  <p:cSld name="Slide 16">
+    <p:spTree>
+      <p:nvGrpSpPr>
+        <p:cNvPr id="1" name=""/>
+        <p:cNvGrpSpPr/>
+        <p:nvPr/>
+      </p:nvGrpSpPr>
+      <p:grpSpPr>
+        <a:xfrm>
+          <a:off x="0" y="0"/>
+          <a:ext cx="0" cy="0"/>
+          <a:chOff x="0" y="0"/>
+          <a:chExt cx="0" cy="0"/>
+        </a:xfrm>
+      </p:grpSpPr>
+      <p:sp>
+        <p:nvSpPr>
+          <p:cNvPr id="2" name="Text 0"/>
+          <p:cNvSpPr txBox="1"/>
+          <p:nvPr/>
+        </p:nvSpPr>
+        <p:spPr>
+          <a:xfrm>
+            <a:off x="640080" y="384048"/>
+            <a:ext cx="10911535" cy="658368"/>
+          </a:xfrm>
+          <a:prstGeom prst="rect">
+            <a:avLst/>
+          </a:prstGeom>
+          <a:noFill/>
+          <a:ln/>
+        </p:spPr>
+        <p:txBody>
+          <a:bodyPr wrap="square" lIns="0" tIns="0" rIns="0" bIns="0" rtlCol="0" anchor="ctr"/>
+          <a:lstStyle/>
+          <a:p>
+            <a:pPr indent="0" marL="0">
+              <a:buNone/>
+            </a:pPr>
+            <a:r>
+              <a:rPr lang="en-US" sz="3400" b="1" dirty="0">
+                <a:solidFill>
+                  <a:srgbClr val="14524A"/>
+                </a:solidFill>
+                <a:latin typeface="Cambria" pitchFamily="34" charset="0"/>
+                <a:ea typeface="Cambria" pitchFamily="34" charset="-122"/>
+                <a:cs typeface="Cambria" pitchFamily="34" charset="-120"/>
+              </a:rPr>
+              <a:t>Dónde se hace cumplir cada regla</a:t>
+            </a:r>
+            <a:endParaRPr lang="en-US" sz="3400" dirty="0"/>
+          </a:p>
+        </p:txBody>
+      </p:sp>
+      <p:sp>
+        <p:nvSpPr>
+          <p:cNvPr id="3" name="Text 1"/>
+          <p:cNvSpPr txBox="1"/>
+          <p:nvPr/>
+        </p:nvSpPr>
+        <p:spPr>
+          <a:xfrm>
+            <a:off x="640080" y="1042416"/>
+            <a:ext cx="10911535" cy="384048"/>
+          </a:xfrm>
+          <a:prstGeom prst="rect">
+            <a:avLst/>
+          </a:prstGeom>
+          <a:noFill/>
+          <a:ln/>
+        </p:spPr>
+        <p:txBody>
+          <a:bodyPr wrap="square" lIns="0" tIns="0" rIns="0" bIns="0" rtlCol="0" anchor="ctr"/>
+          <a:lstStyle/>
+          <a:p>
+            <a:pPr indent="0" marL="0">
+              <a:buNone/>
+            </a:pPr>
+            <a:r>
+              <a:rPr lang="en-US" sz="1400" dirty="0">
+                <a:solidFill>
+                  <a:srgbClr val="5D6B66"/>
+                </a:solidFill>
+                <a:latin typeface="Calibri" pitchFamily="34" charset="0"/>
+                <a:ea typeface="Calibri" pitchFamily="34" charset="-122"/>
+                <a:cs typeface="Calibri" pitchFamily="34" charset="-120"/>
+              </a:rPr>
+              <a:t>El reparto de las 20 reglas entre las cuatro capas del sistema</a:t>
+            </a:r>
+            <a:endParaRPr lang="en-US" sz="1400" dirty="0"/>
+          </a:p>
+        </p:txBody>
+      </p:sp>
+      <p:graphicFrame>
+        <p:nvGraphicFramePr>
+          <p:cNvPr id="4" name="Chart 0" descr=""/>
+          <p:cNvGraphicFramePr/>
+          <p:nvPr/>
+        </p:nvGraphicFramePr>
+        <p:xfrm>
+          <a:off x="640080" y="1664208"/>
+          <a:ext cx="6766560" cy="4114800"/>
+        </p:xfrm>
+        <a:graphic xmlns:a="http://schemas.openxmlformats.org/drawingml/2006/main">
+          <a:graphicData uri="http://schemas.openxmlformats.org/drawingml/2006/chart">
+            <c:chart xmlns:c="http://schemas.openxmlformats.org/drawingml/2006/chart" r:id="rId1"/>
+          </a:graphicData>
+        </a:graphic>
+      </p:graphicFrame>
+      <p:sp>
+        <p:nvSpPr>
+          <p:cNvPr id="5" name="Text 2"/>
+          <p:cNvSpPr txBox="1"/>
+          <p:nvPr/>
+        </p:nvSpPr>
+        <p:spPr>
+          <a:xfrm>
+            <a:off x="7726680" y="1700784"/>
+            <a:ext cx="3840480" cy="786384"/>
+          </a:xfrm>
+          <a:prstGeom prst="rect">
+            <a:avLst/>
+          </a:prstGeom>
+          <a:noFill/>
+          <a:ln/>
+        </p:spPr>
+        <p:txBody>
+          <a:bodyPr wrap="square" lIns="0" tIns="0" rIns="0" bIns="0" rtlCol="0" anchor="ctr"/>
+          <a:lstStyle/>
+          <a:p>
+            <a:pPr indent="0" marL="0">
+              <a:buNone/>
+            </a:pPr>
+            <a:r>
+              <a:rPr lang="en-US" sz="4600" b="1" dirty="0">
+                <a:solidFill>
+                  <a:srgbClr val="E8A33D"/>
+                </a:solidFill>
+                <a:latin typeface="Cambria" pitchFamily="34" charset="0"/>
+                <a:ea typeface="Cambria" pitchFamily="34" charset="-122"/>
+                <a:cs typeface="Cambria" pitchFamily="34" charset="-120"/>
+              </a:rPr>
+              <a:t>14 de 20</a:t>
+            </a:r>
+            <a:endParaRPr lang="en-US" sz="4600" dirty="0"/>
+          </a:p>
+        </p:txBody>
+      </p:sp>
+      <p:sp>
+        <p:nvSpPr>
+          <p:cNvPr id="6" name="Text 3"/>
+          <p:cNvSpPr txBox="1"/>
+          <p:nvPr/>
+        </p:nvSpPr>
+        <p:spPr>
+          <a:xfrm>
+            <a:off x="7726680" y="2523744"/>
+            <a:ext cx="3840480" cy="731520"/>
+          </a:xfrm>
+          <a:prstGeom prst="rect">
+            <a:avLst/>
+          </a:prstGeom>
+          <a:noFill/>
+          <a:ln/>
+        </p:spPr>
+        <p:txBody>
+          <a:bodyPr wrap="square" lIns="0" tIns="0" rIns="0" bIns="0" rtlCol="0" anchor="t"/>
+          <a:lstStyle/>
+          <a:p>
+            <a:pPr indent="0" marL="0">
+              <a:buNone/>
+            </a:pPr>
+            <a:r>
+              <a:rPr lang="en-US" sz="1350" b="1" dirty="0">
+                <a:solidFill>
+                  <a:srgbClr val="14524A"/>
+                </a:solidFill>
+                <a:latin typeface="Calibri" pitchFamily="34" charset="0"/>
+                <a:ea typeface="Calibri" pitchFamily="34" charset="-122"/>
+                <a:cs typeface="Calibri" pitchFamily="34" charset="-120"/>
+              </a:rPr>
+              <a:t>reglas son imposibles de violar, incluso si alguien escribe directo en la base de datos</a:t>
+            </a:r>
+            <a:endParaRPr lang="en-US" sz="1350" dirty="0"/>
+          </a:p>
+        </p:txBody>
+      </p:sp>
+      <p:sp>
+        <p:nvSpPr>
+          <p:cNvPr id="7" name="Text 4"/>
+          <p:cNvSpPr txBox="1"/>
+          <p:nvPr/>
+        </p:nvSpPr>
+        <p:spPr>
+          <a:xfrm>
+            <a:off x="7726680" y="3456432"/>
+            <a:ext cx="3840480" cy="274320"/>
+          </a:xfrm>
+          <a:prstGeom prst="rect">
+            <a:avLst/>
+          </a:prstGeom>
+          <a:noFill/>
+          <a:ln/>
+        </p:spPr>
+        <p:txBody>
+          <a:bodyPr wrap="square" lIns="0" tIns="0" rIns="0" bIns="0" rtlCol="0" anchor="ctr"/>
+          <a:lstStyle/>
+          <a:p>
+            <a:pPr indent="0" marL="0">
+              <a:buNone/>
+            </a:pPr>
+            <a:r>
+              <a:rPr lang="en-US" sz="1300" b="1" dirty="0">
+                <a:solidFill>
+                  <a:srgbClr val="2C7A6B"/>
+                </a:solidFill>
+                <a:latin typeface="Calibri" pitchFamily="34" charset="0"/>
+                <a:ea typeface="Calibri" pitchFamily="34" charset="-122"/>
+                <a:cs typeface="Calibri" pitchFamily="34" charset="-120"/>
+              </a:rPr>
+              <a:t>17 de 20</a:t>
+            </a:r>
+            <a:endParaRPr lang="en-US" sz="1300" dirty="0"/>
+          </a:p>
+        </p:txBody>
+      </p:sp>
+      <p:sp>
+        <p:nvSpPr>
+          <p:cNvPr id="8" name="Text 5"/>
+          <p:cNvSpPr txBox="1"/>
+          <p:nvPr/>
+        </p:nvSpPr>
+        <p:spPr>
+          <a:xfrm>
+            <a:off x="7726680" y="3730752"/>
+            <a:ext cx="3840480" cy="548640"/>
+          </a:xfrm>
+          <a:prstGeom prst="rect">
+            <a:avLst/>
+          </a:prstGeom>
+          <a:noFill/>
+          <a:ln/>
+        </p:spPr>
+        <p:txBody>
+          <a:bodyPr wrap="square" lIns="0" tIns="0" rIns="0" bIns="0" rtlCol="0" anchor="t"/>
+          <a:lstStyle/>
+          <a:p>
+            <a:pPr indent="0" marL="0">
+              <a:buNone/>
+            </a:pPr>
+            <a:r>
+              <a:rPr lang="en-US" sz="1100" dirty="0">
+                <a:solidFill>
+                  <a:srgbClr val="5D6B66"/>
+                </a:solidFill>
+                <a:latin typeface="Calibri" pitchFamily="34" charset="0"/>
+                <a:ea typeface="Calibri" pitchFamily="34" charset="-122"/>
+                <a:cs typeface="Calibri" pitchFamily="34" charset="-120"/>
+              </a:rPr>
+              <a:t>quedan fuera del alcance de la aplicación: viven en el motor, en una vista o en el procedimiento.</a:t>
+            </a:r>
+            <a:endParaRPr lang="en-US" sz="1100" dirty="0"/>
+          </a:p>
+        </p:txBody>
+      </p:sp>
+      <p:sp>
+        <p:nvSpPr>
+          <p:cNvPr id="9" name="Text 6"/>
+          <p:cNvSpPr txBox="1"/>
+          <p:nvPr/>
+        </p:nvSpPr>
+        <p:spPr>
+          <a:xfrm>
+            <a:off x="7726680" y="4315968"/>
+            <a:ext cx="3840480" cy="274320"/>
+          </a:xfrm>
+          <a:prstGeom prst="rect">
+            <a:avLst/>
+          </a:prstGeom>
+          <a:noFill/>
+          <a:ln/>
+        </p:spPr>
+        <p:txBody>
+          <a:bodyPr wrap="square" lIns="0" tIns="0" rIns="0" bIns="0" rtlCol="0" anchor="ctr"/>
+          <a:lstStyle/>
+          <a:p>
+            <a:pPr indent="0" marL="0">
+              <a:buNone/>
+            </a:pPr>
+            <a:r>
+              <a:rPr lang="en-US" sz="1300" b="1" dirty="0">
+                <a:solidFill>
+                  <a:srgbClr val="2C7A6B"/>
+                </a:solidFill>
+                <a:latin typeface="Calibri" pitchFamily="34" charset="0"/>
+                <a:ea typeface="Calibri" pitchFamily="34" charset="-122"/>
+                <a:cs typeface="Calibri" pitchFamily="34" charset="-120"/>
+              </a:rPr>
+              <a:t>2 reglas</a:t>
+            </a:r>
+            <a:endParaRPr lang="en-US" sz="1300" dirty="0"/>
+          </a:p>
+        </p:txBody>
+      </p:sp>
+      <p:sp>
+        <p:nvSpPr>
+          <p:cNvPr id="10" name="Text 7"/>
+          <p:cNvSpPr txBox="1"/>
+          <p:nvPr/>
+        </p:nvSpPr>
+        <p:spPr>
+          <a:xfrm>
+            <a:off x="7726680" y="4590288"/>
+            <a:ext cx="3840480" cy="548640"/>
+          </a:xfrm>
+          <a:prstGeom prst="rect">
+            <a:avLst/>
+          </a:prstGeom>
+          <a:noFill/>
+          <a:ln/>
+        </p:spPr>
+        <p:txBody>
+          <a:bodyPr wrap="square" lIns="0" tIns="0" rIns="0" bIns="0" rtlCol="0" anchor="t"/>
+          <a:lstStyle/>
+          <a:p>
+            <a:pPr indent="0" marL="0">
+              <a:buNone/>
+            </a:pPr>
+            <a:r>
+              <a:rPr lang="en-US" sz="1100" dirty="0">
+                <a:solidFill>
+                  <a:srgbClr val="5D6B66"/>
+                </a:solidFill>
+                <a:latin typeface="Calibri" pitchFamily="34" charset="0"/>
+                <a:ea typeface="Calibri" pitchFamily="34" charset="-122"/>
+                <a:cs typeface="Calibri" pitchFamily="34" charset="-120"/>
+              </a:rPr>
+              <a:t>se validan dos veces a propósito: en Java para el mensaje y en la base de datos por seguridad.</a:t>
+            </a:r>
+            <a:endParaRPr lang="en-US" sz="1100" dirty="0"/>
+          </a:p>
+        </p:txBody>
+      </p:sp>
+      <p:sp>
+        <p:nvSpPr>
+          <p:cNvPr id="11" name="Text 8"/>
+          <p:cNvSpPr txBox="1"/>
+          <p:nvPr/>
+        </p:nvSpPr>
+        <p:spPr>
+          <a:xfrm>
+            <a:off x="7726680" y="5175504"/>
+            <a:ext cx="3840480" cy="274320"/>
+          </a:xfrm>
+          <a:prstGeom prst="rect">
+            <a:avLst/>
+          </a:prstGeom>
+          <a:noFill/>
+          <a:ln/>
+        </p:spPr>
+        <p:txBody>
+          <a:bodyPr wrap="square" lIns="0" tIns="0" rIns="0" bIns="0" rtlCol="0" anchor="ctr"/>
+          <a:lstStyle/>
+          <a:p>
+            <a:pPr indent="0" marL="0">
+              <a:buNone/>
+            </a:pPr>
+            <a:r>
+              <a:rPr lang="en-US" sz="1300" b="1" dirty="0">
+                <a:solidFill>
+                  <a:srgbClr val="2C7A6B"/>
+                </a:solidFill>
+                <a:latin typeface="Calibri" pitchFamily="34" charset="0"/>
+                <a:ea typeface="Calibri" pitchFamily="34" charset="-122"/>
+                <a:cs typeface="Calibri" pitchFamily="34" charset="-120"/>
+              </a:rPr>
+              <a:t>1 sola regla</a:t>
+            </a:r>
+            <a:endParaRPr lang="en-US" sz="1300" dirty="0"/>
+          </a:p>
+        </p:txBody>
+      </p:sp>
+      <p:sp>
+        <p:nvSpPr>
+          <p:cNvPr id="12" name="Text 9"/>
+          <p:cNvSpPr txBox="1"/>
+          <p:nvPr/>
+        </p:nvSpPr>
+        <p:spPr>
+          <a:xfrm>
+            <a:off x="7726680" y="5449824"/>
+            <a:ext cx="3840480" cy="548640"/>
+          </a:xfrm>
+          <a:prstGeom prst="rect">
+            <a:avLst/>
+          </a:prstGeom>
+          <a:noFill/>
+          <a:ln/>
+        </p:spPr>
+        <p:txBody>
+          <a:bodyPr wrap="square" lIns="0" tIns="0" rIns="0" bIns="0" rtlCol="0" anchor="t"/>
+          <a:lstStyle/>
+          <a:p>
+            <a:pPr indent="0" marL="0">
+              <a:buNone/>
+            </a:pPr>
+            <a:r>
+              <a:rPr lang="en-US" sz="1100" dirty="0">
+                <a:solidFill>
+                  <a:srgbClr val="5D6B66"/>
+                </a:solidFill>
+                <a:latin typeface="Calibri" pitchFamily="34" charset="0"/>
+                <a:ea typeface="Calibri" pitchFamily="34" charset="-122"/>
+                <a:cs typeface="Calibri" pitchFamily="34" charset="-120"/>
+              </a:rPr>
+              <a:t>depende únicamente del código: el hash de la contraseña, que se calcula antes de guardar.</a:t>
+            </a:r>
+            <a:endParaRPr lang="en-US" sz="1100" dirty="0"/>
+          </a:p>
+        </p:txBody>
+      </p:sp>
+    </p:spTree>
+  </p:cSld>
+  <p:clrMapOvr>
+    <a:masterClrMapping/>
+  </p:clrMapOvr>
+</p:sld>
+</file>
+
+<file path=ppt/slides/slide17.xml><?xml version="1.0" encoding="utf-8"?>
+<p:sld xmlns:a="http://schemas.openxmlformats.org/drawingml/2006/main" xmlns:r="http://schemas.openxmlformats.org/officeDocument/2006/relationships" xmlns:p="http://schemas.openxmlformats.org/presentationml/2006/main">
+  <p:cSld name="Slide 17">
+    <p:spTree>
+      <p:nvGrpSpPr>
+        <p:cNvPr id="1" name=""/>
+        <p:cNvGrpSpPr/>
+        <p:nvPr/>
+      </p:nvGrpSpPr>
+      <p:grpSpPr>
+        <a:xfrm>
+          <a:off x="0" y="0"/>
+          <a:ext cx="0" cy="0"/>
+          <a:chOff x="0" y="0"/>
+          <a:chExt cx="0" cy="0"/>
+        </a:xfrm>
+      </p:grpSpPr>
+      <p:sp>
+        <p:nvSpPr>
+          <p:cNvPr id="2" name="Text 0"/>
+          <p:cNvSpPr txBox="1"/>
+          <p:nvPr/>
+        </p:nvSpPr>
+        <p:spPr>
+          <a:xfrm>
+            <a:off x="640080" y="384048"/>
+            <a:ext cx="10911535" cy="658368"/>
+          </a:xfrm>
+          <a:prstGeom prst="rect">
+            <a:avLst/>
+          </a:prstGeom>
+          <a:noFill/>
+          <a:ln/>
+        </p:spPr>
+        <p:txBody>
+          <a:bodyPr wrap="square" lIns="0" tIns="0" rIns="0" bIns="0" rtlCol="0" anchor="ctr"/>
+          <a:lstStyle/>
+          <a:p>
+            <a:pPr indent="0" marL="0">
+              <a:buNone/>
+            </a:pPr>
+            <a:r>
+              <a:rPr lang="en-US" sz="3400" b="1" dirty="0">
+                <a:solidFill>
+                  <a:srgbClr val="14524A"/>
+                </a:solidFill>
+                <a:latin typeface="Cambria" pitchFamily="34" charset="0"/>
+                <a:ea typeface="Cambria" pitchFamily="34" charset="-122"/>
+                <a:cs typeface="Cambria" pitchFamily="34" charset="-120"/>
+              </a:rPr>
+              <a:t>Caso 1: un cliente pide más de lo que hay</a:t>
+            </a:r>
+            <a:endParaRPr lang="en-US" sz="3400" dirty="0"/>
+          </a:p>
+        </p:txBody>
+      </p:sp>
+      <p:sp>
+        <p:nvSpPr>
+          <p:cNvPr id="3" name="Text 1"/>
+          <p:cNvSpPr txBox="1"/>
+          <p:nvPr/>
+        </p:nvSpPr>
+        <p:spPr>
+          <a:xfrm>
+            <a:off x="640080" y="1042416"/>
+            <a:ext cx="10911535" cy="384048"/>
+          </a:xfrm>
+          <a:prstGeom prst="rect">
+            <a:avLst/>
+          </a:prstGeom>
+          <a:noFill/>
+          <a:ln/>
+        </p:spPr>
+        <p:txBody>
+          <a:bodyPr wrap="square" lIns="0" tIns="0" rIns="0" bIns="0" rtlCol="0" anchor="ctr"/>
+          <a:lstStyle/>
+          <a:p>
+            <a:pPr indent="0" marL="0">
+              <a:buNone/>
+            </a:pPr>
+            <a:r>
+              <a:rPr lang="en-US" sz="1400" dirty="0">
+                <a:solidFill>
+                  <a:srgbClr val="5D6B66"/>
+                </a:solidFill>
+                <a:latin typeface="Calibri" pitchFamily="34" charset="0"/>
+                <a:ea typeface="Calibri" pitchFamily="34" charset="-122"/>
+                <a:cs typeface="Calibri" pitchFamily="34" charset="-120"/>
+              </a:rPr>
+              <a:t>Qué ocurre exactamente cuando se rompe la RN-12</a:t>
+            </a:r>
+            <a:endParaRPr lang="en-US" sz="1400" dirty="0"/>
+          </a:p>
+        </p:txBody>
+      </p:sp>
+      <p:sp>
+        <p:nvSpPr>
+          <p:cNvPr id="4" name="Shape 2"/>
+          <p:cNvSpPr/>
+          <p:nvPr/>
+        </p:nvSpPr>
+        <p:spPr>
+          <a:xfrm>
+            <a:off x="640080" y="1792224"/>
+            <a:ext cx="402336" cy="402336"/>
+          </a:xfrm>
+          <a:prstGeom prst="ellipse">
+            <a:avLst/>
+          </a:prstGeom>
+          <a:solidFill>
+            <a:srgbClr val="E8A33D"/>
+          </a:solidFill>
+          <a:ln w="12700">
+            <a:solidFill>
+              <a:srgbClr val="E8A33D"/>
+            </a:solidFill>
+            <a:prstDash val="solid"/>
+          </a:ln>
+        </p:spPr>
+      </p:sp>
+      <p:sp>
+        <p:nvSpPr>
+          <p:cNvPr id="5" name="Text 3"/>
+          <p:cNvSpPr txBox="1"/>
+          <p:nvPr/>
+        </p:nvSpPr>
+        <p:spPr>
+          <a:xfrm>
+            <a:off x="640080" y="1792224"/>
+            <a:ext cx="402336" cy="402336"/>
+          </a:xfrm>
+          <a:prstGeom prst="rect">
+            <a:avLst/>
+          </a:prstGeom>
+          <a:noFill/>
+          <a:ln/>
+        </p:spPr>
+        <p:txBody>
+          <a:bodyPr wrap="square" lIns="0" tIns="0" rIns="0" bIns="0" rtlCol="0" anchor="ctr"/>
+          <a:lstStyle/>
+          <a:p>
+            <a:pPr algn="ctr" indent="0" marL="0">
+              <a:buNone/>
+            </a:pPr>
+            <a:r>
+              <a:rPr lang="en-US" sz="1300" b="1" dirty="0">
+                <a:solidFill>
+                  <a:srgbClr val="14524A"/>
+                </a:solidFill>
+                <a:latin typeface="Calibri" pitchFamily="34" charset="0"/>
+                <a:ea typeface="Calibri" pitchFamily="34" charset="-122"/>
+                <a:cs typeface="Calibri" pitchFamily="34" charset="-120"/>
+              </a:rPr>
+              <a:t>1</a:t>
+            </a:r>
+            <a:endParaRPr lang="en-US" sz="1300" dirty="0"/>
+          </a:p>
+        </p:txBody>
+      </p:sp>
+      <p:sp>
+        <p:nvSpPr>
+          <p:cNvPr id="6" name="Text 4"/>
+          <p:cNvSpPr txBox="1"/>
+          <p:nvPr/>
+        </p:nvSpPr>
+        <p:spPr>
+          <a:xfrm>
+            <a:off x="1225296" y="1719072"/>
+            <a:ext cx="3749040" cy="310896"/>
+          </a:xfrm>
+          <a:prstGeom prst="rect">
+            <a:avLst/>
+          </a:prstGeom>
+          <a:noFill/>
+          <a:ln/>
+        </p:spPr>
+        <p:txBody>
+          <a:bodyPr wrap="square" lIns="0" tIns="0" rIns="0" bIns="0" rtlCol="0" anchor="ctr"/>
+          <a:lstStyle/>
+          <a:p>
+            <a:pPr indent="0" marL="0">
+              <a:buNone/>
+            </a:pPr>
+            <a:r>
+              <a:rPr lang="en-US" sz="1350" b="1" dirty="0">
+                <a:solidFill>
+                  <a:srgbClr val="14524A"/>
+                </a:solidFill>
+                <a:latin typeface="Calibri" pitchFamily="34" charset="0"/>
+                <a:ea typeface="Calibri" pitchFamily="34" charset="-122"/>
+                <a:cs typeface="Calibri" pitchFamily="34" charset="-120"/>
+              </a:rPr>
+              <a:t>El cliente arma el pedido</a:t>
+            </a:r>
+            <a:endParaRPr lang="en-US" sz="1350" dirty="0"/>
+          </a:p>
+        </p:txBody>
+      </p:sp>
+      <p:sp>
+        <p:nvSpPr>
+          <p:cNvPr id="7" name="Text 5"/>
+          <p:cNvSpPr txBox="1"/>
+          <p:nvPr/>
+        </p:nvSpPr>
+        <p:spPr>
+          <a:xfrm>
+            <a:off x="5120640" y="1700784"/>
+            <a:ext cx="6446520" cy="658368"/>
+          </a:xfrm>
+          <a:prstGeom prst="rect">
+            <a:avLst/>
+          </a:prstGeom>
+          <a:noFill/>
+          <a:ln/>
+        </p:spPr>
+        <p:txBody>
+          <a:bodyPr wrap="square" lIns="0" tIns="0" rIns="0" bIns="0" rtlCol="0" anchor="t"/>
+          <a:lstStyle/>
+          <a:p>
+            <a:pPr indent="0" marL="0">
+              <a:buNone/>
+            </a:pPr>
+            <a:r>
+              <a:rPr lang="en-US" sz="1200" dirty="0">
+                <a:solidFill>
+                  <a:srgbClr val="5D6B66"/>
+                </a:solidFill>
+                <a:latin typeface="Calibri" pitchFamily="34" charset="0"/>
+                <a:ea typeface="Calibri" pitchFamily="34" charset="-122"/>
+                <a:cs typeface="Calibri" pitchFamily="34" charset="-120"/>
+              </a:rPr>
+              <a:t>Pide 5 unidades de «Vitaminas 60 tabs». El carrito acepta la cantidad porque es mayor que cero (RN-10).</a:t>
+            </a:r>
+            <a:endParaRPr lang="en-US" sz="1200" dirty="0"/>
+          </a:p>
+        </p:txBody>
+      </p:sp>
+      <p:sp>
+        <p:nvSpPr>
+          <p:cNvPr id="8" name="Shape 6"/>
+          <p:cNvSpPr/>
+          <p:nvPr/>
+        </p:nvSpPr>
+        <p:spPr>
+          <a:xfrm>
+            <a:off x="640080" y="2651760"/>
+            <a:ext cx="402336" cy="402336"/>
+          </a:xfrm>
+          <a:prstGeom prst="ellipse">
+            <a:avLst/>
+          </a:prstGeom>
+          <a:solidFill>
+            <a:srgbClr val="E8A33D"/>
+          </a:solidFill>
+          <a:ln w="12700">
+            <a:solidFill>
+              <a:srgbClr val="E8A33D"/>
+            </a:solidFill>
+            <a:prstDash val="solid"/>
+          </a:ln>
+        </p:spPr>
+      </p:sp>
+      <p:sp>
+        <p:nvSpPr>
+          <p:cNvPr id="9" name="Text 7"/>
+          <p:cNvSpPr txBox="1"/>
+          <p:nvPr/>
+        </p:nvSpPr>
+        <p:spPr>
+          <a:xfrm>
+            <a:off x="640080" y="2651760"/>
+            <a:ext cx="402336" cy="402336"/>
+          </a:xfrm>
+          <a:prstGeom prst="rect">
+            <a:avLst/>
+          </a:prstGeom>
+          <a:noFill/>
+          <a:ln/>
+        </p:spPr>
+        <p:txBody>
+          <a:bodyPr wrap="square" lIns="0" tIns="0" rIns="0" bIns="0" rtlCol="0" anchor="ctr"/>
+          <a:lstStyle/>
+          <a:p>
+            <a:pPr algn="ctr" indent="0" marL="0">
+              <a:buNone/>
+            </a:pPr>
+            <a:r>
+              <a:rPr lang="en-US" sz="1300" b="1" dirty="0">
+                <a:solidFill>
+                  <a:srgbClr val="14524A"/>
+                </a:solidFill>
+                <a:latin typeface="Calibri" pitchFamily="34" charset="0"/>
+                <a:ea typeface="Calibri" pitchFamily="34" charset="-122"/>
+                <a:cs typeface="Calibri" pitchFamily="34" charset="-120"/>
+              </a:rPr>
+              <a:t>2</a:t>
+            </a:r>
+            <a:endParaRPr lang="en-US" sz="1300" dirty="0"/>
+          </a:p>
+        </p:txBody>
+      </p:sp>
+      <p:sp>
+        <p:nvSpPr>
+          <p:cNvPr id="10" name="Text 8"/>
+          <p:cNvSpPr txBox="1"/>
+          <p:nvPr/>
+        </p:nvSpPr>
+        <p:spPr>
+          <a:xfrm>
+            <a:off x="1225296" y="2578608"/>
+            <a:ext cx="3749040" cy="310896"/>
+          </a:xfrm>
+          <a:prstGeom prst="rect">
+            <a:avLst/>
+          </a:prstGeom>
+          <a:noFill/>
+          <a:ln/>
+        </p:spPr>
+        <p:txBody>
+          <a:bodyPr wrap="square" lIns="0" tIns="0" rIns="0" bIns="0" rtlCol="0" anchor="ctr"/>
+          <a:lstStyle/>
+          <a:p>
+            <a:pPr indent="0" marL="0">
+              <a:buNone/>
+            </a:pPr>
+            <a:r>
+              <a:rPr lang="en-US" sz="1350" b="1" dirty="0">
+                <a:solidFill>
+                  <a:srgbClr val="14524A"/>
+                </a:solidFill>
+                <a:latin typeface="Calibri" pitchFamily="34" charset="0"/>
+                <a:ea typeface="Calibri" pitchFamily="34" charset="-122"/>
+                <a:cs typeface="Calibri" pitchFamily="34" charset="-120"/>
+              </a:rPr>
+              <a:t>Se confirma el pedido</a:t>
+            </a:r>
+            <a:endParaRPr lang="en-US" sz="1350" dirty="0"/>
+          </a:p>
+        </p:txBody>
+      </p:sp>
+      <p:sp>
+        <p:nvSpPr>
+          <p:cNvPr id="11" name="Text 9"/>
+          <p:cNvSpPr txBox="1"/>
+          <p:nvPr/>
+        </p:nvSpPr>
+        <p:spPr>
+          <a:xfrm>
+            <a:off x="5120640" y="2560320"/>
+            <a:ext cx="6446520" cy="658368"/>
+          </a:xfrm>
+          <a:prstGeom prst="rect">
+            <a:avLst/>
+          </a:prstGeom>
+          <a:noFill/>
+          <a:ln/>
+        </p:spPr>
+        <p:txBody>
+          <a:bodyPr wrap="square" lIns="0" tIns="0" rIns="0" bIns="0" rtlCol="0" anchor="t"/>
+          <a:lstStyle/>
+          <a:p>
+            <a:pPr indent="0" marL="0">
+              <a:buNone/>
+            </a:pPr>
+            <a:r>
+              <a:rPr lang="en-US" sz="1200" dirty="0">
+                <a:solidFill>
+                  <a:srgbClr val="5D6B66"/>
+                </a:solidFill>
+                <a:latin typeface="Calibri" pitchFamily="34" charset="0"/>
+                <a:ea typeface="Calibri" pitchFamily="34" charset="-122"/>
+                <a:cs typeface="Calibri" pitchFamily="34" charset="-120"/>
+              </a:rPr>
+              <a:t>sp_confirmar_pedido abre la transacción y bloquea la fila del producto con el cursor FOR UPDATE.</a:t>
+            </a:r>
+            <a:endParaRPr lang="en-US" sz="1200" dirty="0"/>
+          </a:p>
+        </p:txBody>
+      </p:sp>
+      <p:sp>
+        <p:nvSpPr>
+          <p:cNvPr id="12" name="Shape 10"/>
+          <p:cNvSpPr/>
+          <p:nvPr/>
+        </p:nvSpPr>
+        <p:spPr>
+          <a:xfrm>
+            <a:off x="640080" y="3511296"/>
+            <a:ext cx="402336" cy="402336"/>
+          </a:xfrm>
+          <a:prstGeom prst="ellipse">
+            <a:avLst/>
+          </a:prstGeom>
+          <a:solidFill>
+            <a:srgbClr val="E8A33D"/>
+          </a:solidFill>
+          <a:ln w="12700">
+            <a:solidFill>
+              <a:srgbClr val="E8A33D"/>
+            </a:solidFill>
+            <a:prstDash val="solid"/>
+          </a:ln>
+        </p:spPr>
+      </p:sp>
+      <p:sp>
+        <p:nvSpPr>
+          <p:cNvPr id="13" name="Text 11"/>
+          <p:cNvSpPr txBox="1"/>
+          <p:nvPr/>
+        </p:nvSpPr>
+        <p:spPr>
+          <a:xfrm>
+            <a:off x="640080" y="3511296"/>
+            <a:ext cx="402336" cy="402336"/>
+          </a:xfrm>
+          <a:prstGeom prst="rect">
+            <a:avLst/>
+          </a:prstGeom>
+          <a:noFill/>
+          <a:ln/>
+        </p:spPr>
+        <p:txBody>
+          <a:bodyPr wrap="square" lIns="0" tIns="0" rIns="0" bIns="0" rtlCol="0" anchor="ctr"/>
+          <a:lstStyle/>
+          <a:p>
+            <a:pPr algn="ctr" indent="0" marL="0">
+              <a:buNone/>
+            </a:pPr>
+            <a:r>
+              <a:rPr lang="en-US" sz="1300" b="1" dirty="0">
+                <a:solidFill>
+                  <a:srgbClr val="14524A"/>
+                </a:solidFill>
+                <a:latin typeface="Calibri" pitchFamily="34" charset="0"/>
+                <a:ea typeface="Calibri" pitchFamily="34" charset="-122"/>
+                <a:cs typeface="Calibri" pitchFamily="34" charset="-120"/>
+              </a:rPr>
+              <a:t>3</a:t>
+            </a:r>
+            <a:endParaRPr lang="en-US" sz="1300" dirty="0"/>
+          </a:p>
+        </p:txBody>
+      </p:sp>
+      <p:sp>
+        <p:nvSpPr>
+          <p:cNvPr id="14" name="Text 12"/>
+          <p:cNvSpPr txBox="1"/>
+          <p:nvPr/>
+        </p:nvSpPr>
+        <p:spPr>
+          <a:xfrm>
+            <a:off x="1225296" y="3438144"/>
+            <a:ext cx="3749040" cy="310896"/>
+          </a:xfrm>
+          <a:prstGeom prst="rect">
+            <a:avLst/>
+          </a:prstGeom>
+          <a:noFill/>
+          <a:ln/>
+        </p:spPr>
+        <p:txBody>
+          <a:bodyPr wrap="square" lIns="0" tIns="0" rIns="0" bIns="0" rtlCol="0" anchor="ctr"/>
+          <a:lstStyle/>
+          <a:p>
+            <a:pPr indent="0" marL="0">
+              <a:buNone/>
+            </a:pPr>
+            <a:r>
+              <a:rPr lang="en-US" sz="1350" b="1" dirty="0">
+                <a:solidFill>
+                  <a:srgbClr val="14524A"/>
+                </a:solidFill>
+                <a:latin typeface="Calibri" pitchFamily="34" charset="0"/>
+                <a:ea typeface="Calibri" pitchFamily="34" charset="-122"/>
+                <a:cs typeface="Calibri" pitchFamily="34" charset="-120"/>
+              </a:rPr>
+              <a:t>La comparación falla</a:t>
+            </a:r>
+            <a:endParaRPr lang="en-US" sz="1350" dirty="0"/>
+          </a:p>
+        </p:txBody>
+      </p:sp>
+      <p:sp>
+        <p:nvSpPr>
+          <p:cNvPr id="15" name="Text 13"/>
+          <p:cNvSpPr txBox="1"/>
+          <p:nvPr/>
+        </p:nvSpPr>
+        <p:spPr>
+          <a:xfrm>
+            <a:off x="5120640" y="3419856"/>
+            <a:ext cx="6446520" cy="658368"/>
+          </a:xfrm>
+          <a:prstGeom prst="rect">
+            <a:avLst/>
+          </a:prstGeom>
+          <a:noFill/>
+          <a:ln/>
+        </p:spPr>
+        <p:txBody>
+          <a:bodyPr wrap="square" lIns="0" tIns="0" rIns="0" bIns="0" rtlCol="0" anchor="t"/>
+          <a:lstStyle/>
+          <a:p>
+            <a:pPr indent="0" marL="0">
+              <a:buNone/>
+            </a:pPr>
+            <a:r>
+              <a:rPr lang="en-US" sz="1200" dirty="0">
+                <a:solidFill>
+                  <a:srgbClr val="5D6B66"/>
+                </a:solidFill>
+                <a:latin typeface="Calibri" pitchFamily="34" charset="0"/>
+                <a:ea typeface="Calibri" pitchFamily="34" charset="-122"/>
+                <a:cs typeface="Calibri" pitchFamily="34" charset="-120"/>
+              </a:rPr>
+              <a:t>El stock real es 3 y se piden 5. La RN-12 no se cumple.</a:t>
+            </a:r>
+            <a:endParaRPr lang="en-US" sz="1200" dirty="0"/>
+          </a:p>
+        </p:txBody>
+      </p:sp>
+      <p:sp>
+        <p:nvSpPr>
+          <p:cNvPr id="16" name="Shape 14"/>
+          <p:cNvSpPr/>
+          <p:nvPr/>
+        </p:nvSpPr>
+        <p:spPr>
+          <a:xfrm>
+            <a:off x="640080" y="4370832"/>
+            <a:ext cx="402336" cy="402336"/>
+          </a:xfrm>
+          <a:prstGeom prst="ellipse">
+            <a:avLst/>
+          </a:prstGeom>
+          <a:solidFill>
+            <a:srgbClr val="E8A33D"/>
+          </a:solidFill>
+          <a:ln w="12700">
+            <a:solidFill>
+              <a:srgbClr val="E8A33D"/>
+            </a:solidFill>
+            <a:prstDash val="solid"/>
+          </a:ln>
+        </p:spPr>
+      </p:sp>
+      <p:sp>
+        <p:nvSpPr>
+          <p:cNvPr id="17" name="Text 15"/>
+          <p:cNvSpPr txBox="1"/>
+          <p:nvPr/>
+        </p:nvSpPr>
+        <p:spPr>
+          <a:xfrm>
+            <a:off x="640080" y="4370832"/>
+            <a:ext cx="402336" cy="402336"/>
+          </a:xfrm>
+          <a:prstGeom prst="rect">
+            <a:avLst/>
+          </a:prstGeom>
+          <a:noFill/>
+          <a:ln/>
+        </p:spPr>
+        <p:txBody>
+          <a:bodyPr wrap="square" lIns="0" tIns="0" rIns="0" bIns="0" rtlCol="0" anchor="ctr"/>
+          <a:lstStyle/>
+          <a:p>
+            <a:pPr algn="ctr" indent="0" marL="0">
+              <a:buNone/>
+            </a:pPr>
+            <a:r>
+              <a:rPr lang="en-US" sz="1300" b="1" dirty="0">
+                <a:solidFill>
+                  <a:srgbClr val="14524A"/>
+                </a:solidFill>
+                <a:latin typeface="Calibri" pitchFamily="34" charset="0"/>
+                <a:ea typeface="Calibri" pitchFamily="34" charset="-122"/>
+                <a:cs typeface="Calibri" pitchFamily="34" charset="-120"/>
+              </a:rPr>
               <a:t>4</a:t>
             </a:r>
-            <a:endParaRPr lang="en-US" sz="6600" dirty="0"/>
+            <a:endParaRPr lang="en-US" sz="1300" dirty="0"/>
+          </a:p>
+        </p:txBody>
+      </p:sp>
+      <p:sp>
+        <p:nvSpPr>
+          <p:cNvPr id="18" name="Text 16"/>
+          <p:cNvSpPr txBox="1"/>
+          <p:nvPr/>
+        </p:nvSpPr>
+        <p:spPr>
+          <a:xfrm>
+            <a:off x="1225296" y="4297680"/>
+            <a:ext cx="3749040" cy="310896"/>
+          </a:xfrm>
+          <a:prstGeom prst="rect">
+            <a:avLst/>
+          </a:prstGeom>
+          <a:noFill/>
+          <a:ln/>
+        </p:spPr>
+        <p:txBody>
+          <a:bodyPr wrap="square" lIns="0" tIns="0" rIns="0" bIns="0" rtlCol="0" anchor="ctr"/>
+          <a:lstStyle/>
+          <a:p>
+            <a:pPr indent="0" marL="0">
+              <a:buNone/>
+            </a:pPr>
+            <a:r>
+              <a:rPr lang="en-US" sz="1350" b="1" dirty="0">
+                <a:solidFill>
+                  <a:srgbClr val="14524A"/>
+                </a:solidFill>
+                <a:latin typeface="Calibri" pitchFamily="34" charset="0"/>
+                <a:ea typeface="Calibri" pitchFamily="34" charset="-122"/>
+                <a:cs typeface="Calibri" pitchFamily="34" charset="-120"/>
+              </a:rPr>
+              <a:t>El motor aborta</a:t>
+            </a:r>
+            <a:endParaRPr lang="en-US" sz="1350" dirty="0"/>
+          </a:p>
+        </p:txBody>
+      </p:sp>
+      <p:sp>
+        <p:nvSpPr>
+          <p:cNvPr id="19" name="Text 17"/>
+          <p:cNvSpPr txBox="1"/>
+          <p:nvPr/>
+        </p:nvSpPr>
+        <p:spPr>
+          <a:xfrm>
+            <a:off x="5120640" y="4279392"/>
+            <a:ext cx="6446520" cy="658368"/>
+          </a:xfrm>
+          <a:prstGeom prst="rect">
+            <a:avLst/>
+          </a:prstGeom>
+          <a:noFill/>
+          <a:ln/>
+        </p:spPr>
+        <p:txBody>
+          <a:bodyPr wrap="square" lIns="0" tIns="0" rIns="0" bIns="0" rtlCol="0" anchor="t"/>
+          <a:lstStyle/>
+          <a:p>
+            <a:pPr indent="0" marL="0">
+              <a:buNone/>
+            </a:pPr>
+            <a:r>
+              <a:rPr lang="en-US" sz="1200" dirty="0">
+                <a:solidFill>
+                  <a:srgbClr val="5D6B66"/>
+                </a:solidFill>
+                <a:latin typeface="Calibri" pitchFamily="34" charset="0"/>
+                <a:ea typeface="Calibri" pitchFamily="34" charset="-122"/>
+                <a:cs typeface="Calibri" pitchFamily="34" charset="-120"/>
+              </a:rPr>
+              <a:t>SIGNAL SQLSTATE '45000' con el mensaje «Stock insuficiente -&gt; Vitaminas (pedido: 5, disponible: 3)».</a:t>
+            </a:r>
+            <a:endParaRPr lang="en-US" sz="1200" dirty="0"/>
+          </a:p>
+        </p:txBody>
+      </p:sp>
+      <p:sp>
+        <p:nvSpPr>
+          <p:cNvPr id="20" name="Shape 18"/>
+          <p:cNvSpPr/>
+          <p:nvPr/>
+        </p:nvSpPr>
+        <p:spPr>
+          <a:xfrm>
+            <a:off x="640080" y="5230368"/>
+            <a:ext cx="402336" cy="402336"/>
+          </a:xfrm>
+          <a:prstGeom prst="ellipse">
+            <a:avLst/>
+          </a:prstGeom>
+          <a:solidFill>
+            <a:srgbClr val="E8A33D"/>
+          </a:solidFill>
+          <a:ln w="12700">
+            <a:solidFill>
+              <a:srgbClr val="E8A33D"/>
+            </a:solidFill>
+            <a:prstDash val="solid"/>
+          </a:ln>
+        </p:spPr>
+      </p:sp>
+      <p:sp>
+        <p:nvSpPr>
+          <p:cNvPr id="21" name="Text 19"/>
+          <p:cNvSpPr txBox="1"/>
+          <p:nvPr/>
+        </p:nvSpPr>
+        <p:spPr>
+          <a:xfrm>
+            <a:off x="640080" y="5230368"/>
+            <a:ext cx="402336" cy="402336"/>
+          </a:xfrm>
+          <a:prstGeom prst="rect">
+            <a:avLst/>
+          </a:prstGeom>
+          <a:noFill/>
+          <a:ln/>
+        </p:spPr>
+        <p:txBody>
+          <a:bodyPr wrap="square" lIns="0" tIns="0" rIns="0" bIns="0" rtlCol="0" anchor="ctr"/>
+          <a:lstStyle/>
+          <a:p>
+            <a:pPr algn="ctr" indent="0" marL="0">
+              <a:buNone/>
+            </a:pPr>
+            <a:r>
+              <a:rPr lang="en-US" sz="1300" b="1" dirty="0">
+                <a:solidFill>
+                  <a:srgbClr val="14524A"/>
+                </a:solidFill>
+                <a:latin typeface="Calibri" pitchFamily="34" charset="0"/>
+                <a:ea typeface="Calibri" pitchFamily="34" charset="-122"/>
+                <a:cs typeface="Calibri" pitchFamily="34" charset="-120"/>
+              </a:rPr>
+              <a:t>5</a:t>
+            </a:r>
+            <a:endParaRPr lang="en-US" sz="1300" dirty="0"/>
+          </a:p>
+        </p:txBody>
+      </p:sp>
+      <p:sp>
+        <p:nvSpPr>
+          <p:cNvPr id="22" name="Text 20"/>
+          <p:cNvSpPr txBox="1"/>
+          <p:nvPr/>
+        </p:nvSpPr>
+        <p:spPr>
+          <a:xfrm>
+            <a:off x="1225296" y="5157216"/>
+            <a:ext cx="3749040" cy="310896"/>
+          </a:xfrm>
+          <a:prstGeom prst="rect">
+            <a:avLst/>
+          </a:prstGeom>
+          <a:noFill/>
+          <a:ln/>
+        </p:spPr>
+        <p:txBody>
+          <a:bodyPr wrap="square" lIns="0" tIns="0" rIns="0" bIns="0" rtlCol="0" anchor="ctr"/>
+          <a:lstStyle/>
+          <a:p>
+            <a:pPr indent="0" marL="0">
+              <a:buNone/>
+            </a:pPr>
+            <a:r>
+              <a:rPr lang="en-US" sz="1350" b="1" dirty="0">
+                <a:solidFill>
+                  <a:srgbClr val="14524A"/>
+                </a:solidFill>
+                <a:latin typeface="Calibri" pitchFamily="34" charset="0"/>
+                <a:ea typeface="Calibri" pitchFamily="34" charset="-122"/>
+                <a:cs typeface="Calibri" pitchFamily="34" charset="-120"/>
+              </a:rPr>
+              <a:t>Se revierte todo</a:t>
+            </a:r>
+            <a:endParaRPr lang="en-US" sz="1350" dirty="0"/>
+          </a:p>
+        </p:txBody>
+      </p:sp>
+      <p:sp>
+        <p:nvSpPr>
+          <p:cNvPr id="23" name="Text 21"/>
+          <p:cNvSpPr txBox="1"/>
+          <p:nvPr/>
+        </p:nvSpPr>
+        <p:spPr>
+          <a:xfrm>
+            <a:off x="5120640" y="5138928"/>
+            <a:ext cx="6446520" cy="658368"/>
+          </a:xfrm>
+          <a:prstGeom prst="rect">
+            <a:avLst/>
+          </a:prstGeom>
+          <a:noFill/>
+          <a:ln/>
+        </p:spPr>
+        <p:txBody>
+          <a:bodyPr wrap="square" lIns="0" tIns="0" rIns="0" bIns="0" rtlCol="0" anchor="t"/>
+          <a:lstStyle/>
+          <a:p>
+            <a:pPr indent="0" marL="0">
+              <a:buNone/>
+            </a:pPr>
+            <a:r>
+              <a:rPr lang="en-US" sz="1200" dirty="0">
+                <a:solidFill>
+                  <a:srgbClr val="5D6B66"/>
+                </a:solidFill>
+                <a:latin typeface="Calibri" pitchFamily="34" charset="0"/>
+                <a:ea typeface="Calibri" pitchFamily="34" charset="-122"/>
+                <a:cs typeface="Calibri" pitchFamily="34" charset="-120"/>
+              </a:rPr>
+              <a:t>El EXIT HANDLER ejecuta ROLLBACK: el pedido sigue en PENDIENTE y el stock sigue siendo 3.</a:t>
+            </a:r>
+            <a:endParaRPr lang="en-US" sz="1200" dirty="0"/>
+          </a:p>
+        </p:txBody>
+      </p:sp>
+      <p:sp>
+        <p:nvSpPr>
+          <p:cNvPr id="24" name="Shape 22"/>
+          <p:cNvSpPr/>
+          <p:nvPr/>
+        </p:nvSpPr>
+        <p:spPr>
+          <a:xfrm>
+            <a:off x="640080" y="5998464"/>
+            <a:ext cx="10911535" cy="566928"/>
+          </a:xfrm>
+          <a:prstGeom prst="roundRect">
+            <a:avLst>
+              <a:gd name="adj" fmla="val 8065"/>
+            </a:avLst>
+          </a:prstGeom>
+          <a:solidFill>
+            <a:srgbClr val="EEF5F1"/>
+          </a:solidFill>
+          <a:ln w="12700">
+            <a:solidFill>
+              <a:srgbClr val="D9E5DF"/>
+            </a:solidFill>
+            <a:prstDash val="solid"/>
+          </a:ln>
+        </p:spPr>
+      </p:sp>
+      <p:sp>
+        <p:nvSpPr>
+          <p:cNvPr id="25" name="Text 23"/>
+          <p:cNvSpPr txBox="1"/>
+          <p:nvPr/>
+        </p:nvSpPr>
+        <p:spPr>
+          <a:xfrm>
+            <a:off x="914400" y="5998464"/>
+            <a:ext cx="10362895" cy="566928"/>
+          </a:xfrm>
+          <a:prstGeom prst="rect">
+            <a:avLst/>
+          </a:prstGeom>
+          <a:noFill/>
+          <a:ln/>
+        </p:spPr>
+        <p:txBody>
+          <a:bodyPr wrap="square" lIns="0" tIns="0" rIns="0" bIns="0" rtlCol="0" anchor="ctr"/>
+          <a:lstStyle/>
+          <a:p>
+            <a:pPr indent="0" marL="0">
+              <a:buNone/>
+            </a:pPr>
+            <a:r>
+              <a:rPr lang="en-US" sz="1200" b="1" dirty="0">
+                <a:solidFill>
+                  <a:srgbClr val="14524A"/>
+                </a:solidFill>
+                <a:latin typeface="Calibri" pitchFamily="34" charset="0"/>
+                <a:ea typeface="Calibri" pitchFamily="34" charset="-122"/>
+                <a:cs typeface="Calibri" pitchFamily="34" charset="-120"/>
+              </a:rPr>
+              <a:t>Y si todo lo anterior fallara, la restricción CHECK (stock_actual &gt;= 0) de la RN-07 seguiría impidiendo un inventario negativo.</a:t>
+            </a:r>
+            <a:endParaRPr lang="en-US" sz="1200" dirty="0"/>
+          </a:p>
+        </p:txBody>
+      </p:sp>
+    </p:spTree>
+  </p:cSld>
+  <p:clrMapOvr>
+    <a:masterClrMapping/>
+  </p:clrMapOvr>
+</p:sld>
+</file>
+
+<file path=ppt/slides/slide18.xml><?xml version="1.0" encoding="utf-8"?>
+<p:sld xmlns:a="http://schemas.openxmlformats.org/drawingml/2006/main" xmlns:r="http://schemas.openxmlformats.org/officeDocument/2006/relationships" xmlns:p="http://schemas.openxmlformats.org/presentationml/2006/main">
+  <p:cSld name="Slide 18">
+    <p:spTree>
+      <p:nvGrpSpPr>
+        <p:cNvPr id="1" name=""/>
+        <p:cNvGrpSpPr/>
+        <p:nvPr/>
+      </p:nvGrpSpPr>
+      <p:grpSpPr>
+        <a:xfrm>
+          <a:off x="0" y="0"/>
+          <a:ext cx="0" cy="0"/>
+          <a:chOff x="0" y="0"/>
+          <a:chExt cx="0" cy="0"/>
+        </a:xfrm>
+      </p:grpSpPr>
+      <p:sp>
+        <p:nvSpPr>
+          <p:cNvPr id="2" name="Text 0"/>
+          <p:cNvSpPr txBox="1"/>
+          <p:nvPr/>
+        </p:nvSpPr>
+        <p:spPr>
+          <a:xfrm>
+            <a:off x="640080" y="384048"/>
+            <a:ext cx="10911535" cy="658368"/>
+          </a:xfrm>
+          <a:prstGeom prst="rect">
+            <a:avLst/>
+          </a:prstGeom>
+          <a:noFill/>
+          <a:ln/>
+        </p:spPr>
+        <p:txBody>
+          <a:bodyPr wrap="square" lIns="0" tIns="0" rIns="0" bIns="0" rtlCol="0" anchor="ctr"/>
+          <a:lstStyle/>
+          <a:p>
+            <a:pPr indent="0" marL="0">
+              <a:buNone/>
+            </a:pPr>
+            <a:r>
+              <a:rPr lang="en-US" sz="3400" b="1" dirty="0">
+                <a:solidFill>
+                  <a:srgbClr val="14524A"/>
+                </a:solidFill>
+                <a:latin typeface="Cambria" pitchFamily="34" charset="0"/>
+                <a:ea typeface="Cambria" pitchFamily="34" charset="-122"/>
+                <a:cs typeface="Cambria" pitchFamily="34" charset="-120"/>
+              </a:rPr>
+              <a:t>Caso 2: dos clientes piden el mismo horario</a:t>
+            </a:r>
+            <a:endParaRPr lang="en-US" sz="3400" dirty="0"/>
+          </a:p>
+        </p:txBody>
+      </p:sp>
+      <p:sp>
+        <p:nvSpPr>
+          <p:cNvPr id="3" name="Text 1"/>
+          <p:cNvSpPr txBox="1"/>
+          <p:nvPr/>
+        </p:nvSpPr>
+        <p:spPr>
+          <a:xfrm>
+            <a:off x="640080" y="1042416"/>
+            <a:ext cx="10911535" cy="384048"/>
+          </a:xfrm>
+          <a:prstGeom prst="rect">
+            <a:avLst/>
+          </a:prstGeom>
+          <a:noFill/>
+          <a:ln/>
+        </p:spPr>
+        <p:txBody>
+          <a:bodyPr wrap="square" lIns="0" tIns="0" rIns="0" bIns="0" rtlCol="0" anchor="ctr"/>
+          <a:lstStyle/>
+          <a:p>
+            <a:pPr indent="0" marL="0">
+              <a:buNone/>
+            </a:pPr>
+            <a:r>
+              <a:rPr lang="en-US" sz="1400" dirty="0">
+                <a:solidFill>
+                  <a:srgbClr val="5D6B66"/>
+                </a:solidFill>
+                <a:latin typeface="Calibri" pitchFamily="34" charset="0"/>
+                <a:ea typeface="Calibri" pitchFamily="34" charset="-122"/>
+                <a:cs typeface="Calibri" pitchFamily="34" charset="-120"/>
+              </a:rPr>
+              <a:t>Qué ocurre cuando dos personas pulsan «reservar» a la vez (RN-17)</a:t>
+            </a:r>
+            <a:endParaRPr lang="en-US" sz="1400" dirty="0"/>
+          </a:p>
+        </p:txBody>
+      </p:sp>
+      <p:sp>
+        <p:nvSpPr>
+          <p:cNvPr id="4" name="Shape 2"/>
+          <p:cNvSpPr/>
+          <p:nvPr/>
+        </p:nvSpPr>
+        <p:spPr>
+          <a:xfrm>
+            <a:off x="640080" y="1883664"/>
+            <a:ext cx="402336" cy="402336"/>
+          </a:xfrm>
+          <a:prstGeom prst="ellipse">
+            <a:avLst/>
+          </a:prstGeom>
+          <a:solidFill>
+            <a:srgbClr val="E8A33D"/>
+          </a:solidFill>
+          <a:ln w="12700">
+            <a:solidFill>
+              <a:srgbClr val="E8A33D"/>
+            </a:solidFill>
+            <a:prstDash val="solid"/>
+          </a:ln>
+        </p:spPr>
+      </p:sp>
+      <p:sp>
+        <p:nvSpPr>
+          <p:cNvPr id="5" name="Text 3"/>
+          <p:cNvSpPr txBox="1"/>
+          <p:nvPr/>
+        </p:nvSpPr>
+        <p:spPr>
+          <a:xfrm>
+            <a:off x="640080" y="1883664"/>
+            <a:ext cx="402336" cy="402336"/>
+          </a:xfrm>
+          <a:prstGeom prst="rect">
+            <a:avLst/>
+          </a:prstGeom>
+          <a:noFill/>
+          <a:ln/>
+        </p:spPr>
+        <p:txBody>
+          <a:bodyPr wrap="square" lIns="0" tIns="0" rIns="0" bIns="0" rtlCol="0" anchor="ctr"/>
+          <a:lstStyle/>
+          <a:p>
+            <a:pPr algn="ctr" indent="0" marL="0">
+              <a:buNone/>
+            </a:pPr>
+            <a:r>
+              <a:rPr lang="en-US" sz="1300" b="1" dirty="0">
+                <a:solidFill>
+                  <a:srgbClr val="14524A"/>
+                </a:solidFill>
+                <a:latin typeface="Calibri" pitchFamily="34" charset="0"/>
+                <a:ea typeface="Calibri" pitchFamily="34" charset="-122"/>
+                <a:cs typeface="Calibri" pitchFamily="34" charset="-120"/>
+              </a:rPr>
+              <a:t>1</a:t>
+            </a:r>
+            <a:endParaRPr lang="en-US" sz="1300" dirty="0"/>
+          </a:p>
+        </p:txBody>
+      </p:sp>
+      <p:sp>
+        <p:nvSpPr>
+          <p:cNvPr id="6" name="Text 4"/>
+          <p:cNvSpPr txBox="1"/>
+          <p:nvPr/>
+        </p:nvSpPr>
+        <p:spPr>
+          <a:xfrm>
+            <a:off x="1225296" y="1810512"/>
+            <a:ext cx="3749040" cy="310896"/>
+          </a:xfrm>
+          <a:prstGeom prst="rect">
+            <a:avLst/>
+          </a:prstGeom>
+          <a:noFill/>
+          <a:ln/>
+        </p:spPr>
+        <p:txBody>
+          <a:bodyPr wrap="square" lIns="0" tIns="0" rIns="0" bIns="0" rtlCol="0" anchor="ctr"/>
+          <a:lstStyle/>
+          <a:p>
+            <a:pPr indent="0" marL="0">
+              <a:buNone/>
+            </a:pPr>
+            <a:r>
+              <a:rPr lang="en-US" sz="1350" b="1" dirty="0">
+                <a:solidFill>
+                  <a:srgbClr val="14524A"/>
+                </a:solidFill>
+                <a:latin typeface="Calibri" pitchFamily="34" charset="0"/>
+                <a:ea typeface="Calibri" pitchFamily="34" charset="-122"/>
+                <a:cs typeface="Calibri" pitchFamily="34" charset="-120"/>
+              </a:rPr>
+              <a:t>Ana reserva</a:t>
+            </a:r>
+            <a:endParaRPr lang="en-US" sz="1350" dirty="0"/>
+          </a:p>
+        </p:txBody>
+      </p:sp>
+      <p:sp>
+        <p:nvSpPr>
+          <p:cNvPr id="7" name="Text 5"/>
+          <p:cNvSpPr txBox="1"/>
+          <p:nvPr/>
+        </p:nvSpPr>
+        <p:spPr>
+          <a:xfrm>
+            <a:off x="5120640" y="1792224"/>
+            <a:ext cx="6446520" cy="658368"/>
+          </a:xfrm>
+          <a:prstGeom prst="rect">
+            <a:avLst/>
+          </a:prstGeom>
+          <a:noFill/>
+          <a:ln/>
+        </p:spPr>
+        <p:txBody>
+          <a:bodyPr wrap="square" lIns="0" tIns="0" rIns="0" bIns="0" rtlCol="0" anchor="t"/>
+          <a:lstStyle/>
+          <a:p>
+            <a:pPr indent="0" marL="0">
+              <a:buNone/>
+            </a:pPr>
+            <a:r>
+              <a:rPr lang="en-US" sz="1200" dirty="0">
+                <a:solidFill>
+                  <a:srgbClr val="5D6B66"/>
+                </a:solidFill>
+                <a:latin typeface="Calibri" pitchFamily="34" charset="0"/>
+                <a:ea typeface="Calibri" pitchFamily="34" charset="-122"/>
+                <a:cs typeface="Calibri" pitchFamily="34" charset="-120"/>
+              </a:rPr>
+              <a:t>Martes 10:00 con la veterinaria Lucía Bernal. El INSERT en citas se registra sin problema.</a:t>
+            </a:r>
+            <a:endParaRPr lang="en-US" sz="1200" dirty="0"/>
+          </a:p>
+        </p:txBody>
+      </p:sp>
+      <p:sp>
+        <p:nvSpPr>
+          <p:cNvPr id="8" name="Shape 6"/>
+          <p:cNvSpPr/>
+          <p:nvPr/>
+        </p:nvSpPr>
+        <p:spPr>
+          <a:xfrm>
+            <a:off x="640080" y="2852928"/>
+            <a:ext cx="402336" cy="402336"/>
+          </a:xfrm>
+          <a:prstGeom prst="ellipse">
+            <a:avLst/>
+          </a:prstGeom>
+          <a:solidFill>
+            <a:srgbClr val="E8A33D"/>
+          </a:solidFill>
+          <a:ln w="12700">
+            <a:solidFill>
+              <a:srgbClr val="E8A33D"/>
+            </a:solidFill>
+            <a:prstDash val="solid"/>
+          </a:ln>
+        </p:spPr>
+      </p:sp>
+      <p:sp>
+        <p:nvSpPr>
+          <p:cNvPr id="9" name="Text 7"/>
+          <p:cNvSpPr txBox="1"/>
+          <p:nvPr/>
+        </p:nvSpPr>
+        <p:spPr>
+          <a:xfrm>
+            <a:off x="640080" y="2852928"/>
+            <a:ext cx="402336" cy="402336"/>
+          </a:xfrm>
+          <a:prstGeom prst="rect">
+            <a:avLst/>
+          </a:prstGeom>
+          <a:noFill/>
+          <a:ln/>
+        </p:spPr>
+        <p:txBody>
+          <a:bodyPr wrap="square" lIns="0" tIns="0" rIns="0" bIns="0" rtlCol="0" anchor="ctr"/>
+          <a:lstStyle/>
+          <a:p>
+            <a:pPr algn="ctr" indent="0" marL="0">
+              <a:buNone/>
+            </a:pPr>
+            <a:r>
+              <a:rPr lang="en-US" sz="1300" b="1" dirty="0">
+                <a:solidFill>
+                  <a:srgbClr val="14524A"/>
+                </a:solidFill>
+                <a:latin typeface="Calibri" pitchFamily="34" charset="0"/>
+                <a:ea typeface="Calibri" pitchFamily="34" charset="-122"/>
+                <a:cs typeface="Calibri" pitchFamily="34" charset="-120"/>
+              </a:rPr>
+              <a:t>2</a:t>
+            </a:r>
+            <a:endParaRPr lang="en-US" sz="1300" dirty="0"/>
+          </a:p>
+        </p:txBody>
+      </p:sp>
+      <p:sp>
+        <p:nvSpPr>
+          <p:cNvPr id="10" name="Text 8"/>
+          <p:cNvSpPr txBox="1"/>
+          <p:nvPr/>
+        </p:nvSpPr>
+        <p:spPr>
+          <a:xfrm>
+            <a:off x="1225296" y="2779776"/>
+            <a:ext cx="3749040" cy="310896"/>
+          </a:xfrm>
+          <a:prstGeom prst="rect">
+            <a:avLst/>
+          </a:prstGeom>
+          <a:noFill/>
+          <a:ln/>
+        </p:spPr>
+        <p:txBody>
+          <a:bodyPr wrap="square" lIns="0" tIns="0" rIns="0" bIns="0" rtlCol="0" anchor="ctr"/>
+          <a:lstStyle/>
+          <a:p>
+            <a:pPr indent="0" marL="0">
+              <a:buNone/>
+            </a:pPr>
+            <a:r>
+              <a:rPr lang="en-US" sz="1350" b="1" dirty="0">
+                <a:solidFill>
+                  <a:srgbClr val="14524A"/>
+                </a:solidFill>
+                <a:latin typeface="Calibri" pitchFamily="34" charset="0"/>
+                <a:ea typeface="Calibri" pitchFamily="34" charset="-122"/>
+                <a:cs typeface="Calibri" pitchFamily="34" charset="-120"/>
+              </a:rPr>
+              <a:t>Marco intenta el mismo bloque</a:t>
+            </a:r>
+            <a:endParaRPr lang="en-US" sz="1350" dirty="0"/>
           </a:p>
         </p:txBody>
       </p:sp>
@@ -5078,8 +7861,8 @@
         </p:nvSpPr>
         <p:spPr>
           <a:xfrm>
-            <a:off x="9070619" y="3511296"/>
-            <a:ext cx="2480996" cy="731520"/>
+            <a:off x="5120640" y="2761488"/>
+            <a:ext cx="6446520" cy="658368"/>
           </a:xfrm>
           <a:prstGeom prst="rect">
             <a:avLst/>
@@ -5091,14 +7874,896 @@
           <a:bodyPr wrap="square" lIns="0" tIns="0" rIns="0" bIns="0" rtlCol="0" anchor="t"/>
           <a:lstStyle/>
           <a:p>
+            <a:pPr indent="0" marL="0">
+              <a:buNone/>
+            </a:pPr>
+            <a:r>
+              <a:rPr lang="en-US" sz="1200" dirty="0">
+                <a:solidFill>
+                  <a:srgbClr val="5D6B66"/>
+                </a:solidFill>
+                <a:latin typeface="Calibri" pitchFamily="34" charset="0"/>
+                <a:ea typeface="Calibri" pitchFamily="34" charset="-122"/>
+                <a:cs typeface="Calibri" pitchFamily="34" charset="-120"/>
+              </a:rPr>
+              <a:t>Un segundo después envía la misma fecha y hora con la misma veterinaria.</a:t>
+            </a:r>
+            <a:endParaRPr lang="en-US" sz="1200" dirty="0"/>
+          </a:p>
+        </p:txBody>
+      </p:sp>
+      <p:sp>
+        <p:nvSpPr>
+          <p:cNvPr id="12" name="Shape 10"/>
+          <p:cNvSpPr/>
+          <p:nvPr/>
+        </p:nvSpPr>
+        <p:spPr>
+          <a:xfrm>
+            <a:off x="640080" y="3822192"/>
+            <a:ext cx="402336" cy="402336"/>
+          </a:xfrm>
+          <a:prstGeom prst="ellipse">
+            <a:avLst/>
+          </a:prstGeom>
+          <a:solidFill>
+            <a:srgbClr val="E8A33D"/>
+          </a:solidFill>
+          <a:ln w="12700">
+            <a:solidFill>
+              <a:srgbClr val="E8A33D"/>
+            </a:solidFill>
+            <a:prstDash val="solid"/>
+          </a:ln>
+        </p:spPr>
+      </p:sp>
+      <p:sp>
+        <p:nvSpPr>
+          <p:cNvPr id="13" name="Text 11"/>
+          <p:cNvSpPr txBox="1"/>
+          <p:nvPr/>
+        </p:nvSpPr>
+        <p:spPr>
+          <a:xfrm>
+            <a:off x="640080" y="3822192"/>
+            <a:ext cx="402336" cy="402336"/>
+          </a:xfrm>
+          <a:prstGeom prst="rect">
+            <a:avLst/>
+          </a:prstGeom>
+          <a:noFill/>
+          <a:ln/>
+        </p:spPr>
+        <p:txBody>
+          <a:bodyPr wrap="square" lIns="0" tIns="0" rIns="0" bIns="0" rtlCol="0" anchor="ctr"/>
+          <a:lstStyle/>
+          <a:p>
             <a:pPr algn="ctr" indent="0" marL="0">
-              <a:lnSpc>
-                <a:spcPts val="1800"/>
-              </a:lnSpc>
-              <a:buNone/>
-            </a:pPr>
-            <a:r>
-              <a:rPr lang="en-US" sz="1300" dirty="0">
+              <a:buNone/>
+            </a:pPr>
+            <a:r>
+              <a:rPr lang="en-US" sz="1300" b="1" dirty="0">
+                <a:solidFill>
+                  <a:srgbClr val="14524A"/>
+                </a:solidFill>
+                <a:latin typeface="Calibri" pitchFamily="34" charset="0"/>
+                <a:ea typeface="Calibri" pitchFamily="34" charset="-122"/>
+                <a:cs typeface="Calibri" pitchFamily="34" charset="-120"/>
+              </a:rPr>
+              <a:t>3</a:t>
+            </a:r>
+            <a:endParaRPr lang="en-US" sz="1300" dirty="0"/>
+          </a:p>
+        </p:txBody>
+      </p:sp>
+      <p:sp>
+        <p:nvSpPr>
+          <p:cNvPr id="14" name="Text 12"/>
+          <p:cNvSpPr txBox="1"/>
+          <p:nvPr/>
+        </p:nvSpPr>
+        <p:spPr>
+          <a:xfrm>
+            <a:off x="1225296" y="3749040"/>
+            <a:ext cx="3749040" cy="310896"/>
+          </a:xfrm>
+          <a:prstGeom prst="rect">
+            <a:avLst/>
+          </a:prstGeom>
+          <a:noFill/>
+          <a:ln/>
+        </p:spPr>
+        <p:txBody>
+          <a:bodyPr wrap="square" lIns="0" tIns="0" rIns="0" bIns="0" rtlCol="0" anchor="ctr"/>
+          <a:lstStyle/>
+          <a:p>
+            <a:pPr indent="0" marL="0">
+              <a:buNone/>
+            </a:pPr>
+            <a:r>
+              <a:rPr lang="en-US" sz="1350" b="1" dirty="0">
+                <a:solidFill>
+                  <a:srgbClr val="14524A"/>
+                </a:solidFill>
+                <a:latin typeface="Calibri" pitchFamily="34" charset="0"/>
+                <a:ea typeface="Calibri" pitchFamily="34" charset="-122"/>
+                <a:cs typeface="Calibri" pitchFamily="34" charset="-120"/>
+              </a:rPr>
+              <a:t>La base de datos lo rechaza</a:t>
+            </a:r>
+            <a:endParaRPr lang="en-US" sz="1350" dirty="0"/>
+          </a:p>
+        </p:txBody>
+      </p:sp>
+      <p:sp>
+        <p:nvSpPr>
+          <p:cNvPr id="15" name="Text 13"/>
+          <p:cNvSpPr txBox="1"/>
+          <p:nvPr/>
+        </p:nvSpPr>
+        <p:spPr>
+          <a:xfrm>
+            <a:off x="5120640" y="3730752"/>
+            <a:ext cx="6446520" cy="658368"/>
+          </a:xfrm>
+          <a:prstGeom prst="rect">
+            <a:avLst/>
+          </a:prstGeom>
+          <a:noFill/>
+          <a:ln/>
+        </p:spPr>
+        <p:txBody>
+          <a:bodyPr wrap="square" lIns="0" tIns="0" rIns="0" bIns="0" rtlCol="0" anchor="t"/>
+          <a:lstStyle/>
+          <a:p>
+            <a:pPr indent="0" marL="0">
+              <a:buNone/>
+            </a:pPr>
+            <a:r>
+              <a:rPr lang="en-US" sz="1200" dirty="0">
+                <a:solidFill>
+                  <a:srgbClr val="5D6B66"/>
+                </a:solidFill>
+                <a:latin typeface="Calibri" pitchFamily="34" charset="0"/>
+                <a:ea typeface="Calibri" pitchFamily="34" charset="-122"/>
+                <a:cs typeface="Calibri" pitchFamily="34" charset="-120"/>
+              </a:rPr>
+              <a:t>uk_agenda (veterinario_id, fecha_hora) devuelve el error 1062: Duplicate entry.</a:t>
+            </a:r>
+            <a:endParaRPr lang="en-US" sz="1200" dirty="0"/>
+          </a:p>
+        </p:txBody>
+      </p:sp>
+      <p:sp>
+        <p:nvSpPr>
+          <p:cNvPr id="16" name="Shape 14"/>
+          <p:cNvSpPr/>
+          <p:nvPr/>
+        </p:nvSpPr>
+        <p:spPr>
+          <a:xfrm>
+            <a:off x="640080" y="4791456"/>
+            <a:ext cx="402336" cy="402336"/>
+          </a:xfrm>
+          <a:prstGeom prst="ellipse">
+            <a:avLst/>
+          </a:prstGeom>
+          <a:solidFill>
+            <a:srgbClr val="E8A33D"/>
+          </a:solidFill>
+          <a:ln w="12700">
+            <a:solidFill>
+              <a:srgbClr val="E8A33D"/>
+            </a:solidFill>
+            <a:prstDash val="solid"/>
+          </a:ln>
+        </p:spPr>
+      </p:sp>
+      <p:sp>
+        <p:nvSpPr>
+          <p:cNvPr id="17" name="Text 15"/>
+          <p:cNvSpPr txBox="1"/>
+          <p:nvPr/>
+        </p:nvSpPr>
+        <p:spPr>
+          <a:xfrm>
+            <a:off x="640080" y="4791456"/>
+            <a:ext cx="402336" cy="402336"/>
+          </a:xfrm>
+          <a:prstGeom prst="rect">
+            <a:avLst/>
+          </a:prstGeom>
+          <a:noFill/>
+          <a:ln/>
+        </p:spPr>
+        <p:txBody>
+          <a:bodyPr wrap="square" lIns="0" tIns="0" rIns="0" bIns="0" rtlCol="0" anchor="ctr"/>
+          <a:lstStyle/>
+          <a:p>
+            <a:pPr algn="ctr" indent="0" marL="0">
+              <a:buNone/>
+            </a:pPr>
+            <a:r>
+              <a:rPr lang="en-US" sz="1300" b="1" dirty="0">
+                <a:solidFill>
+                  <a:srgbClr val="14524A"/>
+                </a:solidFill>
+                <a:latin typeface="Calibri" pitchFamily="34" charset="0"/>
+                <a:ea typeface="Calibri" pitchFamily="34" charset="-122"/>
+                <a:cs typeface="Calibri" pitchFamily="34" charset="-120"/>
+              </a:rPr>
+              <a:t>4</a:t>
+            </a:r>
+            <a:endParaRPr lang="en-US" sz="1300" dirty="0"/>
+          </a:p>
+        </p:txBody>
+      </p:sp>
+      <p:sp>
+        <p:nvSpPr>
+          <p:cNvPr id="18" name="Text 16"/>
+          <p:cNvSpPr txBox="1"/>
+          <p:nvPr/>
+        </p:nvSpPr>
+        <p:spPr>
+          <a:xfrm>
+            <a:off x="1225296" y="4718304"/>
+            <a:ext cx="3749040" cy="310896"/>
+          </a:xfrm>
+          <a:prstGeom prst="rect">
+            <a:avLst/>
+          </a:prstGeom>
+          <a:noFill/>
+          <a:ln/>
+        </p:spPr>
+        <p:txBody>
+          <a:bodyPr wrap="square" lIns="0" tIns="0" rIns="0" bIns="0" rtlCol="0" anchor="ctr"/>
+          <a:lstStyle/>
+          <a:p>
+            <a:pPr indent="0" marL="0">
+              <a:buNone/>
+            </a:pPr>
+            <a:r>
+              <a:rPr lang="en-US" sz="1350" b="1" dirty="0">
+                <a:solidFill>
+                  <a:srgbClr val="14524A"/>
+                </a:solidFill>
+                <a:latin typeface="Calibri" pitchFamily="34" charset="0"/>
+                <a:ea typeface="Calibri" pitchFamily="34" charset="-122"/>
+                <a:cs typeface="Calibri" pitchFamily="34" charset="-120"/>
+              </a:rPr>
+              <a:t>La aplicación reacciona</a:t>
+            </a:r>
+            <a:endParaRPr lang="en-US" sz="1350" dirty="0"/>
+          </a:p>
+        </p:txBody>
+      </p:sp>
+      <p:sp>
+        <p:nvSpPr>
+          <p:cNvPr id="19" name="Text 17"/>
+          <p:cNvSpPr txBox="1"/>
+          <p:nvPr/>
+        </p:nvSpPr>
+        <p:spPr>
+          <a:xfrm>
+            <a:off x="5120640" y="4700016"/>
+            <a:ext cx="6446520" cy="658368"/>
+          </a:xfrm>
+          <a:prstGeom prst="rect">
+            <a:avLst/>
+          </a:prstGeom>
+          <a:noFill/>
+          <a:ln/>
+        </p:spPr>
+        <p:txBody>
+          <a:bodyPr wrap="square" lIns="0" tIns="0" rIns="0" bIns="0" rtlCol="0" anchor="t"/>
+          <a:lstStyle/>
+          <a:p>
+            <a:pPr indent="0" marL="0">
+              <a:buNone/>
+            </a:pPr>
+            <a:r>
+              <a:rPr lang="en-US" sz="1200" dirty="0">
+                <a:solidFill>
+                  <a:srgbClr val="5D6B66"/>
+                </a:solidFill>
+                <a:latin typeface="Calibri" pitchFamily="34" charset="0"/>
+                <a:ea typeface="Calibri" pitchFamily="34" charset="-122"/>
+                <a:cs typeface="Calibri" pitchFamily="34" charset="-120"/>
+              </a:rPr>
+              <a:t>Captura el error, marca el bloque como no disponible y le ofrece a Marco el siguiente horario libre.</a:t>
+            </a:r>
+            <a:endParaRPr lang="en-US" sz="1200" dirty="0"/>
+          </a:p>
+        </p:txBody>
+      </p:sp>
+      <p:sp>
+        <p:nvSpPr>
+          <p:cNvPr id="20" name="Shape 18"/>
+          <p:cNvSpPr/>
+          <p:nvPr/>
+        </p:nvSpPr>
+        <p:spPr>
+          <a:xfrm>
+            <a:off x="640080" y="5742432"/>
+            <a:ext cx="10911535" cy="786384"/>
+          </a:xfrm>
+          <a:prstGeom prst="roundRect">
+            <a:avLst>
+              <a:gd name="adj" fmla="val 5814"/>
+            </a:avLst>
+          </a:prstGeom>
+          <a:solidFill>
+            <a:srgbClr val="14524A"/>
+          </a:solidFill>
+          <a:ln w="12700">
+            <a:solidFill>
+              <a:srgbClr val="14524A"/>
+            </a:solidFill>
+            <a:prstDash val="solid"/>
+          </a:ln>
+        </p:spPr>
+      </p:sp>
+      <p:sp>
+        <p:nvSpPr>
+          <p:cNvPr id="21" name="Text 19"/>
+          <p:cNvSpPr txBox="1"/>
+          <p:nvPr/>
+        </p:nvSpPr>
+        <p:spPr>
+          <a:xfrm>
+            <a:off x="950976" y="5742432"/>
+            <a:ext cx="10289743" cy="786384"/>
+          </a:xfrm>
+          <a:prstGeom prst="rect">
+            <a:avLst/>
+          </a:prstGeom>
+          <a:noFill/>
+          <a:ln/>
+        </p:spPr>
+        <p:txBody>
+          <a:bodyPr wrap="square" lIns="0" tIns="0" rIns="0" bIns="0" rtlCol="0" anchor="ctr"/>
+          <a:lstStyle/>
+          <a:p>
+            <a:pPr indent="0" marL="0">
+              <a:buNone/>
+            </a:pPr>
+            <a:r>
+              <a:rPr lang="en-US" sz="1250" b="1" dirty="0">
+                <a:solidFill>
+                  <a:srgbClr val="FFFFFF"/>
+                </a:solidFill>
+                <a:latin typeface="Calibri" pitchFamily="34" charset="0"/>
+                <a:ea typeface="Calibri" pitchFamily="34" charset="-122"/>
+                <a:cs typeface="Calibri" pitchFamily="34" charset="-120"/>
+              </a:rPr>
+              <a:t>Un «if» en la aplicación no habría bastado: entre la comprobación y el guardado caben las dos reservas. La restricción UNIQUE resuelve el empate dentro del motor.</a:t>
+            </a:r>
+            <a:endParaRPr lang="en-US" sz="1250" dirty="0"/>
+          </a:p>
+        </p:txBody>
+      </p:sp>
+    </p:spTree>
+  </p:cSld>
+  <p:clrMapOvr>
+    <a:masterClrMapping/>
+  </p:clrMapOvr>
+</p:sld>
+</file>
+
+<file path=ppt/slides/slide19.xml><?xml version="1.0" encoding="utf-8"?>
+<p:sld xmlns:a="http://schemas.openxmlformats.org/drawingml/2006/main" xmlns:r="http://schemas.openxmlformats.org/officeDocument/2006/relationships" xmlns:p="http://schemas.openxmlformats.org/presentationml/2006/main">
+  <p:cSld name="Slide 19">
+    <p:spTree>
+      <p:nvGrpSpPr>
+        <p:cNvPr id="1" name=""/>
+        <p:cNvGrpSpPr/>
+        <p:nvPr/>
+      </p:nvGrpSpPr>
+      <p:grpSpPr>
+        <a:xfrm>
+          <a:off x="0" y="0"/>
+          <a:ext cx="0" cy="0"/>
+          <a:chOff x="0" y="0"/>
+          <a:chExt cx="0" cy="0"/>
+        </a:xfrm>
+      </p:grpSpPr>
+      <p:sp>
+        <p:nvSpPr>
+          <p:cNvPr id="2" name="Text 0"/>
+          <p:cNvSpPr txBox="1"/>
+          <p:nvPr/>
+        </p:nvSpPr>
+        <p:spPr>
+          <a:xfrm>
+            <a:off x="640080" y="384048"/>
+            <a:ext cx="10911535" cy="658368"/>
+          </a:xfrm>
+          <a:prstGeom prst="rect">
+            <a:avLst/>
+          </a:prstGeom>
+          <a:noFill/>
+          <a:ln/>
+        </p:spPr>
+        <p:txBody>
+          <a:bodyPr wrap="square" lIns="0" tIns="0" rIns="0" bIns="0" rtlCol="0" anchor="ctr"/>
+          <a:lstStyle/>
+          <a:p>
+            <a:pPr indent="0" marL="0">
+              <a:buNone/>
+            </a:pPr>
+            <a:r>
+              <a:rPr lang="en-US" sz="3400" b="1" dirty="0">
+                <a:solidFill>
+                  <a:srgbClr val="14524A"/>
+                </a:solidFill>
+                <a:latin typeface="Cambria" pitchFamily="34" charset="0"/>
+                <a:ea typeface="Cambria" pitchFamily="34" charset="-122"/>
+                <a:cs typeface="Cambria" pitchFamily="34" charset="-120"/>
+              </a:rPr>
+              <a:t>Por qué las bajamos a la base de datos</a:t>
+            </a:r>
+            <a:endParaRPr lang="en-US" sz="3400" dirty="0"/>
+          </a:p>
+        </p:txBody>
+      </p:sp>
+      <p:sp>
+        <p:nvSpPr>
+          <p:cNvPr id="3" name="Text 1"/>
+          <p:cNvSpPr txBox="1"/>
+          <p:nvPr/>
+        </p:nvSpPr>
+        <p:spPr>
+          <a:xfrm>
+            <a:off x="640080" y="1042416"/>
+            <a:ext cx="10911535" cy="384048"/>
+          </a:xfrm>
+          <a:prstGeom prst="rect">
+            <a:avLst/>
+          </a:prstGeom>
+          <a:noFill/>
+          <a:ln/>
+        </p:spPr>
+        <p:txBody>
+          <a:bodyPr wrap="square" lIns="0" tIns="0" rIns="0" bIns="0" rtlCol="0" anchor="ctr"/>
+          <a:lstStyle/>
+          <a:p>
+            <a:pPr indent="0" marL="0">
+              <a:buNone/>
+            </a:pPr>
+            <a:r>
+              <a:rPr lang="en-US" sz="1400" dirty="0">
+                <a:solidFill>
+                  <a:srgbClr val="5D6B66"/>
+                </a:solidFill>
+                <a:latin typeface="Calibri" pitchFamily="34" charset="0"/>
+                <a:ea typeface="Calibri" pitchFamily="34" charset="-122"/>
+                <a:cs typeface="Calibri" pitchFamily="34" charset="-120"/>
+              </a:rPr>
+              <a:t>Tres razones por las que una regla no se queda solo en el código de la aplicación</a:t>
+            </a:r>
+            <a:endParaRPr lang="en-US" sz="1400" dirty="0"/>
+          </a:p>
+        </p:txBody>
+      </p:sp>
+      <p:sp>
+        <p:nvSpPr>
+          <p:cNvPr id="4" name="Shape 2"/>
+          <p:cNvSpPr/>
+          <p:nvPr/>
+        </p:nvSpPr>
+        <p:spPr>
+          <a:xfrm>
+            <a:off x="640080" y="1773936"/>
+            <a:ext cx="3417722" cy="3621024"/>
+          </a:xfrm>
+          <a:prstGeom prst="roundRect">
+            <a:avLst>
+              <a:gd name="adj" fmla="val 1338"/>
+            </a:avLst>
+          </a:prstGeom>
+          <a:solidFill>
+            <a:srgbClr val="EEF5F1"/>
+          </a:solidFill>
+          <a:ln w="12700">
+            <a:solidFill>
+              <a:srgbClr val="D9E5DF"/>
+            </a:solidFill>
+            <a:prstDash val="solid"/>
+          </a:ln>
+        </p:spPr>
+      </p:sp>
+      <p:sp>
+        <p:nvSpPr>
+          <p:cNvPr id="5" name="Text 3"/>
+          <p:cNvSpPr txBox="1"/>
+          <p:nvPr/>
+        </p:nvSpPr>
+        <p:spPr>
+          <a:xfrm>
+            <a:off x="914400" y="1956816"/>
+            <a:ext cx="2869082" cy="1078992"/>
+          </a:xfrm>
+          <a:prstGeom prst="rect">
+            <a:avLst/>
+          </a:prstGeom>
+          <a:noFill/>
+          <a:ln/>
+        </p:spPr>
+        <p:txBody>
+          <a:bodyPr wrap="square" lIns="0" tIns="0" rIns="0" bIns="0" rtlCol="0" anchor="ctr"/>
+          <a:lstStyle/>
+          <a:p>
+            <a:pPr indent="0" marL="0">
+              <a:buNone/>
+            </a:pPr>
+            <a:r>
+              <a:rPr lang="en-US" sz="6000" b="1" dirty="0">
+                <a:solidFill>
+                  <a:srgbClr val="E8A33D"/>
+                </a:solidFill>
+                <a:latin typeface="Cambria" pitchFamily="34" charset="0"/>
+                <a:ea typeface="Cambria" pitchFamily="34" charset="-122"/>
+                <a:cs typeface="Cambria" pitchFamily="34" charset="-120"/>
+              </a:rPr>
+              <a:t>01</a:t>
+            </a:r>
+            <a:endParaRPr lang="en-US" sz="6000" dirty="0"/>
+          </a:p>
+        </p:txBody>
+      </p:sp>
+      <p:sp>
+        <p:nvSpPr>
+          <p:cNvPr id="6" name="Text 4"/>
+          <p:cNvSpPr txBox="1"/>
+          <p:nvPr/>
+        </p:nvSpPr>
+        <p:spPr>
+          <a:xfrm>
+            <a:off x="914400" y="3072384"/>
+            <a:ext cx="2869082" cy="768096"/>
+          </a:xfrm>
+          <a:prstGeom prst="rect">
+            <a:avLst/>
+          </a:prstGeom>
+          <a:noFill/>
+          <a:ln/>
+        </p:spPr>
+        <p:txBody>
+          <a:bodyPr wrap="square" lIns="0" tIns="0" rIns="0" bIns="0" rtlCol="0" anchor="t"/>
+          <a:lstStyle/>
+          <a:p>
+            <a:pPr indent="0" marL="0">
+              <a:buNone/>
+            </a:pPr>
+            <a:r>
+              <a:rPr lang="en-US" sz="1900" b="1" dirty="0">
+                <a:solidFill>
+                  <a:srgbClr val="14524A"/>
+                </a:solidFill>
+                <a:latin typeface="Cambria" pitchFamily="34" charset="0"/>
+                <a:ea typeface="Cambria" pitchFamily="34" charset="-122"/>
+                <a:cs typeface="Cambria" pitchFamily="34" charset="-120"/>
+              </a:rPr>
+              <a:t>La app no es la única puerta</a:t>
+            </a:r>
+            <a:endParaRPr lang="en-US" sz="1900" dirty="0"/>
+          </a:p>
+        </p:txBody>
+      </p:sp>
+      <p:sp>
+        <p:nvSpPr>
+          <p:cNvPr id="7" name="Text 5"/>
+          <p:cNvSpPr txBox="1"/>
+          <p:nvPr/>
+        </p:nvSpPr>
+        <p:spPr>
+          <a:xfrm>
+            <a:off x="914400" y="3877056"/>
+            <a:ext cx="2869082" cy="1371600"/>
+          </a:xfrm>
+          <a:prstGeom prst="rect">
+            <a:avLst/>
+          </a:prstGeom>
+          <a:noFill/>
+          <a:ln/>
+        </p:spPr>
+        <p:txBody>
+          <a:bodyPr wrap="square" lIns="0" tIns="0" rIns="0" bIns="0" rtlCol="0" anchor="t"/>
+          <a:lstStyle/>
+          <a:p>
+            <a:pPr indent="0" marL="0">
+              <a:buNone/>
+            </a:pPr>
+            <a:r>
+              <a:rPr lang="en-US" sz="1200" dirty="0">
+                <a:solidFill>
+                  <a:srgbClr val="5D6B66"/>
+                </a:solidFill>
+                <a:latin typeface="Calibri" pitchFamily="34" charset="0"/>
+                <a:ea typeface="Calibri" pitchFamily="34" charset="-122"/>
+                <a:cs typeface="Calibri" pitchFamily="34" charset="-120"/>
+              </a:rPr>
+              <a:t>Un script de carga, una consulta manual o una segunda aplicación escriben directo en la tabla. La restricción del motor no se puede rodear por ningún camino.</a:t>
+            </a:r>
+            <a:endParaRPr lang="en-US" sz="1200" dirty="0"/>
+          </a:p>
+        </p:txBody>
+      </p:sp>
+      <p:sp>
+        <p:nvSpPr>
+          <p:cNvPr id="8" name="Shape 6"/>
+          <p:cNvSpPr/>
+          <p:nvPr/>
+        </p:nvSpPr>
+        <p:spPr>
+          <a:xfrm>
+            <a:off x="4386986" y="1773936"/>
+            <a:ext cx="3417722" cy="3621024"/>
+          </a:xfrm>
+          <a:prstGeom prst="roundRect">
+            <a:avLst>
+              <a:gd name="adj" fmla="val 1338"/>
+            </a:avLst>
+          </a:prstGeom>
+          <a:solidFill>
+            <a:srgbClr val="EEF5F1"/>
+          </a:solidFill>
+          <a:ln w="12700">
+            <a:solidFill>
+              <a:srgbClr val="D9E5DF"/>
+            </a:solidFill>
+            <a:prstDash val="solid"/>
+          </a:ln>
+        </p:spPr>
+      </p:sp>
+      <p:sp>
+        <p:nvSpPr>
+          <p:cNvPr id="9" name="Text 7"/>
+          <p:cNvSpPr txBox="1"/>
+          <p:nvPr/>
+        </p:nvSpPr>
+        <p:spPr>
+          <a:xfrm>
+            <a:off x="4661306" y="1956816"/>
+            <a:ext cx="2869082" cy="1078992"/>
+          </a:xfrm>
+          <a:prstGeom prst="rect">
+            <a:avLst/>
+          </a:prstGeom>
+          <a:noFill/>
+          <a:ln/>
+        </p:spPr>
+        <p:txBody>
+          <a:bodyPr wrap="square" lIns="0" tIns="0" rIns="0" bIns="0" rtlCol="0" anchor="ctr"/>
+          <a:lstStyle/>
+          <a:p>
+            <a:pPr indent="0" marL="0">
+              <a:buNone/>
+            </a:pPr>
+            <a:r>
+              <a:rPr lang="en-US" sz="6000" b="1" dirty="0">
+                <a:solidFill>
+                  <a:srgbClr val="E8A33D"/>
+                </a:solidFill>
+                <a:latin typeface="Cambria" pitchFamily="34" charset="0"/>
+                <a:ea typeface="Cambria" pitchFamily="34" charset="-122"/>
+                <a:cs typeface="Cambria" pitchFamily="34" charset="-120"/>
+              </a:rPr>
+              <a:t>02</a:t>
+            </a:r>
+            <a:endParaRPr lang="en-US" sz="6000" dirty="0"/>
+          </a:p>
+        </p:txBody>
+      </p:sp>
+      <p:sp>
+        <p:nvSpPr>
+          <p:cNvPr id="10" name="Text 8"/>
+          <p:cNvSpPr txBox="1"/>
+          <p:nvPr/>
+        </p:nvSpPr>
+        <p:spPr>
+          <a:xfrm>
+            <a:off x="4661306" y="3072384"/>
+            <a:ext cx="2869082" cy="768096"/>
+          </a:xfrm>
+          <a:prstGeom prst="rect">
+            <a:avLst/>
+          </a:prstGeom>
+          <a:noFill/>
+          <a:ln/>
+        </p:spPr>
+        <p:txBody>
+          <a:bodyPr wrap="square" lIns="0" tIns="0" rIns="0" bIns="0" rtlCol="0" anchor="t"/>
+          <a:lstStyle/>
+          <a:p>
+            <a:pPr indent="0" marL="0">
+              <a:buNone/>
+            </a:pPr>
+            <a:r>
+              <a:rPr lang="en-US" sz="1900" b="1" dirty="0">
+                <a:solidFill>
+                  <a:srgbClr val="14524A"/>
+                </a:solidFill>
+                <a:latin typeface="Cambria" pitchFamily="34" charset="0"/>
+                <a:ea typeface="Cambria" pitchFamily="34" charset="-122"/>
+                <a:cs typeface="Cambria" pitchFamily="34" charset="-120"/>
+              </a:rPr>
+              <a:t>La concurrencia no perdona</a:t>
+            </a:r>
+            <a:endParaRPr lang="en-US" sz="1900" dirty="0"/>
+          </a:p>
+        </p:txBody>
+      </p:sp>
+      <p:sp>
+        <p:nvSpPr>
+          <p:cNvPr id="11" name="Text 9"/>
+          <p:cNvSpPr txBox="1"/>
+          <p:nvPr/>
+        </p:nvSpPr>
+        <p:spPr>
+          <a:xfrm>
+            <a:off x="4661306" y="3877056"/>
+            <a:ext cx="2869082" cy="1371600"/>
+          </a:xfrm>
+          <a:prstGeom prst="rect">
+            <a:avLst/>
+          </a:prstGeom>
+          <a:noFill/>
+          <a:ln/>
+        </p:spPr>
+        <p:txBody>
+          <a:bodyPr wrap="square" lIns="0" tIns="0" rIns="0" bIns="0" rtlCol="0" anchor="t"/>
+          <a:lstStyle/>
+          <a:p>
+            <a:pPr indent="0" marL="0">
+              <a:buNone/>
+            </a:pPr>
+            <a:r>
+              <a:rPr lang="en-US" sz="1200" dirty="0">
+                <a:solidFill>
+                  <a:srgbClr val="5D6B66"/>
+                </a:solidFill>
+                <a:latin typeface="Calibri" pitchFamily="34" charset="0"/>
+                <a:ea typeface="Calibri" pitchFamily="34" charset="-122"/>
+                <a:cs typeface="Calibri" pitchFamily="34" charset="-120"/>
+              </a:rPr>
+              <a:t>Dos usuarios simultáneos pueden pasar ambos por el mismo «if» antes de que cualquiera guarde. UNIQUE y FOR UPDATE deciden el empate; una comprobación en memoria, no.</a:t>
+            </a:r>
+            <a:endParaRPr lang="en-US" sz="1200" dirty="0"/>
+          </a:p>
+        </p:txBody>
+      </p:sp>
+      <p:sp>
+        <p:nvSpPr>
+          <p:cNvPr id="12" name="Shape 10"/>
+          <p:cNvSpPr/>
+          <p:nvPr/>
+        </p:nvSpPr>
+        <p:spPr>
+          <a:xfrm>
+            <a:off x="8133893" y="1773936"/>
+            <a:ext cx="3417722" cy="3621024"/>
+          </a:xfrm>
+          <a:prstGeom prst="roundRect">
+            <a:avLst>
+              <a:gd name="adj" fmla="val 1338"/>
+            </a:avLst>
+          </a:prstGeom>
+          <a:solidFill>
+            <a:srgbClr val="14524A"/>
+          </a:solidFill>
+          <a:ln w="12700">
+            <a:solidFill>
+              <a:srgbClr val="14524A"/>
+            </a:solidFill>
+            <a:prstDash val="solid"/>
+          </a:ln>
+        </p:spPr>
+      </p:sp>
+      <p:sp>
+        <p:nvSpPr>
+          <p:cNvPr id="13" name="Text 11"/>
+          <p:cNvSpPr txBox="1"/>
+          <p:nvPr/>
+        </p:nvSpPr>
+        <p:spPr>
+          <a:xfrm>
+            <a:off x="8408213" y="1956816"/>
+            <a:ext cx="2869082" cy="1078992"/>
+          </a:xfrm>
+          <a:prstGeom prst="rect">
+            <a:avLst/>
+          </a:prstGeom>
+          <a:noFill/>
+          <a:ln/>
+        </p:spPr>
+        <p:txBody>
+          <a:bodyPr wrap="square" lIns="0" tIns="0" rIns="0" bIns="0" rtlCol="0" anchor="ctr"/>
+          <a:lstStyle/>
+          <a:p>
+            <a:pPr indent="0" marL="0">
+              <a:buNone/>
+            </a:pPr>
+            <a:r>
+              <a:rPr lang="en-US" sz="6000" b="1" dirty="0">
+                <a:solidFill>
+                  <a:srgbClr val="E8A33D"/>
+                </a:solidFill>
+                <a:latin typeface="Cambria" pitchFamily="34" charset="0"/>
+                <a:ea typeface="Cambria" pitchFamily="34" charset="-122"/>
+                <a:cs typeface="Cambria" pitchFamily="34" charset="-120"/>
+              </a:rPr>
+              <a:t>03</a:t>
+            </a:r>
+            <a:endParaRPr lang="en-US" sz="6000" dirty="0"/>
+          </a:p>
+        </p:txBody>
+      </p:sp>
+      <p:sp>
+        <p:nvSpPr>
+          <p:cNvPr id="14" name="Text 12"/>
+          <p:cNvSpPr txBox="1"/>
+          <p:nvPr/>
+        </p:nvSpPr>
+        <p:spPr>
+          <a:xfrm>
+            <a:off x="8408213" y="3072384"/>
+            <a:ext cx="2869082" cy="768096"/>
+          </a:xfrm>
+          <a:prstGeom prst="rect">
+            <a:avLst/>
+          </a:prstGeom>
+          <a:noFill/>
+          <a:ln/>
+        </p:spPr>
+        <p:txBody>
+          <a:bodyPr wrap="square" lIns="0" tIns="0" rIns="0" bIns="0" rtlCol="0" anchor="t"/>
+          <a:lstStyle/>
+          <a:p>
+            <a:pPr indent="0" marL="0">
+              <a:buNone/>
+            </a:pPr>
+            <a:r>
+              <a:rPr lang="en-US" sz="1900" b="1" dirty="0">
+                <a:solidFill>
+                  <a:srgbClr val="FFFFFF"/>
+                </a:solidFill>
+                <a:latin typeface="Cambria" pitchFamily="34" charset="0"/>
+                <a:ea typeface="Cambria" pitchFamily="34" charset="-122"/>
+                <a:cs typeface="Cambria" pitchFamily="34" charset="-120"/>
+              </a:rPr>
+              <a:t>La regla queda documentada</a:t>
+            </a:r>
+            <a:endParaRPr lang="en-US" sz="1900" dirty="0"/>
+          </a:p>
+        </p:txBody>
+      </p:sp>
+      <p:sp>
+        <p:nvSpPr>
+          <p:cNvPr id="15" name="Text 13"/>
+          <p:cNvSpPr txBox="1"/>
+          <p:nvPr/>
+        </p:nvSpPr>
+        <p:spPr>
+          <a:xfrm>
+            <a:off x="8408213" y="3877056"/>
+            <a:ext cx="2869082" cy="1371600"/>
+          </a:xfrm>
+          <a:prstGeom prst="rect">
+            <a:avLst/>
+          </a:prstGeom>
+          <a:noFill/>
+          <a:ln/>
+        </p:spPr>
+        <p:txBody>
+          <a:bodyPr wrap="square" lIns="0" tIns="0" rIns="0" bIns="0" rtlCol="0" anchor="t"/>
+          <a:lstStyle/>
+          <a:p>
+            <a:pPr indent="0" marL="0">
+              <a:buNone/>
+            </a:pPr>
+            <a:r>
+              <a:rPr lang="en-US" sz="1200" dirty="0">
                 <a:solidFill>
                   <a:srgbClr val="CFE3DC"/>
                 </a:solidFill>
@@ -5106,216 +8771,48 @@
                 <a:ea typeface="Calibri" pitchFamily="34" charset="-122"/>
                 <a:cs typeface="Calibri" pitchFamily="34" charset="-120"/>
               </a:rPr>
-              <a:t>capas donde</a:t>
-            </a:r>
-            <a:endParaRPr lang="en-US" sz="1300" dirty="0"/>
-          </a:p>
-          <a:p>
-            <a:pPr algn="ctr" indent="0" marL="0">
-              <a:lnSpc>
-                <a:spcPts val="1800"/>
-              </a:lnSpc>
-              <a:buNone/>
-            </a:pPr>
-            <a:r>
-              <a:rPr lang="en-US" sz="1300" dirty="0">
-                <a:solidFill>
-                  <a:srgbClr val="CFE3DC"/>
-                </a:solidFill>
-                <a:latin typeface="Calibri" pitchFamily="34" charset="0"/>
-                <a:ea typeface="Calibri" pitchFamily="34" charset="-122"/>
-                <a:cs typeface="Calibri" pitchFamily="34" charset="-120"/>
-              </a:rPr>
-              <a:t>se aplican</a:t>
-            </a:r>
-            <a:endParaRPr lang="en-US" sz="1300" dirty="0"/>
-          </a:p>
-        </p:txBody>
-      </p:sp>
-      <p:sp>
-        <p:nvSpPr>
-          <p:cNvPr id="12" name="Text 10"/>
-          <p:cNvSpPr txBox="1"/>
-          <p:nvPr/>
-        </p:nvSpPr>
-        <p:spPr>
-          <a:xfrm>
-            <a:off x="640080" y="4626864"/>
-            <a:ext cx="10911535" cy="365760"/>
-          </a:xfrm>
-          <a:prstGeom prst="rect">
-            <a:avLst/>
-          </a:prstGeom>
-          <a:noFill/>
-          <a:ln/>
-        </p:spPr>
-        <p:txBody>
-          <a:bodyPr wrap="square" lIns="0" tIns="0" rIns="0" bIns="0" rtlCol="0" anchor="ctr"/>
-          <a:lstStyle/>
-          <a:p>
-            <a:pPr indent="0" marL="0">
-              <a:buNone/>
-            </a:pPr>
-            <a:r>
-              <a:rPr lang="en-US" sz="1400" b="1" dirty="0">
-                <a:solidFill>
-                  <a:srgbClr val="E8A33D"/>
-                </a:solidFill>
-                <a:latin typeface="Calibri" pitchFamily="34" charset="0"/>
-                <a:ea typeface="Calibri" pitchFamily="34" charset="-122"/>
-                <a:cs typeface="Calibri" pitchFamily="34" charset="-120"/>
-              </a:rPr>
-              <a:t>Las tres que más pesan</a:t>
-            </a:r>
-            <a:endParaRPr lang="en-US" sz="1400" dirty="0"/>
-          </a:p>
-        </p:txBody>
-      </p:sp>
-      <p:sp>
-        <p:nvSpPr>
-          <p:cNvPr id="13" name="Text 11"/>
-          <p:cNvSpPr txBox="1"/>
-          <p:nvPr/>
-        </p:nvSpPr>
-        <p:spPr>
-          <a:xfrm>
-            <a:off x="640080" y="4992624"/>
-            <a:ext cx="10911535" cy="457200"/>
-          </a:xfrm>
-          <a:prstGeom prst="rect">
-            <a:avLst/>
-          </a:prstGeom>
-          <a:noFill/>
-          <a:ln/>
-        </p:spPr>
-        <p:txBody>
-          <a:bodyPr wrap="square" lIns="0" tIns="0" rIns="0" bIns="0" rtlCol="0" anchor="ctr"/>
-          <a:lstStyle/>
-          <a:p>
-            <a:pPr indent="0" marL="0">
-              <a:buNone/>
-            </a:pPr>
-            <a:r>
-              <a:rPr lang="en-US" sz="1300" b="1" dirty="0">
-                <a:solidFill>
-                  <a:srgbClr val="FFFFFF"/>
-                </a:solidFill>
-                <a:latin typeface="Courier New" pitchFamily="34" charset="0"/>
-                <a:ea typeface="Courier New" pitchFamily="34" charset="-122"/>
-                <a:cs typeface="Courier New" pitchFamily="34" charset="-120"/>
-              </a:rPr>
-              <a:t xml:space="preserve">RN-07  </a:t>
-            </a:r>
-            <a:pPr indent="0" marL="0">
-              <a:buNone/>
-            </a:pPr>
-            <a:r>
-              <a:rPr lang="en-US" sz="1300" dirty="0">
-                <a:solidFill>
-                  <a:srgbClr val="CFE3DC"/>
-                </a:solidFill>
-                <a:latin typeface="Calibri" pitchFamily="34" charset="0"/>
-                <a:ea typeface="Calibri" pitchFamily="34" charset="-122"/>
-                <a:cs typeface="Calibri" pitchFamily="34" charset="-120"/>
-              </a:rPr>
-              <a:t xml:space="preserve">el inventario nunca queda en negativo    </a:t>
-            </a:r>
-            <a:pPr indent="0" marL="0">
-              <a:buNone/>
-            </a:pPr>
-            <a:r>
-              <a:rPr lang="en-US" sz="1300" b="1" dirty="0">
-                <a:solidFill>
-                  <a:srgbClr val="FFFFFF"/>
-                </a:solidFill>
-                <a:latin typeface="Courier New" pitchFamily="34" charset="0"/>
-                <a:ea typeface="Courier New" pitchFamily="34" charset="-122"/>
-                <a:cs typeface="Courier New" pitchFamily="34" charset="-120"/>
-              </a:rPr>
-              <a:t xml:space="preserve">RN-12  </a:t>
-            </a:r>
-            <a:pPr indent="0" marL="0">
-              <a:buNone/>
-            </a:pPr>
-            <a:r>
-              <a:rPr lang="en-US" sz="1300" dirty="0">
-                <a:solidFill>
-                  <a:srgbClr val="CFE3DC"/>
-                </a:solidFill>
-                <a:latin typeface="Calibri" pitchFamily="34" charset="0"/>
-                <a:ea typeface="Calibri" pitchFamily="34" charset="-122"/>
-                <a:cs typeface="Calibri" pitchFamily="34" charset="-120"/>
-              </a:rPr>
-              <a:t xml:space="preserve">sin stock no hay pedido    </a:t>
-            </a:r>
-            <a:pPr indent="0" marL="0">
-              <a:buNone/>
-            </a:pPr>
-            <a:r>
-              <a:rPr lang="en-US" sz="1300" b="1" dirty="0">
-                <a:solidFill>
-                  <a:srgbClr val="FFFFFF"/>
-                </a:solidFill>
-                <a:latin typeface="Courier New" pitchFamily="34" charset="0"/>
-                <a:ea typeface="Courier New" pitchFamily="34" charset="-122"/>
-                <a:cs typeface="Courier New" pitchFamily="34" charset="-120"/>
-              </a:rPr>
-              <a:t xml:space="preserve">RN-17  </a:t>
-            </a:r>
-            <a:pPr indent="0" marL="0">
-              <a:buNone/>
-            </a:pPr>
-            <a:r>
-              <a:rPr lang="en-US" sz="1300" dirty="0">
-                <a:solidFill>
-                  <a:srgbClr val="CFE3DC"/>
-                </a:solidFill>
-                <a:latin typeface="Calibri" pitchFamily="34" charset="0"/>
-                <a:ea typeface="Calibri" pitchFamily="34" charset="-122"/>
-                <a:cs typeface="Calibri" pitchFamily="34" charset="-120"/>
-              </a:rPr>
-              <a:t>un veterinario no se duplica en la agenda</a:t>
-            </a:r>
-            <a:endParaRPr lang="en-US" sz="1300" dirty="0"/>
-          </a:p>
-        </p:txBody>
-      </p:sp>
-      <p:sp>
-        <p:nvSpPr>
-          <p:cNvPr id="14" name="Text 12"/>
-          <p:cNvSpPr txBox="1"/>
-          <p:nvPr/>
-        </p:nvSpPr>
-        <p:spPr>
-          <a:xfrm>
-            <a:off x="640080" y="6035040"/>
-            <a:ext cx="10911535" cy="310896"/>
-          </a:xfrm>
-          <a:prstGeom prst="rect">
-            <a:avLst/>
-          </a:prstGeom>
-          <a:noFill/>
-          <a:ln/>
-        </p:spPr>
-        <p:txBody>
-          <a:bodyPr wrap="square" lIns="0" tIns="0" rIns="0" bIns="0" rtlCol="0" anchor="ctr"/>
-          <a:lstStyle/>
-          <a:p>
-            <a:pPr indent="0" marL="0">
-              <a:buNone/>
-            </a:pPr>
-            <a:r>
-              <a:rPr lang="en-US" sz="1100" i="1" dirty="0">
-                <a:solidFill>
-                  <a:srgbClr val="CFE3DC"/>
-                </a:solidFill>
-                <a:latin typeface="Calibri" pitchFamily="34" charset="0"/>
-                <a:ea typeface="Calibri" pitchFamily="34" charset="-122"/>
-                <a:cs typeface="Calibri" pitchFamily="34" charset="-120"/>
-              </a:rPr>
-              <a:t>Equipo 4  ·  Curso de E-business  ·  VetPet Surco E.I.R.L.  ·  Lima, 2026</a:t>
-            </a:r>
-            <a:endParaRPr lang="en-US" sz="1100" dirty="0"/>
+              <a:t>El esquema es la fuente de verdad: quien lea las tablas entiende la regla sin abrir una sola clase Java, y no puede quedar desactualizada respecto del código.</a:t>
+            </a:r>
+            <a:endParaRPr lang="en-US" sz="1200" dirty="0"/>
+          </a:p>
+        </p:txBody>
+      </p:sp>
+      <p:sp>
+        <p:nvSpPr>
+          <p:cNvPr id="16" name="Text 14"/>
+          <p:cNvSpPr txBox="1"/>
+          <p:nvPr/>
+        </p:nvSpPr>
+        <p:spPr>
+          <a:xfrm>
+            <a:off x="640080" y="6309360"/>
+            <a:ext cx="10911535" cy="292608"/>
+          </a:xfrm>
+          <a:prstGeom prst="rect">
+            <a:avLst/>
+          </a:prstGeom>
+          <a:noFill/>
+          <a:ln/>
+        </p:spPr>
+        <p:txBody>
+          <a:bodyPr wrap="square" lIns="0" tIns="0" rIns="0" bIns="0" rtlCol="0" anchor="ctr"/>
+          <a:lstStyle/>
+          <a:p>
+            <a:pPr indent="0" marL="0">
+              <a:buNone/>
+            </a:pPr>
+            <a:r>
+              <a:rPr lang="en-US" sz="1000" i="1" dirty="0">
+                <a:solidFill>
+                  <a:srgbClr val="5D6B66"/>
+                </a:solidFill>
+                <a:latin typeface="Calibri" pitchFamily="34" charset="0"/>
+                <a:ea typeface="Calibri" pitchFamily="34" charset="-122"/>
+                <a:cs typeface="Calibri" pitchFamily="34" charset="-120"/>
+              </a:rPr>
+              <a:t>La aplicación sigue validando: no para sustituir a la base de datos, sino para dar al usuario un mensaje claro antes de intentarlo.</a:t>
+            </a:r>
+            <a:endParaRPr lang="en-US" sz="1000" dirty="0"/>
           </a:p>
         </p:txBody>
       </p:sp>
@@ -6301,6 +9798,707 @@
 </p:sld>
 </file>
 
+<file path=ppt/slides/slide20.xml><?xml version="1.0" encoding="utf-8"?>
+<p:sld xmlns:a="http://schemas.openxmlformats.org/drawingml/2006/main" xmlns:r="http://schemas.openxmlformats.org/officeDocument/2006/relationships" xmlns:p="http://schemas.openxmlformats.org/presentationml/2006/main">
+  <p:cSld name="Slide 20">
+    <p:bg>
+      <p:bgPr>
+        <a:solidFill>
+          <a:srgbClr val="14524A"/>
+        </a:solidFill>
+      </p:bgPr>
+    </p:bg>
+    <p:spTree>
+      <p:nvGrpSpPr>
+        <p:cNvPr id="1" name=""/>
+        <p:cNvGrpSpPr/>
+        <p:nvPr/>
+      </p:nvGrpSpPr>
+      <p:grpSpPr>
+        <a:xfrm>
+          <a:off x="0" y="0"/>
+          <a:ext cx="0" cy="0"/>
+          <a:chOff x="0" y="0"/>
+          <a:chExt cx="0" cy="0"/>
+        </a:xfrm>
+      </p:grpSpPr>
+      <p:sp>
+        <p:nvSpPr>
+          <p:cNvPr id="2" name="Text 0"/>
+          <p:cNvSpPr txBox="1"/>
+          <p:nvPr/>
+        </p:nvSpPr>
+        <p:spPr>
+          <a:xfrm>
+            <a:off x="640080" y="822960"/>
+            <a:ext cx="10911535" cy="731520"/>
+          </a:xfrm>
+          <a:prstGeom prst="rect">
+            <a:avLst/>
+          </a:prstGeom>
+          <a:noFill/>
+          <a:ln/>
+        </p:spPr>
+        <p:txBody>
+          <a:bodyPr wrap="square" lIns="0" tIns="0" rIns="0" bIns="0" rtlCol="0" anchor="ctr"/>
+          <a:lstStyle/>
+          <a:p>
+            <a:pPr indent="0" marL="0">
+              <a:buNone/>
+            </a:pPr>
+            <a:r>
+              <a:rPr lang="en-US" sz="3800" b="1" dirty="0">
+                <a:solidFill>
+                  <a:srgbClr val="FFFFFF"/>
+                </a:solidFill>
+                <a:latin typeface="Cambria" pitchFamily="34" charset="0"/>
+                <a:ea typeface="Cambria" pitchFamily="34" charset="-122"/>
+                <a:cs typeface="Cambria" pitchFamily="34" charset="-120"/>
+              </a:rPr>
+              <a:t>Lo que garantizan estas reglas</a:t>
+            </a:r>
+            <a:endParaRPr lang="en-US" sz="3800" dirty="0"/>
+          </a:p>
+        </p:txBody>
+      </p:sp>
+      <p:sp>
+        <p:nvSpPr>
+          <p:cNvPr id="3" name="Text 1"/>
+          <p:cNvSpPr txBox="1"/>
+          <p:nvPr/>
+        </p:nvSpPr>
+        <p:spPr>
+          <a:xfrm>
+            <a:off x="640080" y="1554480"/>
+            <a:ext cx="10911535" cy="365760"/>
+          </a:xfrm>
+          <a:prstGeom prst="rect">
+            <a:avLst/>
+          </a:prstGeom>
+          <a:noFill/>
+          <a:ln/>
+        </p:spPr>
+        <p:txBody>
+          <a:bodyPr wrap="square" lIns="0" tIns="0" rIns="0" bIns="0" rtlCol="0" anchor="ctr"/>
+          <a:lstStyle/>
+          <a:p>
+            <a:pPr indent="0" marL="0">
+              <a:buNone/>
+            </a:pPr>
+            <a:r>
+              <a:rPr lang="en-US" sz="1500" dirty="0">
+                <a:solidFill>
+                  <a:srgbClr val="CFE3DC"/>
+                </a:solidFill>
+                <a:latin typeface="Calibri" pitchFamily="34" charset="0"/>
+                <a:ea typeface="Calibri" pitchFamily="34" charset="-122"/>
+                <a:cs typeface="Calibri" pitchFamily="34" charset="-120"/>
+              </a:rPr>
+              <a:t>El negocio no depende de que alguien recuerde comprobar cada condición</a:t>
+            </a:r>
+            <a:endParaRPr lang="en-US" sz="1500" dirty="0"/>
+          </a:p>
+        </p:txBody>
+      </p:sp>
+      <p:sp>
+        <p:nvSpPr>
+          <p:cNvPr id="4" name="Text 2"/>
+          <p:cNvSpPr txBox="1"/>
+          <p:nvPr/>
+        </p:nvSpPr>
+        <p:spPr>
+          <a:xfrm>
+            <a:off x="640080" y="2395728"/>
+            <a:ext cx="2480996" cy="1097280"/>
+          </a:xfrm>
+          <a:prstGeom prst="rect">
+            <a:avLst/>
+          </a:prstGeom>
+          <a:noFill/>
+          <a:ln/>
+        </p:spPr>
+        <p:txBody>
+          <a:bodyPr wrap="square" lIns="0" tIns="0" rIns="0" bIns="0" rtlCol="0" anchor="ctr"/>
+          <a:lstStyle/>
+          <a:p>
+            <a:pPr algn="ctr" indent="0" marL="0">
+              <a:buNone/>
+            </a:pPr>
+            <a:r>
+              <a:rPr lang="en-US" sz="6600" b="1" dirty="0">
+                <a:solidFill>
+                  <a:srgbClr val="E8A33D"/>
+                </a:solidFill>
+                <a:latin typeface="Cambria" pitchFamily="34" charset="0"/>
+                <a:ea typeface="Cambria" pitchFamily="34" charset="-122"/>
+                <a:cs typeface="Cambria" pitchFamily="34" charset="-120"/>
+              </a:rPr>
+              <a:t>20</a:t>
+            </a:r>
+            <a:endParaRPr lang="en-US" sz="6600" dirty="0"/>
+          </a:p>
+        </p:txBody>
+      </p:sp>
+      <p:sp>
+        <p:nvSpPr>
+          <p:cNvPr id="5" name="Text 3"/>
+          <p:cNvSpPr txBox="1"/>
+          <p:nvPr/>
+        </p:nvSpPr>
+        <p:spPr>
+          <a:xfrm>
+            <a:off x="640080" y="3511296"/>
+            <a:ext cx="2480996" cy="731520"/>
+          </a:xfrm>
+          <a:prstGeom prst="rect">
+            <a:avLst/>
+          </a:prstGeom>
+          <a:noFill/>
+          <a:ln/>
+        </p:spPr>
+        <p:txBody>
+          <a:bodyPr wrap="square" lIns="0" tIns="0" rIns="0" bIns="0" rtlCol="0" anchor="t"/>
+          <a:lstStyle/>
+          <a:p>
+            <a:pPr algn="ctr" indent="0" marL="0">
+              <a:lnSpc>
+                <a:spcPts val="1800"/>
+              </a:lnSpc>
+              <a:buNone/>
+            </a:pPr>
+            <a:r>
+              <a:rPr lang="en-US" sz="1300" dirty="0">
+                <a:solidFill>
+                  <a:srgbClr val="CFE3DC"/>
+                </a:solidFill>
+                <a:latin typeface="Calibri" pitchFamily="34" charset="0"/>
+                <a:ea typeface="Calibri" pitchFamily="34" charset="-122"/>
+                <a:cs typeface="Calibri" pitchFamily="34" charset="-120"/>
+              </a:rPr>
+              <a:t>reglas</a:t>
+            </a:r>
+            <a:endParaRPr lang="en-US" sz="1300" dirty="0"/>
+          </a:p>
+          <a:p>
+            <a:pPr algn="ctr" indent="0" marL="0">
+              <a:lnSpc>
+                <a:spcPts val="1800"/>
+              </a:lnSpc>
+              <a:buNone/>
+            </a:pPr>
+            <a:r>
+              <a:rPr lang="en-US" sz="1300" dirty="0">
+                <a:solidFill>
+                  <a:srgbClr val="CFE3DC"/>
+                </a:solidFill>
+                <a:latin typeface="Calibri" pitchFamily="34" charset="0"/>
+                <a:ea typeface="Calibri" pitchFamily="34" charset="-122"/>
+                <a:cs typeface="Calibri" pitchFamily="34" charset="-120"/>
+              </a:rPr>
+              <a:t>identificadas</a:t>
+            </a:r>
+            <a:endParaRPr lang="en-US" sz="1300" dirty="0"/>
+          </a:p>
+        </p:txBody>
+      </p:sp>
+      <p:sp>
+        <p:nvSpPr>
+          <p:cNvPr id="6" name="Text 4"/>
+          <p:cNvSpPr txBox="1"/>
+          <p:nvPr/>
+        </p:nvSpPr>
+        <p:spPr>
+          <a:xfrm>
+            <a:off x="3450260" y="2395728"/>
+            <a:ext cx="2480996" cy="1097280"/>
+          </a:xfrm>
+          <a:prstGeom prst="rect">
+            <a:avLst/>
+          </a:prstGeom>
+          <a:noFill/>
+          <a:ln/>
+        </p:spPr>
+        <p:txBody>
+          <a:bodyPr wrap="square" lIns="0" tIns="0" rIns="0" bIns="0" rtlCol="0" anchor="ctr"/>
+          <a:lstStyle/>
+          <a:p>
+            <a:pPr algn="ctr" indent="0" marL="0">
+              <a:buNone/>
+            </a:pPr>
+            <a:r>
+              <a:rPr lang="en-US" sz="6600" b="1" dirty="0">
+                <a:solidFill>
+                  <a:srgbClr val="E8A33D"/>
+                </a:solidFill>
+                <a:latin typeface="Cambria" pitchFamily="34" charset="0"/>
+                <a:ea typeface="Cambria" pitchFamily="34" charset="-122"/>
+                <a:cs typeface="Cambria" pitchFamily="34" charset="-120"/>
+              </a:rPr>
+              <a:t>14</a:t>
+            </a:r>
+            <a:endParaRPr lang="en-US" sz="6600" dirty="0"/>
+          </a:p>
+        </p:txBody>
+      </p:sp>
+      <p:sp>
+        <p:nvSpPr>
+          <p:cNvPr id="7" name="Text 5"/>
+          <p:cNvSpPr txBox="1"/>
+          <p:nvPr/>
+        </p:nvSpPr>
+        <p:spPr>
+          <a:xfrm>
+            <a:off x="3450260" y="3511296"/>
+            <a:ext cx="2480996" cy="731520"/>
+          </a:xfrm>
+          <a:prstGeom prst="rect">
+            <a:avLst/>
+          </a:prstGeom>
+          <a:noFill/>
+          <a:ln/>
+        </p:spPr>
+        <p:txBody>
+          <a:bodyPr wrap="square" lIns="0" tIns="0" rIns="0" bIns="0" rtlCol="0" anchor="t"/>
+          <a:lstStyle/>
+          <a:p>
+            <a:pPr algn="ctr" indent="0" marL="0">
+              <a:lnSpc>
+                <a:spcPts val="1800"/>
+              </a:lnSpc>
+              <a:buNone/>
+            </a:pPr>
+            <a:r>
+              <a:rPr lang="en-US" sz="1300" dirty="0">
+                <a:solidFill>
+                  <a:srgbClr val="CFE3DC"/>
+                </a:solidFill>
+                <a:latin typeface="Calibri" pitchFamily="34" charset="0"/>
+                <a:ea typeface="Calibri" pitchFamily="34" charset="-122"/>
+                <a:cs typeface="Calibri" pitchFamily="34" charset="-120"/>
+              </a:rPr>
+              <a:t>imposibles</a:t>
+            </a:r>
+            <a:endParaRPr lang="en-US" sz="1300" dirty="0"/>
+          </a:p>
+          <a:p>
+            <a:pPr algn="ctr" indent="0" marL="0">
+              <a:lnSpc>
+                <a:spcPts val="1800"/>
+              </a:lnSpc>
+              <a:buNone/>
+            </a:pPr>
+            <a:r>
+              <a:rPr lang="en-US" sz="1300" dirty="0">
+                <a:solidFill>
+                  <a:srgbClr val="CFE3DC"/>
+                </a:solidFill>
+                <a:latin typeface="Calibri" pitchFamily="34" charset="0"/>
+                <a:ea typeface="Calibri" pitchFamily="34" charset="-122"/>
+                <a:cs typeface="Calibri" pitchFamily="34" charset="-120"/>
+              </a:rPr>
+              <a:t>de violar</a:t>
+            </a:r>
+            <a:endParaRPr lang="en-US" sz="1300" dirty="0"/>
+          </a:p>
+        </p:txBody>
+      </p:sp>
+      <p:sp>
+        <p:nvSpPr>
+          <p:cNvPr id="8" name="Text 6"/>
+          <p:cNvSpPr txBox="1"/>
+          <p:nvPr/>
+        </p:nvSpPr>
+        <p:spPr>
+          <a:xfrm>
+            <a:off x="6260440" y="2395728"/>
+            <a:ext cx="2480996" cy="1097280"/>
+          </a:xfrm>
+          <a:prstGeom prst="rect">
+            <a:avLst/>
+          </a:prstGeom>
+          <a:noFill/>
+          <a:ln/>
+        </p:spPr>
+        <p:txBody>
+          <a:bodyPr wrap="square" lIns="0" tIns="0" rIns="0" bIns="0" rtlCol="0" anchor="ctr"/>
+          <a:lstStyle/>
+          <a:p>
+            <a:pPr algn="ctr" indent="0" marL="0">
+              <a:buNone/>
+            </a:pPr>
+            <a:r>
+              <a:rPr lang="en-US" sz="6600" b="1" dirty="0">
+                <a:solidFill>
+                  <a:srgbClr val="E8A33D"/>
+                </a:solidFill>
+                <a:latin typeface="Cambria" pitchFamily="34" charset="0"/>
+                <a:ea typeface="Cambria" pitchFamily="34" charset="-122"/>
+                <a:cs typeface="Cambria" pitchFamily="34" charset="-120"/>
+              </a:rPr>
+              <a:t>8</a:t>
+            </a:r>
+            <a:endParaRPr lang="en-US" sz="6600" dirty="0"/>
+          </a:p>
+        </p:txBody>
+      </p:sp>
+      <p:sp>
+        <p:nvSpPr>
+          <p:cNvPr id="9" name="Text 7"/>
+          <p:cNvSpPr txBox="1"/>
+          <p:nvPr/>
+        </p:nvSpPr>
+        <p:spPr>
+          <a:xfrm>
+            <a:off x="6260440" y="3511296"/>
+            <a:ext cx="2480996" cy="731520"/>
+          </a:xfrm>
+          <a:prstGeom prst="rect">
+            <a:avLst/>
+          </a:prstGeom>
+          <a:noFill/>
+          <a:ln/>
+        </p:spPr>
+        <p:txBody>
+          <a:bodyPr wrap="square" lIns="0" tIns="0" rIns="0" bIns="0" rtlCol="0" anchor="t"/>
+          <a:lstStyle/>
+          <a:p>
+            <a:pPr algn="ctr" indent="0" marL="0">
+              <a:lnSpc>
+                <a:spcPts val="1800"/>
+              </a:lnSpc>
+              <a:buNone/>
+            </a:pPr>
+            <a:r>
+              <a:rPr lang="en-US" sz="1300" dirty="0">
+                <a:solidFill>
+                  <a:srgbClr val="CFE3DC"/>
+                </a:solidFill>
+                <a:latin typeface="Calibri" pitchFamily="34" charset="0"/>
+                <a:ea typeface="Calibri" pitchFamily="34" charset="-122"/>
+                <a:cs typeface="Calibri" pitchFamily="34" charset="-120"/>
+              </a:rPr>
+              <a:t>tablas con</a:t>
+            </a:r>
+            <a:endParaRPr lang="en-US" sz="1300" dirty="0"/>
+          </a:p>
+          <a:p>
+            <a:pPr algn="ctr" indent="0" marL="0">
+              <a:lnSpc>
+                <a:spcPts val="1800"/>
+              </a:lnSpc>
+              <a:buNone/>
+            </a:pPr>
+            <a:r>
+              <a:rPr lang="en-US" sz="1300" dirty="0">
+                <a:solidFill>
+                  <a:srgbClr val="CFE3DC"/>
+                </a:solidFill>
+                <a:latin typeface="Calibri" pitchFamily="34" charset="0"/>
+                <a:ea typeface="Calibri" pitchFamily="34" charset="-122"/>
+                <a:cs typeface="Calibri" pitchFamily="34" charset="-120"/>
+              </a:rPr>
+              <a:t>restricciones</a:t>
+            </a:r>
+            <a:endParaRPr lang="en-US" sz="1300" dirty="0"/>
+          </a:p>
+        </p:txBody>
+      </p:sp>
+      <p:sp>
+        <p:nvSpPr>
+          <p:cNvPr id="10" name="Text 8"/>
+          <p:cNvSpPr txBox="1"/>
+          <p:nvPr/>
+        </p:nvSpPr>
+        <p:spPr>
+          <a:xfrm>
+            <a:off x="9070619" y="2395728"/>
+            <a:ext cx="2480996" cy="1097280"/>
+          </a:xfrm>
+          <a:prstGeom prst="rect">
+            <a:avLst/>
+          </a:prstGeom>
+          <a:noFill/>
+          <a:ln/>
+        </p:spPr>
+        <p:txBody>
+          <a:bodyPr wrap="square" lIns="0" tIns="0" rIns="0" bIns="0" rtlCol="0" anchor="ctr"/>
+          <a:lstStyle/>
+          <a:p>
+            <a:pPr algn="ctr" indent="0" marL="0">
+              <a:buNone/>
+            </a:pPr>
+            <a:r>
+              <a:rPr lang="en-US" sz="6600" b="1" dirty="0">
+                <a:solidFill>
+                  <a:srgbClr val="E8A33D"/>
+                </a:solidFill>
+                <a:latin typeface="Cambria" pitchFamily="34" charset="0"/>
+                <a:ea typeface="Cambria" pitchFamily="34" charset="-122"/>
+                <a:cs typeface="Cambria" pitchFamily="34" charset="-120"/>
+              </a:rPr>
+              <a:t>4</a:t>
+            </a:r>
+            <a:endParaRPr lang="en-US" sz="6600" dirty="0"/>
+          </a:p>
+        </p:txBody>
+      </p:sp>
+      <p:sp>
+        <p:nvSpPr>
+          <p:cNvPr id="11" name="Text 9"/>
+          <p:cNvSpPr txBox="1"/>
+          <p:nvPr/>
+        </p:nvSpPr>
+        <p:spPr>
+          <a:xfrm>
+            <a:off x="9070619" y="3511296"/>
+            <a:ext cx="2480996" cy="731520"/>
+          </a:xfrm>
+          <a:prstGeom prst="rect">
+            <a:avLst/>
+          </a:prstGeom>
+          <a:noFill/>
+          <a:ln/>
+        </p:spPr>
+        <p:txBody>
+          <a:bodyPr wrap="square" lIns="0" tIns="0" rIns="0" bIns="0" rtlCol="0" anchor="t"/>
+          <a:lstStyle/>
+          <a:p>
+            <a:pPr algn="ctr" indent="0" marL="0">
+              <a:lnSpc>
+                <a:spcPts val="1800"/>
+              </a:lnSpc>
+              <a:buNone/>
+            </a:pPr>
+            <a:r>
+              <a:rPr lang="en-US" sz="1300" dirty="0">
+                <a:solidFill>
+                  <a:srgbClr val="CFE3DC"/>
+                </a:solidFill>
+                <a:latin typeface="Calibri" pitchFamily="34" charset="0"/>
+                <a:ea typeface="Calibri" pitchFamily="34" charset="-122"/>
+                <a:cs typeface="Calibri" pitchFamily="34" charset="-120"/>
+              </a:rPr>
+              <a:t>capas donde</a:t>
+            </a:r>
+            <a:endParaRPr lang="en-US" sz="1300" dirty="0"/>
+          </a:p>
+          <a:p>
+            <a:pPr algn="ctr" indent="0" marL="0">
+              <a:lnSpc>
+                <a:spcPts val="1800"/>
+              </a:lnSpc>
+              <a:buNone/>
+            </a:pPr>
+            <a:r>
+              <a:rPr lang="en-US" sz="1300" dirty="0">
+                <a:solidFill>
+                  <a:srgbClr val="CFE3DC"/>
+                </a:solidFill>
+                <a:latin typeface="Calibri" pitchFamily="34" charset="0"/>
+                <a:ea typeface="Calibri" pitchFamily="34" charset="-122"/>
+                <a:cs typeface="Calibri" pitchFamily="34" charset="-120"/>
+              </a:rPr>
+              <a:t>se aplican</a:t>
+            </a:r>
+            <a:endParaRPr lang="en-US" sz="1300" dirty="0"/>
+          </a:p>
+        </p:txBody>
+      </p:sp>
+      <p:sp>
+        <p:nvSpPr>
+          <p:cNvPr id="12" name="Text 10"/>
+          <p:cNvSpPr txBox="1"/>
+          <p:nvPr/>
+        </p:nvSpPr>
+        <p:spPr>
+          <a:xfrm>
+            <a:off x="640080" y="4626864"/>
+            <a:ext cx="10911535" cy="365760"/>
+          </a:xfrm>
+          <a:prstGeom prst="rect">
+            <a:avLst/>
+          </a:prstGeom>
+          <a:noFill/>
+          <a:ln/>
+        </p:spPr>
+        <p:txBody>
+          <a:bodyPr wrap="square" lIns="0" tIns="0" rIns="0" bIns="0" rtlCol="0" anchor="ctr"/>
+          <a:lstStyle/>
+          <a:p>
+            <a:pPr indent="0" marL="0">
+              <a:buNone/>
+            </a:pPr>
+            <a:r>
+              <a:rPr lang="en-US" sz="1400" b="1" dirty="0">
+                <a:solidFill>
+                  <a:srgbClr val="E8A33D"/>
+                </a:solidFill>
+                <a:latin typeface="Calibri" pitchFamily="34" charset="0"/>
+                <a:ea typeface="Calibri" pitchFamily="34" charset="-122"/>
+                <a:cs typeface="Calibri" pitchFamily="34" charset="-120"/>
+              </a:rPr>
+              <a:t>Las tres que más pesan</a:t>
+            </a:r>
+            <a:endParaRPr lang="en-US" sz="1400" dirty="0"/>
+          </a:p>
+        </p:txBody>
+      </p:sp>
+      <p:sp>
+        <p:nvSpPr>
+          <p:cNvPr id="13" name="Text 11"/>
+          <p:cNvSpPr txBox="1"/>
+          <p:nvPr/>
+        </p:nvSpPr>
+        <p:spPr>
+          <a:xfrm>
+            <a:off x="640080" y="4992624"/>
+            <a:ext cx="10911535" cy="457200"/>
+          </a:xfrm>
+          <a:prstGeom prst="rect">
+            <a:avLst/>
+          </a:prstGeom>
+          <a:noFill/>
+          <a:ln/>
+        </p:spPr>
+        <p:txBody>
+          <a:bodyPr wrap="square" lIns="0" tIns="0" rIns="0" bIns="0" rtlCol="0" anchor="ctr"/>
+          <a:lstStyle/>
+          <a:p>
+            <a:pPr indent="0" marL="0">
+              <a:buNone/>
+            </a:pPr>
+            <a:r>
+              <a:rPr lang="en-US" sz="1300" b="1" dirty="0">
+                <a:solidFill>
+                  <a:srgbClr val="FFFFFF"/>
+                </a:solidFill>
+                <a:latin typeface="Courier New" pitchFamily="34" charset="0"/>
+                <a:ea typeface="Courier New" pitchFamily="34" charset="-122"/>
+                <a:cs typeface="Courier New" pitchFamily="34" charset="-120"/>
+              </a:rPr>
+              <a:t xml:space="preserve">RN-07  </a:t>
+            </a:r>
+            <a:pPr indent="0" marL="0">
+              <a:buNone/>
+            </a:pPr>
+            <a:r>
+              <a:rPr lang="en-US" sz="1300" dirty="0">
+                <a:solidFill>
+                  <a:srgbClr val="CFE3DC"/>
+                </a:solidFill>
+                <a:latin typeface="Calibri" pitchFamily="34" charset="0"/>
+                <a:ea typeface="Calibri" pitchFamily="34" charset="-122"/>
+                <a:cs typeface="Calibri" pitchFamily="34" charset="-120"/>
+              </a:rPr>
+              <a:t xml:space="preserve">el inventario nunca queda en negativo    </a:t>
+            </a:r>
+            <a:pPr indent="0" marL="0">
+              <a:buNone/>
+            </a:pPr>
+            <a:r>
+              <a:rPr lang="en-US" sz="1300" b="1" dirty="0">
+                <a:solidFill>
+                  <a:srgbClr val="FFFFFF"/>
+                </a:solidFill>
+                <a:latin typeface="Courier New" pitchFamily="34" charset="0"/>
+                <a:ea typeface="Courier New" pitchFamily="34" charset="-122"/>
+                <a:cs typeface="Courier New" pitchFamily="34" charset="-120"/>
+              </a:rPr>
+              <a:t xml:space="preserve">RN-12  </a:t>
+            </a:r>
+            <a:pPr indent="0" marL="0">
+              <a:buNone/>
+            </a:pPr>
+            <a:r>
+              <a:rPr lang="en-US" sz="1300" dirty="0">
+                <a:solidFill>
+                  <a:srgbClr val="CFE3DC"/>
+                </a:solidFill>
+                <a:latin typeface="Calibri" pitchFamily="34" charset="0"/>
+                <a:ea typeface="Calibri" pitchFamily="34" charset="-122"/>
+                <a:cs typeface="Calibri" pitchFamily="34" charset="-120"/>
+              </a:rPr>
+              <a:t xml:space="preserve">sin stock no hay pedido    </a:t>
+            </a:r>
+            <a:pPr indent="0" marL="0">
+              <a:buNone/>
+            </a:pPr>
+            <a:r>
+              <a:rPr lang="en-US" sz="1300" b="1" dirty="0">
+                <a:solidFill>
+                  <a:srgbClr val="FFFFFF"/>
+                </a:solidFill>
+                <a:latin typeface="Courier New" pitchFamily="34" charset="0"/>
+                <a:ea typeface="Courier New" pitchFamily="34" charset="-122"/>
+                <a:cs typeface="Courier New" pitchFamily="34" charset="-120"/>
+              </a:rPr>
+              <a:t xml:space="preserve">RN-17  </a:t>
+            </a:r>
+            <a:pPr indent="0" marL="0">
+              <a:buNone/>
+            </a:pPr>
+            <a:r>
+              <a:rPr lang="en-US" sz="1300" dirty="0">
+                <a:solidFill>
+                  <a:srgbClr val="CFE3DC"/>
+                </a:solidFill>
+                <a:latin typeface="Calibri" pitchFamily="34" charset="0"/>
+                <a:ea typeface="Calibri" pitchFamily="34" charset="-122"/>
+                <a:cs typeface="Calibri" pitchFamily="34" charset="-120"/>
+              </a:rPr>
+              <a:t>un veterinario no se duplica en la agenda</a:t>
+            </a:r>
+            <a:endParaRPr lang="en-US" sz="1300" dirty="0"/>
+          </a:p>
+        </p:txBody>
+      </p:sp>
+      <p:sp>
+        <p:nvSpPr>
+          <p:cNvPr id="14" name="Text 12"/>
+          <p:cNvSpPr txBox="1"/>
+          <p:nvPr/>
+        </p:nvSpPr>
+        <p:spPr>
+          <a:xfrm>
+            <a:off x="640080" y="6035040"/>
+            <a:ext cx="10911535" cy="310896"/>
+          </a:xfrm>
+          <a:prstGeom prst="rect">
+            <a:avLst/>
+          </a:prstGeom>
+          <a:noFill/>
+          <a:ln/>
+        </p:spPr>
+        <p:txBody>
+          <a:bodyPr wrap="square" lIns="0" tIns="0" rIns="0" bIns="0" rtlCol="0" anchor="ctr"/>
+          <a:lstStyle/>
+          <a:p>
+            <a:pPr indent="0" marL="0">
+              <a:buNone/>
+            </a:pPr>
+            <a:r>
+              <a:rPr lang="en-US" sz="1100" i="1" dirty="0">
+                <a:solidFill>
+                  <a:srgbClr val="CFE3DC"/>
+                </a:solidFill>
+                <a:latin typeface="Calibri" pitchFamily="34" charset="0"/>
+                <a:ea typeface="Calibri" pitchFamily="34" charset="-122"/>
+                <a:cs typeface="Calibri" pitchFamily="34" charset="-120"/>
+              </a:rPr>
+              <a:t>Equipo 4  ·  Curso de E-business  ·  VetPet Surco E.I.R.L.  ·  Lima, 2026</a:t>
+            </a:r>
+            <a:endParaRPr lang="en-US" sz="1100" dirty="0"/>
+          </a:p>
+        </p:txBody>
+      </p:sp>
+    </p:spTree>
+  </p:cSld>
+  <p:clrMapOvr>
+    <a:masterClrMapping/>
+  </p:clrMapOvr>
+</p:sld>
+</file>
+
 <file path=ppt/slides/slide3.xml><?xml version="1.0" encoding="utf-8"?>
 <p:sld xmlns:a="http://schemas.openxmlformats.org/drawingml/2006/main" xmlns:r="http://schemas.openxmlformats.org/officeDocument/2006/relationships" xmlns:p="http://schemas.openxmlformats.org/presentationml/2006/main">
   <p:cSld name="Slide 3">
@@ -12893,7 +17091,7 @@
                 <a:ea typeface="Cambria" pitchFamily="34" charset="-122"/>
                 <a:cs typeface="Cambria" pitchFamily="34" charset="-120"/>
               </a:rPr>
-              <a:t>Dónde se hace cumplir cada regla</a:t>
+              <a:t>En pantalla: Ingreso a la plataforma</a:t>
             </a:r>
             <a:endParaRPr lang="en-US" sz="3400" dirty="0"/>
           </a:p>
@@ -12932,28 +17130,36 @@
                 <a:ea typeface="Calibri" pitchFamily="34" charset="-122"/>
                 <a:cs typeface="Calibri" pitchFamily="34" charset="-120"/>
               </a:rPr>
-              <a:t>El reparto de las 20 reglas entre las cuatro capas del sistema</a:t>
+              <a:t>Cada cuenta entra con un solo rol y ve únicamente sus módulos</a:t>
             </a:r>
             <a:endParaRPr lang="en-US" sz="1400" dirty="0"/>
           </a:p>
         </p:txBody>
       </p:sp>
-      <p:graphicFrame>
-        <p:nvGraphicFramePr>
-          <p:cNvPr id="4" name="Chart 0" descr=""/>
-          <p:cNvGraphicFramePr/>
-          <p:nvPr/>
-        </p:nvGraphicFramePr>
-        <p:xfrm>
-          <a:off x="640080" y="1664208"/>
-          <a:ext cx="6766560" cy="4114800"/>
-        </p:xfrm>
-        <a:graphic xmlns:a="http://schemas.openxmlformats.org/drawingml/2006/main">
-          <a:graphicData uri="http://schemas.openxmlformats.org/drawingml/2006/chart">
-            <c:chart xmlns:c="http://schemas.openxmlformats.org/drawingml/2006/chart" r:id="rId1"/>
-          </a:graphicData>
-        </a:graphic>
-      </p:graphicFrame>
+      <p:pic>
+        <p:nvPicPr>
+          <p:cNvPr id="4" name="Image 0" descr="/tmp/claude-0/-home-user-VetPetSurco/b8d13659-c8d7-578f-913d-52522fae5ff2/scratchpad/ppt/capturas/01-ingreso.png">    </p:cNvPr>
+          <p:cNvPicPr>
+            <a:picLocks noChangeAspect="1"/>
+          </p:cNvPicPr>
+          <p:nvPr/>
+        </p:nvPicPr>
+        <p:blipFill>
+          <a:blip r:embed="rId1"/>
+          <a:stretch>
+            <a:fillRect/>
+          </a:stretch>
+        </p:blipFill>
+        <p:spPr>
+          <a:xfrm>
+            <a:off x="3531107" y="1627632"/>
+            <a:ext cx="1807467" cy="4498848"/>
+          </a:xfrm>
+          <a:prstGeom prst="rect">
+            <a:avLst/>
+          </a:prstGeom>
+        </p:spPr>
+      </p:pic>
       <p:sp>
         <p:nvSpPr>
           <p:cNvPr id="5" name="Text 2"/>
@@ -12962,47 +17168,113 @@
         </p:nvSpPr>
         <p:spPr>
           <a:xfrm>
-            <a:off x="7726680" y="1700784"/>
-            <a:ext cx="3840480" cy="786384"/>
-          </a:xfrm>
-          <a:prstGeom prst="rect">
-            <a:avLst/>
-          </a:prstGeom>
-          <a:noFill/>
-          <a:ln/>
-        </p:spPr>
-        <p:txBody>
-          <a:bodyPr wrap="square" lIns="0" tIns="0" rIns="0" bIns="0" rtlCol="0" anchor="ctr"/>
-          <a:lstStyle/>
-          <a:p>
-            <a:pPr indent="0" marL="0">
-              <a:buNone/>
-            </a:pPr>
-            <a:r>
-              <a:rPr lang="en-US" sz="4600" b="1" dirty="0">
-                <a:solidFill>
-                  <a:srgbClr val="E8A33D"/>
+            <a:off x="8485632" y="1645920"/>
+            <a:ext cx="3108960" cy="347472"/>
+          </a:xfrm>
+          <a:prstGeom prst="rect">
+            <a:avLst/>
+          </a:prstGeom>
+          <a:noFill/>
+          <a:ln/>
+        </p:spPr>
+        <p:txBody>
+          <a:bodyPr wrap="square" lIns="0" tIns="0" rIns="0" bIns="0" rtlCol="0" anchor="ctr"/>
+          <a:lstStyle/>
+          <a:p>
+            <a:pPr indent="0" marL="0">
+              <a:buNone/>
+            </a:pPr>
+            <a:r>
+              <a:rPr lang="en-US" sz="1600" b="1" dirty="0">
+                <a:solidFill>
+                  <a:srgbClr val="14524A"/>
                 </a:solidFill>
                 <a:latin typeface="Cambria" pitchFamily="34" charset="0"/>
                 <a:ea typeface="Cambria" pitchFamily="34" charset="-122"/>
                 <a:cs typeface="Cambria" pitchFamily="34" charset="-120"/>
               </a:rPr>
-              <a:t>14 de 20</a:t>
-            </a:r>
-            <a:endParaRPr lang="en-US" sz="4600" dirty="0"/>
-          </a:p>
-        </p:txBody>
-      </p:sp>
-      <p:sp>
-        <p:nvSpPr>
-          <p:cNvPr id="6" name="Text 3"/>
-          <p:cNvSpPr txBox="1"/>
-          <p:nvPr/>
-        </p:nvSpPr>
-        <p:spPr>
-          <a:xfrm>
-            <a:off x="7726680" y="2523744"/>
-            <a:ext cx="3840480" cy="731520"/>
+              <a:t>Reglas enmarcadas</a:t>
+            </a:r>
+            <a:endParaRPr lang="en-US" sz="1600" dirty="0"/>
+          </a:p>
+        </p:txBody>
+      </p:sp>
+      <p:sp>
+        <p:nvSpPr>
+          <p:cNvPr id="6" name="Shape 3"/>
+          <p:cNvSpPr/>
+          <p:nvPr/>
+        </p:nvSpPr>
+        <p:spPr>
+          <a:xfrm>
+            <a:off x="8485632" y="2157984"/>
+            <a:ext cx="841248" cy="329184"/>
+          </a:xfrm>
+          <a:prstGeom prst="roundRect">
+            <a:avLst>
+              <a:gd name="adj" fmla="val 138889"/>
+            </a:avLst>
+          </a:prstGeom>
+          <a:solidFill>
+            <a:srgbClr val="E8A33D"/>
+          </a:solidFill>
+          <a:ln w="12700">
+            <a:solidFill>
+              <a:srgbClr val="E8A33D"/>
+            </a:solidFill>
+            <a:prstDash val="solid"/>
+          </a:ln>
+        </p:spPr>
+      </p:sp>
+      <p:sp>
+        <p:nvSpPr>
+          <p:cNvPr id="7" name="Text 4"/>
+          <p:cNvSpPr txBox="1"/>
+          <p:nvPr/>
+        </p:nvSpPr>
+        <p:spPr>
+          <a:xfrm>
+            <a:off x="8485632" y="2157984"/>
+            <a:ext cx="841248" cy="329184"/>
+          </a:xfrm>
+          <a:prstGeom prst="rect">
+            <a:avLst/>
+          </a:prstGeom>
+          <a:noFill/>
+          <a:ln/>
+        </p:spPr>
+        <p:txBody>
+          <a:bodyPr wrap="square" lIns="0" tIns="0" rIns="0" bIns="0" rtlCol="0" anchor="ctr"/>
+          <a:lstStyle/>
+          <a:p>
+            <a:pPr algn="ctr" indent="0" marL="0">
+              <a:buNone/>
+            </a:pPr>
+            <a:r>
+              <a:rPr lang="en-US" sz="1050" b="1" dirty="0">
+                <a:solidFill>
+                  <a:srgbClr val="14524A"/>
+                </a:solidFill>
+                <a:latin typeface="Calibri" pitchFamily="34" charset="0"/>
+                <a:ea typeface="Calibri" pitchFamily="34" charset="-122"/>
+                <a:cs typeface="Calibri" pitchFamily="34" charset="-120"/>
+              </a:rPr>
+              <a:t>RN-01</a:t>
+            </a:r>
+            <a:endParaRPr lang="en-US" sz="1050" dirty="0"/>
+          </a:p>
+        </p:txBody>
+      </p:sp>
+      <p:sp>
+        <p:nvSpPr>
+          <p:cNvPr id="8" name="Text 5"/>
+          <p:cNvSpPr txBox="1"/>
+          <p:nvPr/>
+        </p:nvSpPr>
+        <p:spPr>
+          <a:xfrm>
+            <a:off x="8485632" y="2560320"/>
+            <a:ext cx="3108960" cy="603504"/>
           </a:xfrm>
           <a:prstGeom prst="rect">
             <a:avLst/>
@@ -13018,7 +17290,73 @@
               <a:buNone/>
             </a:pPr>
             <a:r>
-              <a:rPr lang="en-US" sz="1350" b="1" dirty="0">
+              <a:rPr lang="en-US" sz="1150" dirty="0">
+                <a:solidFill>
+                  <a:srgbClr val="5D6B66"/>
+                </a:solidFill>
+                <a:latin typeface="Calibri" pitchFamily="34" charset="0"/>
+                <a:ea typeface="Calibri" pitchFamily="34" charset="-122"/>
+                <a:cs typeface="Calibri" pitchFamily="34" charset="-120"/>
+              </a:rPr>
+              <a:t>El rol de la sesión decide qué módulos aparecen en el menú.</a:t>
+            </a:r>
+            <a:endParaRPr lang="en-US" sz="1150" dirty="0"/>
+          </a:p>
+        </p:txBody>
+      </p:sp>
+      <p:sp>
+        <p:nvSpPr>
+          <p:cNvPr id="9" name="Shape 6"/>
+          <p:cNvSpPr/>
+          <p:nvPr/>
+        </p:nvSpPr>
+        <p:spPr>
+          <a:xfrm>
+            <a:off x="8485632" y="3182112"/>
+            <a:ext cx="841248" cy="329184"/>
+          </a:xfrm>
+          <a:prstGeom prst="roundRect">
+            <a:avLst>
+              <a:gd name="adj" fmla="val 138889"/>
+            </a:avLst>
+          </a:prstGeom>
+          <a:solidFill>
+            <a:srgbClr val="E8A33D"/>
+          </a:solidFill>
+          <a:ln w="12700">
+            <a:solidFill>
+              <a:srgbClr val="E8A33D"/>
+            </a:solidFill>
+            <a:prstDash val="solid"/>
+          </a:ln>
+        </p:spPr>
+      </p:sp>
+      <p:sp>
+        <p:nvSpPr>
+          <p:cNvPr id="10" name="Text 7"/>
+          <p:cNvSpPr txBox="1"/>
+          <p:nvPr/>
+        </p:nvSpPr>
+        <p:spPr>
+          <a:xfrm>
+            <a:off x="8485632" y="3182112"/>
+            <a:ext cx="841248" cy="329184"/>
+          </a:xfrm>
+          <a:prstGeom prst="rect">
+            <a:avLst/>
+          </a:prstGeom>
+          <a:noFill/>
+          <a:ln/>
+        </p:spPr>
+        <p:txBody>
+          <a:bodyPr wrap="square" lIns="0" tIns="0" rIns="0" bIns="0" rtlCol="0" anchor="ctr"/>
+          <a:lstStyle/>
+          <a:p>
+            <a:pPr algn="ctr" indent="0" marL="0">
+              <a:buNone/>
+            </a:pPr>
+            <a:r>
+              <a:rPr lang="en-US" sz="1050" b="1" dirty="0">
                 <a:solidFill>
                   <a:srgbClr val="14524A"/>
                 </a:solidFill>
@@ -13026,61 +17364,22 @@
                 <a:ea typeface="Calibri" pitchFamily="34" charset="-122"/>
                 <a:cs typeface="Calibri" pitchFamily="34" charset="-120"/>
               </a:rPr>
-              <a:t>reglas son imposibles de violar, incluso si alguien escribe directo en la base de datos</a:t>
-            </a:r>
-            <a:endParaRPr lang="en-US" sz="1350" dirty="0"/>
-          </a:p>
-        </p:txBody>
-      </p:sp>
-      <p:sp>
-        <p:nvSpPr>
-          <p:cNvPr id="7" name="Text 4"/>
-          <p:cNvSpPr txBox="1"/>
-          <p:nvPr/>
-        </p:nvSpPr>
-        <p:spPr>
-          <a:xfrm>
-            <a:off x="7726680" y="3456432"/>
-            <a:ext cx="3840480" cy="274320"/>
-          </a:xfrm>
-          <a:prstGeom prst="rect">
-            <a:avLst/>
-          </a:prstGeom>
-          <a:noFill/>
-          <a:ln/>
-        </p:spPr>
-        <p:txBody>
-          <a:bodyPr wrap="square" lIns="0" tIns="0" rIns="0" bIns="0" rtlCol="0" anchor="ctr"/>
-          <a:lstStyle/>
-          <a:p>
-            <a:pPr indent="0" marL="0">
-              <a:buNone/>
-            </a:pPr>
-            <a:r>
-              <a:rPr lang="en-US" sz="1300" b="1" dirty="0">
-                <a:solidFill>
-                  <a:srgbClr val="2C7A6B"/>
-                </a:solidFill>
-                <a:latin typeface="Calibri" pitchFamily="34" charset="0"/>
-                <a:ea typeface="Calibri" pitchFamily="34" charset="-122"/>
-                <a:cs typeface="Calibri" pitchFamily="34" charset="-120"/>
-              </a:rPr>
-              <a:t>17 de 20</a:t>
-            </a:r>
-            <a:endParaRPr lang="en-US" sz="1300" dirty="0"/>
-          </a:p>
-        </p:txBody>
-      </p:sp>
-      <p:sp>
-        <p:nvSpPr>
-          <p:cNvPr id="8" name="Text 5"/>
-          <p:cNvSpPr txBox="1"/>
-          <p:nvPr/>
-        </p:nvSpPr>
-        <p:spPr>
-          <a:xfrm>
-            <a:off x="7726680" y="3730752"/>
-            <a:ext cx="3840480" cy="548640"/>
+              <a:t>RN-02</a:t>
+            </a:r>
+            <a:endParaRPr lang="en-US" sz="1050" dirty="0"/>
+          </a:p>
+        </p:txBody>
+      </p:sp>
+      <p:sp>
+        <p:nvSpPr>
+          <p:cNvPr id="11" name="Text 8"/>
+          <p:cNvSpPr txBox="1"/>
+          <p:nvPr/>
+        </p:nvSpPr>
+        <p:spPr>
+          <a:xfrm>
+            <a:off x="8485632" y="3584448"/>
+            <a:ext cx="3108960" cy="603504"/>
           </a:xfrm>
           <a:prstGeom prst="rect">
             <a:avLst/>
@@ -13096,7 +17395,7 @@
               <a:buNone/>
             </a:pPr>
             <a:r>
-              <a:rPr lang="en-US" sz="1100" dirty="0">
+              <a:rPr lang="en-US" sz="1150" dirty="0">
                 <a:solidFill>
                   <a:srgbClr val="5D6B66"/>
                 </a:solidFill>
@@ -13104,61 +17403,88 @@
                 <a:ea typeface="Calibri" pitchFamily="34" charset="-122"/>
                 <a:cs typeface="Calibri" pitchFamily="34" charset="-120"/>
               </a:rPr>
-              <a:t>quedan fuera del alcance de la aplicación: viven en el motor, en una vista o en el procedimiento.</a:t>
-            </a:r>
-            <a:endParaRPr lang="en-US" sz="1100" dirty="0"/>
-          </a:p>
-        </p:txBody>
-      </p:sp>
-      <p:sp>
-        <p:nvSpPr>
-          <p:cNvPr id="9" name="Text 6"/>
-          <p:cNvSpPr txBox="1"/>
-          <p:nvPr/>
-        </p:nvSpPr>
-        <p:spPr>
-          <a:xfrm>
-            <a:off x="7726680" y="4315968"/>
-            <a:ext cx="3840480" cy="274320"/>
-          </a:xfrm>
-          <a:prstGeom prst="rect">
-            <a:avLst/>
-          </a:prstGeom>
-          <a:noFill/>
-          <a:ln/>
-        </p:spPr>
-        <p:txBody>
-          <a:bodyPr wrap="square" lIns="0" tIns="0" rIns="0" bIns="0" rtlCol="0" anchor="ctr"/>
-          <a:lstStyle/>
-          <a:p>
-            <a:pPr indent="0" marL="0">
-              <a:buNone/>
-            </a:pPr>
-            <a:r>
-              <a:rPr lang="en-US" sz="1300" b="1" dirty="0">
-                <a:solidFill>
-                  <a:srgbClr val="2C7A6B"/>
-                </a:solidFill>
-                <a:latin typeface="Calibri" pitchFamily="34" charset="0"/>
-                <a:ea typeface="Calibri" pitchFamily="34" charset="-122"/>
-                <a:cs typeface="Calibri" pitchFamily="34" charset="-120"/>
-              </a:rPr>
-              <a:t>2 reglas</a:t>
-            </a:r>
-            <a:endParaRPr lang="en-US" sz="1300" dirty="0"/>
-          </a:p>
-        </p:txBody>
-      </p:sp>
-      <p:sp>
-        <p:nvSpPr>
-          <p:cNvPr id="10" name="Text 7"/>
-          <p:cNvSpPr txBox="1"/>
-          <p:nvPr/>
-        </p:nvSpPr>
-        <p:spPr>
-          <a:xfrm>
-            <a:off x="7726680" y="4590288"/>
-            <a:ext cx="3840480" cy="548640"/>
+              <a:t>El registro rechaza un correo que ya tiene cuenta.</a:t>
+            </a:r>
+            <a:endParaRPr lang="en-US" sz="1150" dirty="0"/>
+          </a:p>
+        </p:txBody>
+      </p:sp>
+      <p:sp>
+        <p:nvSpPr>
+          <p:cNvPr id="12" name="Shape 9"/>
+          <p:cNvSpPr/>
+          <p:nvPr/>
+        </p:nvSpPr>
+        <p:spPr>
+          <a:xfrm>
+            <a:off x="8485632" y="4206240"/>
+            <a:ext cx="841248" cy="329184"/>
+          </a:xfrm>
+          <a:prstGeom prst="roundRect">
+            <a:avLst>
+              <a:gd name="adj" fmla="val 138889"/>
+            </a:avLst>
+          </a:prstGeom>
+          <a:solidFill>
+            <a:srgbClr val="E8A33D"/>
+          </a:solidFill>
+          <a:ln w="12700">
+            <a:solidFill>
+              <a:srgbClr val="E8A33D"/>
+            </a:solidFill>
+            <a:prstDash val="solid"/>
+          </a:ln>
+        </p:spPr>
+      </p:sp>
+      <p:sp>
+        <p:nvSpPr>
+          <p:cNvPr id="13" name="Text 10"/>
+          <p:cNvSpPr txBox="1"/>
+          <p:nvPr/>
+        </p:nvSpPr>
+        <p:spPr>
+          <a:xfrm>
+            <a:off x="8485632" y="4206240"/>
+            <a:ext cx="841248" cy="329184"/>
+          </a:xfrm>
+          <a:prstGeom prst="rect">
+            <a:avLst/>
+          </a:prstGeom>
+          <a:noFill/>
+          <a:ln/>
+        </p:spPr>
+        <p:txBody>
+          <a:bodyPr wrap="square" lIns="0" tIns="0" rIns="0" bIns="0" rtlCol="0" anchor="ctr"/>
+          <a:lstStyle/>
+          <a:p>
+            <a:pPr algn="ctr" indent="0" marL="0">
+              <a:buNone/>
+            </a:pPr>
+            <a:r>
+              <a:rPr lang="en-US" sz="1050" b="1" dirty="0">
+                <a:solidFill>
+                  <a:srgbClr val="14524A"/>
+                </a:solidFill>
+                <a:latin typeface="Calibri" pitchFamily="34" charset="0"/>
+                <a:ea typeface="Calibri" pitchFamily="34" charset="-122"/>
+                <a:cs typeface="Calibri" pitchFamily="34" charset="-120"/>
+              </a:rPr>
+              <a:t>RN-03</a:t>
+            </a:r>
+            <a:endParaRPr lang="en-US" sz="1050" dirty="0"/>
+          </a:p>
+        </p:txBody>
+      </p:sp>
+      <p:sp>
+        <p:nvSpPr>
+          <p:cNvPr id="14" name="Text 11"/>
+          <p:cNvSpPr txBox="1"/>
+          <p:nvPr/>
+        </p:nvSpPr>
+        <p:spPr>
+          <a:xfrm>
+            <a:off x="8485632" y="4608576"/>
+            <a:ext cx="3108960" cy="603504"/>
           </a:xfrm>
           <a:prstGeom prst="rect">
             <a:avLst/>
@@ -13174,7 +17500,7 @@
               <a:buNone/>
             </a:pPr>
             <a:r>
-              <a:rPr lang="en-US" sz="1100" dirty="0">
+              <a:rPr lang="en-US" sz="1150" dirty="0">
                 <a:solidFill>
                   <a:srgbClr val="5D6B66"/>
                 </a:solidFill>
@@ -13182,87 +17508,9 @@
                 <a:ea typeface="Calibri" pitchFamily="34" charset="-122"/>
                 <a:cs typeface="Calibri" pitchFamily="34" charset="-120"/>
               </a:rPr>
-              <a:t>se validan dos veces a propósito: en Java para el mensaje y en la base de datos por seguridad.</a:t>
-            </a:r>
-            <a:endParaRPr lang="en-US" sz="1100" dirty="0"/>
-          </a:p>
-        </p:txBody>
-      </p:sp>
-      <p:sp>
-        <p:nvSpPr>
-          <p:cNvPr id="11" name="Text 8"/>
-          <p:cNvSpPr txBox="1"/>
-          <p:nvPr/>
-        </p:nvSpPr>
-        <p:spPr>
-          <a:xfrm>
-            <a:off x="7726680" y="5175504"/>
-            <a:ext cx="3840480" cy="274320"/>
-          </a:xfrm>
-          <a:prstGeom prst="rect">
-            <a:avLst/>
-          </a:prstGeom>
-          <a:noFill/>
-          <a:ln/>
-        </p:spPr>
-        <p:txBody>
-          <a:bodyPr wrap="square" lIns="0" tIns="0" rIns="0" bIns="0" rtlCol="0" anchor="ctr"/>
-          <a:lstStyle/>
-          <a:p>
-            <a:pPr indent="0" marL="0">
-              <a:buNone/>
-            </a:pPr>
-            <a:r>
-              <a:rPr lang="en-US" sz="1300" b="1" dirty="0">
-                <a:solidFill>
-                  <a:srgbClr val="2C7A6B"/>
-                </a:solidFill>
-                <a:latin typeface="Calibri" pitchFamily="34" charset="0"/>
-                <a:ea typeface="Calibri" pitchFamily="34" charset="-122"/>
-                <a:cs typeface="Calibri" pitchFamily="34" charset="-120"/>
-              </a:rPr>
-              <a:t>1 sola regla</a:t>
-            </a:r>
-            <a:endParaRPr lang="en-US" sz="1300" dirty="0"/>
-          </a:p>
-        </p:txBody>
-      </p:sp>
-      <p:sp>
-        <p:nvSpPr>
-          <p:cNvPr id="12" name="Text 9"/>
-          <p:cNvSpPr txBox="1"/>
-          <p:nvPr/>
-        </p:nvSpPr>
-        <p:spPr>
-          <a:xfrm>
-            <a:off x="7726680" y="5449824"/>
-            <a:ext cx="3840480" cy="548640"/>
-          </a:xfrm>
-          <a:prstGeom prst="rect">
-            <a:avLst/>
-          </a:prstGeom>
-          <a:noFill/>
-          <a:ln/>
-        </p:spPr>
-        <p:txBody>
-          <a:bodyPr wrap="square" lIns="0" tIns="0" rIns="0" bIns="0" rtlCol="0" anchor="t"/>
-          <a:lstStyle/>
-          <a:p>
-            <a:pPr indent="0" marL="0">
-              <a:buNone/>
-            </a:pPr>
-            <a:r>
-              <a:rPr lang="en-US" sz="1100" dirty="0">
-                <a:solidFill>
-                  <a:srgbClr val="5D6B66"/>
-                </a:solidFill>
-                <a:latin typeface="Calibri" pitchFamily="34" charset="0"/>
-                <a:ea typeface="Calibri" pitchFamily="34" charset="-122"/>
-                <a:cs typeface="Calibri" pitchFamily="34" charset="-120"/>
-              </a:rPr>
-              <a:t>depende únicamente del código: el hash de la contraseña, que se calcula antes de guardar.</a:t>
-            </a:r>
-            <a:endParaRPr lang="en-US" sz="1100" dirty="0"/>
+              <a:t>Se guarda el hash; la contraseña escrita nunca se almacena.</a:t>
+            </a:r>
+            <a:endParaRPr lang="en-US" sz="1150" dirty="0"/>
           </a:p>
         </p:txBody>
       </p:sp>
